--- a/slides/fp-in-go-workshop.pptx
+++ b/slides/fp-in-go-workshop.pptx
@@ -19,6 +19,9 @@
     <p:sldId id="267" r:id="rId19"/>
     <p:sldId id="268" r:id="rId20"/>
     <p:sldId id="269" r:id="rId21"/>
+    <p:sldId id="270" r:id="rId22"/>
+    <p:sldId id="271" r:id="rId23"/>
+    <p:sldId id="272" r:id="rId24"/>
   </p:sldIdLst>
   <p:sldSz cx="12191695" cy="6858000" type="screen4x3"/>
   <p:notesSz cx="6858000" cy="9144000"/>
@@ -515,7 +518,7 @@
           <a:lstStyle/>
           <a:p>
             <a:r>
-              <a:t>เปิดด้วยคำถาม: เคยแก้ bug ที่โค้ด 'รันครั้งที่สองผลไม่เหมือนครั้งแรก' ไหม? — นั่นคือ action ที่หลุดมาปน calculation ทั้งงานนี้ไม่พูด monad/functor เลย โค้ดทั้งหมดอยู่ที่ ~/src/go-fp รัน go test ./... ได้หมด</a:t>
+              <a:t>[0:00] เปิดด้วยคำถาม: เคยแก้ bug ที่โค้ด 'รันครั้งที่สองผลไม่เหมือนครั้งแรก' ไหม? — นั่นคือ action ที่หลุดมาปน calculation ทั้งงานไม่พูด monad/functor เลย (ใครถามเรื่อง Haskell/monad เลื่อนไปตอบท้ายชั่วโมง)</a:t>
             </a:r>
           </a:p>
         </p:txBody>
@@ -585,7 +588,7 @@
           <a:lstStyle/>
           <a:p>
             <a:r>
-              <a:t>โค้ดเต็ม + httptest อยู่ go-fp/06-middleware ถ้าเวลาเหลือน้อยกว่า 15 นาที ณ จุดนี้ ให้ตัดเลย — พูดประโยคเดียว: 'middleware ก็คือการเอาฟังก์ชันมาคู่กัน แล้วลำดับมีความหมาย' แล้วข้าม</a:t>
+              <a:t>[0:52] แนะให้เปิด fp_test.go เป็นตัวอย่าง TDD — เขียนเทสต์ก่อนแล้วเห็นลายเซ็น generic ทีละขั้น ใครถาม performance: for loop ตรง ๆ ชนะเสมอ ไม่มี magic</a:t>
             </a:r>
           </a:p>
         </p:txBody>
@@ -655,7 +658,7 @@
           <a:lstStyle/>
           <a:p>
             <a:r>
-              <a:t>เดินดูรอบห้อง จุดพลาดที่เจอบ่อย: (1) ลืมรักษาลำดับคูปองเดิม (2) คนที่ return slice ใหม่แต่ mutate element ข้างใน — ถามว่า pure จริงไหม (3) ฝั่ง action บางคนยังเอาการหา coupon ไปแอบใส่ ย้ำ: exercise เวอร์ชันเต็มอยู่ใน EXERCISE.md ให้ผู้เรียนเปิดตามได้</a:t>
+              <a:t>[1:05] aha moment ของวัน: คนที่ใช้ zap.New(...WithFields) มาตลอดจะเห็นว่ามันคือ pattern เดียวกับ Adder/Curry2 เพิ่งเรียน — เดินหน้านี้สั้น ๆ แล้วไป middleware</a:t>
             </a:r>
           </a:p>
         </p:txBody>
@@ -725,7 +728,7 @@
           <a:lstStyle/>
           <a:p>
             <a:r>
-              <a:t>เฉลยสั้น ๆ แล้วโชว์ iter.Seq เป็นของหวาน: range-over-func ทำให้ infinite sequence เขียนได้ปลอดภัยเพราะ yield คืน false ได้ (ผู้บริโภคสั่งหยุด) อย่าลืมบอกว่า int overflow ถ้าดันอ่านไกล — ของจริงไม่มีอะไร infinite</a:t>
+              <a:t>[1:10] ถ้าเวลาเหลือน้อยกว่า 15 นาที ณ จุดนี้ ตัดหน้านี้ทั้งหน้าได้ (พูดประโยคเดียว: 'middleware คือการเอาฟังก์ชันมาคู่กัน ลำดับมีความหมาย') แล้วกระโดดไป workshop — ไม่กระทบเรื่องเล่า</a:t>
             </a:r>
           </a:p>
         </p:txBody>
@@ -795,7 +798,7 @@
           <a:lstStyle/>
           <a:p>
             <a:r>
-              <a:t>ปิดด้วย call to action: สัปดาห์หน้าลองหยิบ handler ใน service ตัวเองมา 1 ตัว แยก ACD แล้วดึง calculation ออกมา 1 ชิ้น — ทำ 15 นาทีก็คุ้ม</a:t>
+              <a:t>[1:25] เดินดูรอบห้อง จุดพลาดบ่อย: (1) ลืมรักษาลำดับคูปองเดิม (2) return slice ใหม่แต่ mutate element ข้างใน — ถามกลับว่า pure จริงไหม (3) แอบเอาการหา coupon ใส่ action อีกที ผู้เรียนเปิด EXERCISE.md ตามได้</a:t>
             </a:r>
           </a:p>
         </p:txBody>
@@ -865,7 +868,217 @@
           <a:lstStyle/>
           <a:p>
             <a:r>
-              <a:t>เผื่อ Q&amp;A: คำถามที่น่าจะโผล่ — (1) ทำไม Go ไม่มี pipe operator → verbose by design + error ทำ chain ยาก (2) copy-on-write แพงไหม → benchmark ใน go-fp/08: struct เล็กต่างกัน ~0.05 ns/op (3) goroutine/channel เข้ากรอบไหน → channel คือ data, การส่ง/รับคือ action</a:t>
+              <a:t>[1:43] เฉลยสั้น ๆ จุดเน้น: action บาง = แค่ 'จุดที่โลกเปลี่ยน' ไม่มีความรู้ธุรกิจเลย ใน solution ตั้งใจไม่เขียนเทสต์ให้ action เพื่อโชว์ขอบเขต</a:t>
+            </a:r>
+          </a:p>
+        </p:txBody>
+      </p:sp>
+      <p:sp>
+        <p:nvSpPr>
+          <p:cNvPr id="4" name="Slide Number Placeholder 3"/>
+          <p:cNvSpPr>
+            <a:spLocks noGrp="1"/>
+          </p:cNvSpPr>
+          <p:nvPr>
+            <p:ph type="sldNum" idx="5" sz="quarter"/>
+          </p:nvPr>
+        </p:nvSpPr>
+        <p:spPr/>
+      </p:sp>
+    </p:spTree>
+  </p:cSld>
+  <p:clrMapOvr>
+    <a:masterClrMapping/>
+  </p:clrMapOvr>
+</p:notes>
+</file>
+
+<file path=ppt/notesSlides/notesSlide15.xml><?xml version="1.0" encoding="utf-8"?>
+<p:notes xmlns:a="http://schemas.openxmlformats.org/drawingml/2006/main" xmlns:p="http://schemas.openxmlformats.org/presentationml/2006/main" xmlns:r="http://schemas.openxmlformats.org/officeDocument/2006/relationships">
+  <p:cSld>
+    <p:spTree>
+      <p:nvGrpSpPr>
+        <p:cNvPr id="1" name=""/>
+        <p:cNvGrpSpPr/>
+        <p:nvPr/>
+      </p:nvGrpSpPr>
+      <p:grpSpPr>
+        <a:xfrm>
+          <a:off x="0" y="0"/>
+          <a:ext cx="0" cy="0"/>
+          <a:chOff x="0" y="0"/>
+          <a:chExt cx="0" cy="0"/>
+        </a:xfrm>
+      </p:grpSpPr>
+      <p:sp>
+        <p:nvSpPr>
+          <p:cNvPr id="2" name="Slide Image Placeholder 1"/>
+          <p:cNvSpPr>
+            <a:spLocks noGrp="1"/>
+          </p:cNvSpPr>
+          <p:nvPr>
+            <p:ph type="sldImg" idx="2"/>
+          </p:nvPr>
+        </p:nvSpPr>
+        <p:spPr/>
+      </p:sp>
+      <p:sp>
+        <p:nvSpPr>
+          <p:cNvPr id="3" name="Notes Placeholder 2"/>
+          <p:cNvSpPr>
+            <a:spLocks noGrp="1"/>
+          </p:cNvSpPr>
+          <p:nvPr>
+            <p:ph type="body" idx="3" sz="quarter"/>
+          </p:nvPr>
+        </p:nvSpPr>
+        <p:spPr/>
+        <p:txBody>
+          <a:bodyPr/>
+          <a:lstStyle/>
+          <a:p>
+            <a:r>
+              <a:t>[1:45] โชว์อย่างเดียว ไม่ลงลึก: yield คืน false = ผู้อ่านสั่งหยุด ทำให้ infinite sequence ปลอดภัย แถมขำ: int ยัง overflow ถ้าดันอ่านไกล — ของจริงไม่มีอะไร infinite หน้านี้ตัดได้ถ้าเวลาโดนตัด แต่เป็นของที่คนจำได้นาน พยายามรักษาไว้</a:t>
+            </a:r>
+          </a:p>
+        </p:txBody>
+      </p:sp>
+      <p:sp>
+        <p:nvSpPr>
+          <p:cNvPr id="4" name="Slide Number Placeholder 3"/>
+          <p:cNvSpPr>
+            <a:spLocks noGrp="1"/>
+          </p:cNvSpPr>
+          <p:nvPr>
+            <p:ph type="sldNum" idx="5" sz="quarter"/>
+          </p:nvPr>
+        </p:nvSpPr>
+        <p:spPr/>
+      </p:sp>
+    </p:spTree>
+  </p:cSld>
+  <p:clrMapOvr>
+    <a:masterClrMapping/>
+  </p:clrMapOvr>
+</p:notes>
+</file>
+
+<file path=ppt/notesSlides/notesSlide16.xml><?xml version="1.0" encoding="utf-8"?>
+<p:notes xmlns:a="http://schemas.openxmlformats.org/drawingml/2006/main" xmlns:p="http://schemas.openxmlformats.org/presentationml/2006/main" xmlns:r="http://schemas.openxmlformats.org/officeDocument/2006/relationships">
+  <p:cSld>
+    <p:spTree>
+      <p:nvGrpSpPr>
+        <p:cNvPr id="1" name=""/>
+        <p:cNvGrpSpPr/>
+        <p:nvPr/>
+      </p:nvGrpSpPr>
+      <p:grpSpPr>
+        <a:xfrm>
+          <a:off x="0" y="0"/>
+          <a:ext cx="0" cy="0"/>
+          <a:chOff x="0" y="0"/>
+          <a:chExt cx="0" cy="0"/>
+        </a:xfrm>
+      </p:grpSpPr>
+      <p:sp>
+        <p:nvSpPr>
+          <p:cNvPr id="2" name="Slide Image Placeholder 1"/>
+          <p:cNvSpPr>
+            <a:spLocks noGrp="1"/>
+          </p:cNvSpPr>
+          <p:nvPr>
+            <p:ph type="sldImg" idx="2"/>
+          </p:nvPr>
+        </p:nvSpPr>
+        <p:spPr/>
+      </p:sp>
+      <p:sp>
+        <p:nvSpPr>
+          <p:cNvPr id="3" name="Notes Placeholder 2"/>
+          <p:cNvSpPr>
+            <a:spLocks noGrp="1"/>
+          </p:cNvSpPr>
+          <p:nvPr>
+            <p:ph type="body" idx="3" sz="quarter"/>
+          </p:nvPr>
+        </p:nvSpPr>
+        <p:spPr/>
+        <p:txBody>
+          <a:bodyPr/>
+          <a:lstStyle/>
+          <a:p>
+            <a:r>
+              <a:t>[1:52] ปิดด้วย call to action: สัปดาห์หน้าหยิบ handler ใน service ตัวเองมา 1 ตัว แยก ACD แล้วดึง calculation ออกมา 1 ชิ้น — 15 นาทีก็คุ้ม</a:t>
+            </a:r>
+          </a:p>
+        </p:txBody>
+      </p:sp>
+      <p:sp>
+        <p:nvSpPr>
+          <p:cNvPr id="4" name="Slide Number Placeholder 3"/>
+          <p:cNvSpPr>
+            <a:spLocks noGrp="1"/>
+          </p:cNvSpPr>
+          <p:nvPr>
+            <p:ph type="sldNum" idx="5" sz="quarter"/>
+          </p:nvPr>
+        </p:nvSpPr>
+        <p:spPr/>
+      </p:sp>
+    </p:spTree>
+  </p:cSld>
+  <p:clrMapOvr>
+    <a:masterClrMapping/>
+  </p:clrMapOvr>
+</p:notes>
+</file>
+
+<file path=ppt/notesSlides/notesSlide17.xml><?xml version="1.0" encoding="utf-8"?>
+<p:notes xmlns:a="http://schemas.openxmlformats.org/drawingml/2006/main" xmlns:p="http://schemas.openxmlformats.org/presentationml/2006/main" xmlns:r="http://schemas.openxmlformats.org/officeDocument/2006/relationships">
+  <p:cSld>
+    <p:spTree>
+      <p:nvGrpSpPr>
+        <p:cNvPr id="1" name=""/>
+        <p:cNvGrpSpPr/>
+        <p:nvPr/>
+      </p:nvGrpSpPr>
+      <p:grpSpPr>
+        <a:xfrm>
+          <a:off x="0" y="0"/>
+          <a:ext cx="0" cy="0"/>
+          <a:chOff x="0" y="0"/>
+          <a:chExt cx="0" cy="0"/>
+        </a:xfrm>
+      </p:grpSpPr>
+      <p:sp>
+        <p:nvSpPr>
+          <p:cNvPr id="2" name="Slide Image Placeholder 1"/>
+          <p:cNvSpPr>
+            <a:spLocks noGrp="1"/>
+          </p:cNvSpPr>
+          <p:nvPr>
+            <p:ph type="sldImg" idx="2"/>
+          </p:nvPr>
+        </p:nvSpPr>
+        <p:spPr/>
+      </p:sp>
+      <p:sp>
+        <p:nvSpPr>
+          <p:cNvPr id="3" name="Notes Placeholder 2"/>
+          <p:cNvSpPr>
+            <a:spLocks noGrp="1"/>
+          </p:cNvSpPr>
+          <p:nvPr>
+            <p:ph type="body" idx="3" sz="quarter"/>
+          </p:nvPr>
+        </p:nvSpPr>
+        <p:spPr/>
+        <p:txBody>
+          <a:bodyPr/>
+          <a:lstStyle/>
+          <a:p>
+            <a:r>
+              <a:t>เผื่อ Q&amp;A: (1) ทำไม Go ไม่มี pipe operator → verbose by design + (value, error) ทำ chain ยาก (2) copy-on-write แพงไหม → benchmark ใน go-fp/08: struct เล็กต่างกัน ~0.05 ns/op (3) goroutine/channel เข้ากรอบไหน → channel คือ data, การส่ง/รับคือ action (4) ใครถาม monad → วันนี้ไม่จำเป็น แนะนำหนังสือต่อ</a:t>
             </a:r>
           </a:p>
         </p:txBody>
@@ -935,7 +1148,7 @@
           <a:lstStyle/>
           <a:p>
             <a:r>
-              <a:t>ย้ำสัญญากับผู้เรียน: จบ 2 ชม. จะได้ 'ทักษะมองโค้ด' ที่ใช้กับ legacy Go ได้ทันที ไม่ใช่ type theory ถ้าเวลาเริ่มเบี้ยว middleware เป็นตัวตัดก่อน (ข้ามได้ ไม่กระทบเรื่องเล่า)</a:t>
+              <a:t>[0:02] ย้ำสัญญา: ออกจากห้องไปด้วยทักษะ ไม่ใช่ความรู้ลอย ๆ — เล่า flow วันนี้สั้น ๆ: ครึ่งแรกดูโค้ด ครึ่งหลังลงมือทำ (เวลาเริ่มเบี้ยว: middleware เป็นตัวตัดก่อน)</a:t>
             </a:r>
           </a:p>
         </p:txBody>
@@ -1005,7 +1218,7 @@
           <a:lstStyle/>
           <a:p>
             <a:r>
-              <a:t>ให้ผู้เรียนลองยกตัวอย่าง action/calculation จากงานตัวเองคนละ 1 อย่าง (30 วินาที) ก่อนไปสไลด์ถัดไป — คำถามชี้ว่า calculation มักแฝง 'ในหัว' เช่น กติกาส่วนลดที่อยู่ใน if ของ handler ใหญ่ ๆ</a:t>
+              <a:t>[0:05] ให้ผู้เรียนยกตัวอย่าง action/calculation จากงานตัวเองคนละ 1 อย่าง (30 วินาที) — ประเด็น: calculation มักแฝง 'ในหัว' เช่น กติกาส่วนลดที่อยู่ใน if ของ handler ใหญ่ ๆ จนไม่มีใครเห็นว่ามันคือ calculation แยกอยู่</a:t>
             </a:r>
           </a:p>
         </p:txBody>
@@ -1075,7 +1288,7 @@
           <a:lstStyle/>
           <a:p>
             <a:r>
-              <a:t>อย่าเฉลยเร็ว — ปล่อยให้เถียงกันก่อน จุดที่ควรติง: order.Total ถูก mutate (action บน data), กติกา 1000→90% คือ calculation ที่ฝังอยู่, time.Now/print/save คือ action ชัด ๆ ปิดท้าย: 'ถ้ากติกาส่วนลดเปลี่ยน เราต้องรันระบบทั้งระบบเพื่อ test ไหม?' → ทำไมต้องแยก</a:t>
+              <a:t>[0:08] อย่าเฉลยเร็ว — จับคู่ชี้บรรทัด 3 นาที แล้วเฉลยบนกระดาน จุดที่ติง: order.Total ถูก mutate (action บน data), กติกา 1000→90% คือ calculation ที่ฝังอยู่, time.Now/print/save คือ action ชัด ๆ คำถามขวาคือสะพานไปหน้าถัดไป</a:t>
             </a:r>
           </a:p>
         </p:txBody>
@@ -1145,7 +1358,7 @@
           <a:lstStyle/>
           <a:p>
             <a:r>
-              <a:t>พิมพ์สดให้เห็น (หรือสลับหน้าจอ go-fp/02) ประเด็นสำคัญ: การ test ตัว ❌ ต้องจับ stdout + ระวัง input ถูก mutate — ตัว ✅ test ด้วยตาราง 3 บรรทัด ถามต่อ: แล้ว LogDiscount ยัง test ยากไหม? → action ไม่หายไป แต่ถูก 'ย้ายไปขอบ'</a:t>
+              <a:t>[0:13] อย่าเพิ่งโชว์วิธีแก้ — ให้เห็นปัญหาก่อน ถามว่าใครเคยเจอ bug 'ผ่านข้อมูลเข้าไปแล้วมันเปลี่ยน' (mutate input) แล้วสะพานไปหน้า refactor</a:t>
             </a:r>
           </a:p>
         </p:txBody>
@@ -1215,7 +1428,7 @@
           <a:lstStyle/>
           <a:p>
             <a:r>
-              <a:t>โค้ดเต็มใน go-fp/04-closures-currying มี test ของ Adder/Curry2 ให้ผู้เรียนลองเดาลายเซ็น Curry2 ก่อนเฉลย — ย้ำว่า Go verbose กว่า ML-family ชัดเจน นี่คือเหตุผลที่ Go ไม่มี pipe operator (ตอบคำถามที่มักโผล่)</a:t>
+              <a:t>[0:15] พิมพ์สดหรือสลับหน้าจอ go-fp/02 จุดสำคัญคือ 'ย้ายไปขอบ' — FP ไม่ได้แปลว่ากำจัด side effect แต่จัดที่อยู่ให้มัน ถามต่อ: LogDiscount ยังเทสต์ยากไหม? → ยาก แต่เล็กและไม่มีความรู้ธุรกิจอยู่ข้างในแล้ว</a:t>
             </a:r>
           </a:p>
         </p:txBody>
@@ -1285,7 +1498,7 @@
           <a:lstStyle/>
           <a:p>
             <a:r>
-              <a:t>ถ้ามีเวลา ให้รันสดบน Go เวอร์ชันเก่า/ใหม่เทียบกัน (gotip) คนที่เคยโดน bug นี้จะตื่นเต้นเอง — เชื่อมกลับ ACD: goroutine คือ action การจับตัวแปรร่วมคือ data ที่แชร์กันโดยไม่ตั้งใจ</a:t>
+              <a:t>[0:25] รันเทสต์ให้เห็นเขียว ตาราง 3 แถวนี้คือ spec ของกติกาส่วนลด — QA/PM อ่านออกด้วย นี่คือเหตุผลที่ calculation คู่ควรกับการถูกแยกออกมา</a:t>
             </a:r>
           </a:p>
         </p:txBody>
@@ -1355,7 +1568,7 @@
           <a:lstStyle/>
           <a:p>
             <a:r>
-              <a:t>แนะให้ผู้เรียนเปิด fp_test.go เป็นตัวอย่าง TDD: เขียน test ก่อน implementation เห็นลายเซ็น generic ทีละขั้น (แนวบทความ bitfieldconsulting) ถ้ามีคนถาม performance — for loop ตรง ๆ ชนะเสมอ ไม่มี magic</a:t>
+              <a:t>[0:40] ให้ผู้เรียนเดาลายเซ็น Curry2 ก่อนเฉลย (โค้ดเต็ม + เทสต์: go-fp/04) ใครถาม 'ทำไม Go ไม่มี lambda สั้น ๆ' → ตอบตรง ๆ ว่า verbose by design และ (value, error) ทำ chain ยาก</a:t>
             </a:r>
           </a:p>
         </p:txBody>
@@ -1425,7 +1638,7 @@
           <a:lstStyle/>
           <a:p>
             <a:r>
-              <a:t>นี่คือ aha moment ของวัน: หลายคนใช้ zap.New(...WithFields) มาตลอดแต่ไม่เคยมองว่ามันคือ FP pattern ถาม: ทำไมไม่ใช้ struct config ธรรมดา? → options ขยายได้ไม่ทำ breaking change + default ชัด</a:t>
+              <a:t>[0:50] ถ้ามีเวลา รันสดเทียบ Go เก่า/ใหม่ (gotip) เชื่อมกลับกรอบ ACD: goroutine คือ action, ตัวแปรที่ถูกจับร่วมคือ data ที่แชร์โดยไม่ตั้งใจ</a:t>
             </a:r>
           </a:p>
         </p:txBody>
@@ -4524,7 +4737,7 @@
                 </a:solidFill>
                 <a:latin typeface="Noto Sans Thai Looped"/>
               </a:rPr>
-              <a:t>เวิร์กชอป </a:t>
+              <a:t>มองโค้ดให้เห็น </a:t>
             </a:r>
             <a:r>
               <a:rPr sz="2200" b="0" i="0">
@@ -4533,7 +4746,7 @@
                 </a:solidFill>
                 <a:latin typeface="Ubuntu"/>
               </a:rPr>
-              <a:t>2</a:t>
+              <a:t>3</a:t>
             </a:r>
             <a:r>
               <a:rPr sz="2200" b="0" i="0">
@@ -4542,7 +4755,7 @@
                 </a:solidFill>
                 <a:latin typeface="Noto Sans Thai Looped"/>
               </a:rPr>
-              <a:t> ชั่วโมง · กรอบ Actions / Calculations / Data</a:t>
+              <a:t> อย่าง: Actions · Calculations · Data</a:t>
             </a:r>
           </a:p>
           <a:p>
@@ -4558,82 +4771,7 @@
                 </a:solidFill>
                 <a:latin typeface="Noto Sans Thai Looped"/>
               </a:rPr>
-              <a:t>แนวคิดจาก Grokking Simplicity (Eric Normand) — แบบ pragmatic สำหรับ Go developer</a:t>
-            </a:r>
-          </a:p>
-        </p:txBody>
-      </p:sp>
-      <p:sp>
-        <p:nvSpPr>
-          <p:cNvPr id="4" name="TextBox 3"/>
-          <p:cNvSpPr txBox="1"/>
-          <p:nvPr/>
-        </p:nvSpPr>
-        <p:spPr>
-          <a:xfrm>
-            <a:off x="822960" y="5852160"/>
-            <a:ext cx="10515600" cy="548640"/>
-          </a:xfrm>
-          <a:prstGeom prst="rect">
-            <a:avLst/>
-          </a:prstGeom>
-          <a:noFill/>
-        </p:spPr>
-        <p:txBody>
-          <a:bodyPr wrap="square">
-            <a:spAutoFit/>
-          </a:bodyPr>
-          <a:lstStyle/>
-          <a:p>
-            <a:pPr algn="l">
-              <a:spcAft>
-                <a:spcPts val="600"/>
-              </a:spcAft>
-            </a:pPr>
-            <a:r>
-              <a:rPr sz="1400" b="0" i="0">
-                <a:solidFill>
-                  <a:srgbClr val="64748B"/>
-                </a:solidFill>
-                <a:latin typeface="Noto Sans Thai Looped"/>
-              </a:rPr>
-              <a:t>อาทิตย์ที่ </a:t>
-            </a:r>
-            <a:r>
-              <a:rPr sz="1400" b="0" i="0">
-                <a:solidFill>
-                  <a:srgbClr val="64748B"/>
-                </a:solidFill>
-                <a:latin typeface="Ubuntu"/>
-              </a:rPr>
-              <a:t>18</a:t>
-            </a:r>
-            <a:r>
-              <a:rPr sz="1400" b="0" i="0">
-                <a:solidFill>
-                  <a:srgbClr val="64748B"/>
-                </a:solidFill>
-                <a:latin typeface="Noto Sans Thai Looped"/>
-              </a:rPr>
-              <a:t> ตุลาคม </a:t>
-            </a:r>
-            <a:r>
-              <a:rPr sz="1400" b="0" i="0">
-                <a:solidFill>
-                  <a:srgbClr val="64748B"/>
-                </a:solidFill>
-                <a:latin typeface="Ubuntu"/>
-              </a:rPr>
-              <a:t>2026</a:t>
-            </a:r>
-            <a:r>
-              <a:rPr sz="1400" b="0" i="0">
-                <a:solidFill>
-                  <a:srgbClr val="64748B"/>
-                </a:solidFill>
-                <a:latin typeface="Noto Sans Thai Looped"/>
-              </a:rPr>
-              <a:t> · โค้ดตัวอย่าง: ~/src/go-fp</a:t>
+              <a:t>ทักษะที่ใช้กับโค้ด Go ที่ทำงานจริงได้ทันที — ไม่ต้องมีพื้น FP มาก่อน</a:t>
             </a:r>
           </a:p>
         </p:txBody>
@@ -4665,7 +4803,7 @@
         <p:spPr>
           <a:xfrm>
             <a:off x="502920" y="292608"/>
-            <a:ext cx="8778240" cy="914400"/>
+            <a:ext cx="11155680" cy="914400"/>
           </a:xfrm>
           <a:prstGeom prst="rect">
             <a:avLst/>
@@ -4690,7 +4828,25 @@
                 </a:solidFill>
                 <a:latin typeface="Noto Sans Thai Looped"/>
               </a:rPr>
-              <a:t>Middleware = Function Composition</a:t>
+              <a:t>เครื่องมือ </a:t>
+            </a:r>
+            <a:r>
+              <a:rPr sz="3000" b="1" i="0">
+                <a:solidFill>
+                  <a:srgbClr val="0F172A"/>
+                </a:solidFill>
+                <a:latin typeface="Ubuntu"/>
+              </a:rPr>
+              <a:t>2:</a:t>
+            </a:r>
+            <a:r>
+              <a:rPr sz="3000" b="1" i="0">
+                <a:solidFill>
+                  <a:srgbClr val="0F172A"/>
+                </a:solidFill>
+                <a:latin typeface="Noto Sans Thai Looped"/>
+              </a:rPr>
+              <a:t> Generics — เขียน Map / Filter / Reduce เองได้</a:t>
             </a:r>
           </a:p>
           <a:p>
@@ -4700,76 +4856,56 @@
               </a:spcAft>
             </a:pPr>
             <a:r>
-              <a:rPr sz="1400" b="0" i="0">
+              <a:rPr sz="1500" b="0" i="0">
                 <a:solidFill>
                   <a:srgbClr val="64748B"/>
                 </a:solidFill>
                 <a:latin typeface="Noto Sans Thai Looped"/>
               </a:rPr>
-              <a:t>⚠️ สไลด์ 'ตัดได้' ตัวแรก — เวลาไม่พอให้ข้ามไปเวิร์กชอปได้เลย</a:t>
-            </a:r>
-          </a:p>
-        </p:txBody>
-      </p:sp>
-      <p:sp>
-        <p:nvSpPr>
-          <p:cNvPr id="3" name="Rounded Rectangle 2"/>
-          <p:cNvSpPr/>
-          <p:nvPr/>
-        </p:nvSpPr>
-        <p:spPr>
-          <a:xfrm>
-            <a:off x="10104120" y="384048"/>
-            <a:ext cx="1600200" cy="502920"/>
-          </a:xfrm>
-          <a:prstGeom prst="roundRect">
-            <a:avLst/>
-          </a:prstGeom>
-          <a:solidFill>
-            <a:srgbClr val="0D9488"/>
-          </a:solidFill>
-          <a:ln>
-            <a:noFill/>
-          </a:ln>
-        </p:spPr>
-        <p:style>
-          <a:lnRef idx="1">
-            <a:schemeClr val="accent1"/>
-          </a:lnRef>
-          <a:fillRef idx="3">
-            <a:schemeClr val="accent1"/>
-          </a:fillRef>
-          <a:effectRef idx="2">
-            <a:schemeClr val="accent1"/>
-          </a:effectRef>
-          <a:fontRef idx="minor">
-            <a:schemeClr val="lt1"/>
-          </a:fontRef>
-        </p:style>
-        <p:txBody>
-          <a:bodyPr rtlCol="0" anchor="ctr" wrap="none"/>
-          <a:lstStyle/>
-          <a:p>
-            <a:pPr algn="ctr">
-              <a:spcAft>
-                <a:spcPts val="0"/>
-              </a:spcAft>
-            </a:pPr>
-            <a:r>
-              <a:rPr sz="1400" b="1" i="0">
-                <a:solidFill>
-                  <a:srgbClr val="FFFFFF"/>
+              <a:t>Go </a:t>
+            </a:r>
+            <a:r>
+              <a:rPr sz="1500" b="0" i="0">
+                <a:solidFill>
+                  <a:srgbClr val="64748B"/>
                 </a:solidFill>
                 <a:latin typeface="Ubuntu"/>
               </a:rPr>
-              <a:t>1:05–1:25</a:t>
-            </a:r>
-          </a:p>
-        </p:txBody>
-      </p:sp>
-      <p:sp>
-        <p:nvSpPr>
-          <p:cNvPr id="4" name="Rectangle 3"/>
+              <a:t>1.18</a:t>
+            </a:r>
+            <a:r>
+              <a:rPr sz="1500" b="0" i="0">
+                <a:solidFill>
+                  <a:srgbClr val="64748B"/>
+                </a:solidFill>
+                <a:latin typeface="Noto Sans Thai Looped"/>
+              </a:rPr>
+              <a:t>+ · โค้ดเต็ม + เทสต์แบบ TDD ใน go-fp/</a:t>
+            </a:r>
+            <a:r>
+              <a:rPr sz="1500" b="0" i="0">
+                <a:solidFill>
+                  <a:srgbClr val="64748B"/>
+                </a:solidFill>
+                <a:latin typeface="Ubuntu"/>
+              </a:rPr>
+              <a:t>03-</a:t>
+            </a:r>
+            <a:r>
+              <a:rPr sz="1500" b="0" i="0">
+                <a:solidFill>
+                  <a:srgbClr val="64748B"/>
+                </a:solidFill>
+                <a:latin typeface="Noto Sans Thai Looped"/>
+              </a:rPr>
+              <a:t>fp-toolkit</a:t>
+            </a:r>
+          </a:p>
+        </p:txBody>
+      </p:sp>
+      <p:sp>
+        <p:nvSpPr>
+          <p:cNvPr id="3" name="Rectangle 2"/>
           <p:cNvSpPr/>
           <p:nvPr/>
         </p:nvSpPr>
@@ -4812,7 +4948,984 @@
       </p:sp>
       <p:sp>
         <p:nvSpPr>
-          <p:cNvPr id="5" name="Rounded Rectangle 4"/>
+          <p:cNvPr id="4" name="Rounded Rectangle 3"/>
+          <p:cNvSpPr/>
+          <p:nvPr/>
+        </p:nvSpPr>
+        <p:spPr>
+          <a:xfrm>
+            <a:off x="548640" y="1874519"/>
+            <a:ext cx="11109960" cy="3383280"/>
+          </a:xfrm>
+          <a:prstGeom prst="roundRect">
+            <a:avLst/>
+          </a:prstGeom>
+          <a:solidFill>
+            <a:srgbClr val="1E1E2E"/>
+          </a:solidFill>
+          <a:ln>
+            <a:noFill/>
+          </a:ln>
+          <a:effectLst/>
+        </p:spPr>
+        <p:style>
+          <a:lnRef idx="1">
+            <a:schemeClr val="accent1"/>
+          </a:lnRef>
+          <a:fillRef idx="3">
+            <a:schemeClr val="accent1"/>
+          </a:fillRef>
+          <a:effectRef idx="2">
+            <a:schemeClr val="accent1"/>
+          </a:effectRef>
+          <a:fontRef idx="minor">
+            <a:schemeClr val="lt1"/>
+          </a:fontRef>
+        </p:style>
+        <p:txBody>
+          <a:bodyPr rtlCol="0" anchor="t" wrap="none" lIns="164592" rIns="109728" tIns="109728"/>
+          <a:lstStyle/>
+          <a:p>
+            <a:pPr algn="l">
+              <a:spcAft>
+                <a:spcPts val="0"/>
+              </a:spcAft>
+            </a:pPr>
+            <a:r>
+              <a:rPr sz="1400" i="0">
+                <a:solidFill>
+                  <a:srgbClr val="E2E8F0"/>
+                </a:solidFill>
+                <a:latin typeface="DejaVu Sans Mono"/>
+              </a:rPr>
+              <a:t>func Map[T, R any](in []T, f func(T) R) []R {</a:t>
+            </a:r>
+          </a:p>
+          <a:p>
+            <a:pPr algn="l">
+              <a:spcAft>
+                <a:spcPts val="0"/>
+              </a:spcAft>
+            </a:pPr>
+            <a:r>
+              <a:rPr sz="1400" i="0">
+                <a:solidFill>
+                  <a:srgbClr val="E2E8F0"/>
+                </a:solidFill>
+                <a:latin typeface="DejaVu Sans Mono"/>
+              </a:rPr>
+              <a:t>    out := make([]R, 0, len(in))</a:t>
+            </a:r>
+          </a:p>
+          <a:p>
+            <a:pPr algn="l">
+              <a:spcAft>
+                <a:spcPts val="0"/>
+              </a:spcAft>
+            </a:pPr>
+            <a:r>
+              <a:rPr sz="1400" i="0">
+                <a:solidFill>
+                  <a:srgbClr val="E2E8F0"/>
+                </a:solidFill>
+                <a:latin typeface="DejaVu Sans Mono"/>
+              </a:rPr>
+              <a:t>    for _, v := range in { out = append(out, f(v)) }</a:t>
+            </a:r>
+          </a:p>
+          <a:p>
+            <a:pPr algn="l">
+              <a:spcAft>
+                <a:spcPts val="0"/>
+              </a:spcAft>
+            </a:pPr>
+            <a:r>
+              <a:rPr sz="1400" i="0">
+                <a:solidFill>
+                  <a:srgbClr val="E2E8F0"/>
+                </a:solidFill>
+                <a:latin typeface="DejaVu Sans Mono"/>
+              </a:rPr>
+              <a:t>    return out</a:t>
+            </a:r>
+          </a:p>
+          <a:p>
+            <a:pPr algn="l">
+              <a:spcAft>
+                <a:spcPts val="0"/>
+              </a:spcAft>
+            </a:pPr>
+            <a:r>
+              <a:rPr sz="1400" i="0">
+                <a:solidFill>
+                  <a:srgbClr val="E2E8F0"/>
+                </a:solidFill>
+                <a:latin typeface="DejaVu Sans Mono"/>
+              </a:rPr>
+              <a:t>}</a:t>
+            </a:r>
+          </a:p>
+          <a:p>
+            <a:pPr algn="l">
+              <a:spcAft>
+                <a:spcPts val="0"/>
+              </a:spcAft>
+            </a:pPr>
+          </a:p>
+          <a:p>
+            <a:pPr algn="l">
+              <a:spcAft>
+                <a:spcPts val="0"/>
+              </a:spcAft>
+            </a:pPr>
+            <a:r>
+              <a:rPr sz="1400" i="0">
+                <a:solidFill>
+                  <a:srgbClr val="E2E8F0"/>
+                </a:solidFill>
+                <a:latin typeface="DejaVu Sans Mono"/>
+              </a:rPr>
+              <a:t>func Filter[T any](in []T, keep func(T) bool) []T { ... }</a:t>
+            </a:r>
+          </a:p>
+          <a:p>
+            <a:pPr algn="l">
+              <a:spcAft>
+                <a:spcPts val="0"/>
+              </a:spcAft>
+            </a:pPr>
+          </a:p>
+          <a:p>
+            <a:pPr algn="l">
+              <a:spcAft>
+                <a:spcPts val="0"/>
+              </a:spcAft>
+            </a:pPr>
+            <a:r>
+              <a:rPr sz="1400" i="1">
+                <a:solidFill>
+                  <a:srgbClr val="94A3B8"/>
+                </a:solidFill>
+                <a:latin typeface="DejaVu Sans Mono"/>
+              </a:rPr>
+              <a:t>// accumulator ต่าง type กับสมาชิกได้</a:t>
+            </a:r>
+          </a:p>
+          <a:p>
+            <a:pPr algn="l">
+              <a:spcAft>
+                <a:spcPts val="0"/>
+              </a:spcAft>
+            </a:pPr>
+            <a:r>
+              <a:rPr sz="1400" i="0">
+                <a:solidFill>
+                  <a:srgbClr val="E2E8F0"/>
+                </a:solidFill>
+                <a:latin typeface="DejaVu Sans Mono"/>
+              </a:rPr>
+              <a:t>func Reduce[T, R any](in []T, init R,</a:t>
+            </a:r>
+          </a:p>
+          <a:p>
+            <a:pPr algn="l">
+              <a:spcAft>
+                <a:spcPts val="0"/>
+              </a:spcAft>
+            </a:pPr>
+            <a:r>
+              <a:rPr sz="1400" i="0">
+                <a:solidFill>
+                  <a:srgbClr val="E2E8F0"/>
+                </a:solidFill>
+                <a:latin typeface="DejaVu Sans Mono"/>
+              </a:rPr>
+              <a:t>    combine func(R, T) R) R { ... }</a:t>
+            </a:r>
+          </a:p>
+          <a:p>
+            <a:pPr algn="l">
+              <a:spcAft>
+                <a:spcPts val="0"/>
+              </a:spcAft>
+            </a:pPr>
+          </a:p>
+          <a:p>
+            <a:pPr algn="l">
+              <a:spcAft>
+                <a:spcPts val="0"/>
+              </a:spcAft>
+            </a:pPr>
+            <a:r>
+              <a:rPr sz="1400" i="0">
+                <a:solidFill>
+                  <a:srgbClr val="E2E8F0"/>
+                </a:solidFill>
+                <a:latin typeface="DejaVu Sans Mono"/>
+              </a:rPr>
+              <a:t>total := Reduce(items, 0, func(acc int, it Item) int {</a:t>
+            </a:r>
+          </a:p>
+          <a:p>
+            <a:pPr algn="l">
+              <a:spcAft>
+                <a:spcPts val="0"/>
+              </a:spcAft>
+            </a:pPr>
+            <a:r>
+              <a:rPr sz="1400" i="0">
+                <a:solidFill>
+                  <a:srgbClr val="E2E8F0"/>
+                </a:solidFill>
+                <a:latin typeface="DejaVu Sans Mono"/>
+              </a:rPr>
+              <a:t>    return acc + it.Price*it.Quantity</a:t>
+            </a:r>
+          </a:p>
+          <a:p>
+            <a:pPr algn="l">
+              <a:spcAft>
+                <a:spcPts val="0"/>
+              </a:spcAft>
+            </a:pPr>
+            <a:r>
+              <a:rPr sz="1400" i="0">
+                <a:solidFill>
+                  <a:srgbClr val="E2E8F0"/>
+                </a:solidFill>
+                <a:latin typeface="DejaVu Sans Mono"/>
+              </a:rPr>
+              <a:t>})</a:t>
+            </a:r>
+          </a:p>
+        </p:txBody>
+      </p:sp>
+      <p:sp>
+        <p:nvSpPr>
+          <p:cNvPr id="5" name="TextBox 4"/>
+          <p:cNvSpPr txBox="1"/>
+          <p:nvPr/>
+        </p:nvSpPr>
+        <p:spPr>
+          <a:xfrm>
+            <a:off x="548640" y="5440680"/>
+            <a:ext cx="11064240" cy="4937760"/>
+          </a:xfrm>
+          <a:prstGeom prst="rect">
+            <a:avLst/>
+          </a:prstGeom>
+          <a:noFill/>
+        </p:spPr>
+        <p:txBody>
+          <a:bodyPr wrap="square">
+            <a:spAutoFit/>
+          </a:bodyPr>
+          <a:lstStyle/>
+          <a:p>
+            <a:pPr algn="l">
+              <a:spcAft>
+                <a:spcPts val="500"/>
+              </a:spcAft>
+            </a:pPr>
+            <a:r>
+              <a:rPr sz="1500" b="0" i="0">
+                <a:solidFill>
+                  <a:srgbClr val="0F172A"/>
+                </a:solidFill>
+                <a:latin typeface="Noto Sans Thai Looped"/>
+              </a:rPr>
+              <a:t>• Go ไม่มี built-in map/filter — และ Go community ก็นิยม for loop ตรง ๆ</a:t>
+            </a:r>
+          </a:p>
+          <a:p>
+            <a:pPr algn="l">
+              <a:spcAft>
+                <a:spcPts val="500"/>
+              </a:spcAft>
+            </a:pPr>
+            <a:r>
+              <a:rPr sz="1500" b="0" i="0">
+                <a:solidFill>
+                  <a:srgbClr val="0F172A"/>
+                </a:solidFill>
+                <a:latin typeface="Noto Sans Thai Looped"/>
+              </a:rPr>
+              <a:t>• โค้ดชุดนี้คือเครื่องมือ 'เรียนรู้ concept' — ในงานจริงใช้เมื่อมันทำให้เจตนาของโค้ดอ่านออกง่ายขึ้น</a:t>
+            </a:r>
+          </a:p>
+        </p:txBody>
+      </p:sp>
+      <p:sp>
+        <p:nvSpPr>
+          <p:cNvPr id="6" name="Rounded Rectangle 5"/>
+          <p:cNvSpPr/>
+          <p:nvPr/>
+        </p:nvSpPr>
+        <p:spPr>
+          <a:xfrm>
+            <a:off x="548640" y="5989320"/>
+            <a:ext cx="11109960" cy="566928"/>
+          </a:xfrm>
+          <a:prstGeom prst="roundRect">
+            <a:avLst/>
+          </a:prstGeom>
+          <a:solidFill>
+            <a:srgbClr val="CCFBF1"/>
+          </a:solidFill>
+          <a:ln>
+            <a:noFill/>
+          </a:ln>
+          <a:effectLst/>
+        </p:spPr>
+        <p:style>
+          <a:lnRef idx="1">
+            <a:schemeClr val="accent1"/>
+          </a:lnRef>
+          <a:fillRef idx="3">
+            <a:schemeClr val="accent1"/>
+          </a:fillRef>
+          <a:effectRef idx="2">
+            <a:schemeClr val="accent1"/>
+          </a:effectRef>
+          <a:fontRef idx="minor">
+            <a:schemeClr val="lt1"/>
+          </a:fontRef>
+        </p:style>
+        <p:txBody>
+          <a:bodyPr rtlCol="0" anchor="ctr" tIns="54864" bIns="36576" wrap="square"/>
+          <a:lstStyle/>
+          <a:p>
+            <a:pPr algn="l">
+              <a:spcAft>
+                <a:spcPts val="0"/>
+              </a:spcAft>
+            </a:pPr>
+            <a:r>
+              <a:rPr sz="1500" b="1" i="0">
+                <a:solidFill>
+                  <a:srgbClr val="0F766E"/>
+                </a:solidFill>
+                <a:latin typeface="Noto Sans Thai Looped"/>
+              </a:rPr>
+              <a:t>จำไว้: Reduce ที่ accumulator ต่าง type กับสมาชิก (Reduce[Item, int]) คือจุดที่ generics ช่วยจริง</a:t>
+            </a:r>
+          </a:p>
+        </p:txBody>
+      </p:sp>
+    </p:spTree>
+  </p:cSld>
+  <p:clrMapOvr>
+    <a:masterClrMapping/>
+  </p:clrMapOvr>
+</p:sld>
+</file>
+
+<file path=ppt/slides/slide11.xml><?xml version="1.0" encoding="utf-8"?>
+<p:sld xmlns:a="http://schemas.openxmlformats.org/drawingml/2006/main" xmlns:p="http://schemas.openxmlformats.org/presentationml/2006/main" xmlns:r="http://schemas.openxmlformats.org/officeDocument/2006/relationships">
+  <p:cSld>
+    <p:spTree>
+      <p:nvGrpSpPr>
+        <p:cNvPr id="1" name=""/>
+        <p:cNvGrpSpPr/>
+        <p:nvPr/>
+      </p:nvGrpSpPr>
+      <p:grpSpPr/>
+      <p:sp>
+        <p:nvSpPr>
+          <p:cNvPr id="2" name="TextBox 1"/>
+          <p:cNvSpPr txBox="1"/>
+          <p:nvPr/>
+        </p:nvSpPr>
+        <p:spPr>
+          <a:xfrm>
+            <a:off x="502920" y="292608"/>
+            <a:ext cx="11155680" cy="914400"/>
+          </a:xfrm>
+          <a:prstGeom prst="rect">
+            <a:avLst/>
+          </a:prstGeom>
+          <a:noFill/>
+        </p:spPr>
+        <p:txBody>
+          <a:bodyPr wrap="square">
+            <a:spAutoFit/>
+          </a:bodyPr>
+          <a:lstStyle/>
+          <a:p>
+            <a:pPr algn="l">
+              <a:spcAft>
+                <a:spcPts val="200"/>
+              </a:spcAft>
+            </a:pPr>
+            <a:r>
+              <a:rPr sz="3000" b="1" i="0">
+                <a:solidFill>
+                  <a:srgbClr val="0F172A"/>
+                </a:solidFill>
+                <a:latin typeface="Noto Sans Thai Looped"/>
+              </a:rPr>
+              <a:t>Functional Options — pattern ที่คุณใช้อยู่แล้ว</a:t>
+            </a:r>
+          </a:p>
+          <a:p>
+            <a:pPr algn="l">
+              <a:spcAft>
+                <a:spcPts val="600"/>
+              </a:spcAft>
+            </a:pPr>
+            <a:r>
+              <a:rPr sz="1500" b="0" i="0">
+                <a:solidFill>
+                  <a:srgbClr val="64748B"/>
+                </a:solidFill>
+                <a:latin typeface="Noto Sans Thai Looped"/>
+              </a:rPr>
+              <a:t>closure + higher-order function ในโค้ด production จริง: grpc-go, zap, aws-sdk-go-v</a:t>
+            </a:r>
+            <a:r>
+              <a:rPr sz="1500" b="0" i="0">
+                <a:solidFill>
+                  <a:srgbClr val="64748B"/>
+                </a:solidFill>
+                <a:latin typeface="Ubuntu"/>
+              </a:rPr>
+              <a:t>2</a:t>
+            </a:r>
+          </a:p>
+        </p:txBody>
+      </p:sp>
+      <p:sp>
+        <p:nvSpPr>
+          <p:cNvPr id="3" name="Rectangle 2"/>
+          <p:cNvSpPr/>
+          <p:nvPr/>
+        </p:nvSpPr>
+        <p:spPr>
+          <a:xfrm>
+            <a:off x="502920" y="1207008"/>
+            <a:ext cx="11201400" cy="27940"/>
+          </a:xfrm>
+          <a:prstGeom prst="rect">
+            <a:avLst/>
+          </a:prstGeom>
+          <a:solidFill>
+            <a:srgbClr val="0D9488"/>
+          </a:solidFill>
+          <a:ln>
+            <a:noFill/>
+          </a:ln>
+        </p:spPr>
+        <p:style>
+          <a:lnRef idx="1">
+            <a:schemeClr val="accent1"/>
+          </a:lnRef>
+          <a:fillRef idx="3">
+            <a:schemeClr val="accent1"/>
+          </a:fillRef>
+          <a:effectRef idx="2">
+            <a:schemeClr val="accent1"/>
+          </a:effectRef>
+          <a:fontRef idx="minor">
+            <a:schemeClr val="lt1"/>
+          </a:fontRef>
+        </p:style>
+        <p:txBody>
+          <a:bodyPr rtlCol="0" anchor="ctr"/>
+          <a:lstStyle/>
+          <a:p>
+            <a:pPr algn="ctr"/>
+          </a:p>
+        </p:txBody>
+      </p:sp>
+      <p:sp>
+        <p:nvSpPr>
+          <p:cNvPr id="4" name="Rounded Rectangle 3"/>
+          <p:cNvSpPr/>
+          <p:nvPr/>
+        </p:nvSpPr>
+        <p:spPr>
+          <a:xfrm>
+            <a:off x="548640" y="1874519"/>
+            <a:ext cx="11109960" cy="3383280"/>
+          </a:xfrm>
+          <a:prstGeom prst="roundRect">
+            <a:avLst/>
+          </a:prstGeom>
+          <a:solidFill>
+            <a:srgbClr val="1E1E2E"/>
+          </a:solidFill>
+          <a:ln>
+            <a:noFill/>
+          </a:ln>
+          <a:effectLst/>
+        </p:spPr>
+        <p:style>
+          <a:lnRef idx="1">
+            <a:schemeClr val="accent1"/>
+          </a:lnRef>
+          <a:fillRef idx="3">
+            <a:schemeClr val="accent1"/>
+          </a:fillRef>
+          <a:effectRef idx="2">
+            <a:schemeClr val="accent1"/>
+          </a:effectRef>
+          <a:fontRef idx="minor">
+            <a:schemeClr val="lt1"/>
+          </a:fontRef>
+        </p:style>
+        <p:txBody>
+          <a:bodyPr rtlCol="0" anchor="t" wrap="none" lIns="164592" rIns="109728" tIns="109728"/>
+          <a:lstStyle/>
+          <a:p>
+            <a:pPr algn="l">
+              <a:spcAft>
+                <a:spcPts val="0"/>
+              </a:spcAft>
+            </a:pPr>
+            <a:r>
+              <a:rPr sz="1400" i="0">
+                <a:solidFill>
+                  <a:srgbClr val="E2E8F0"/>
+                </a:solidFill>
+                <a:latin typeface="DejaVu Sans Mono"/>
+              </a:rPr>
+              <a:t>type Option func(*Server)</a:t>
+            </a:r>
+          </a:p>
+          <a:p>
+            <a:pPr algn="l">
+              <a:spcAft>
+                <a:spcPts val="0"/>
+              </a:spcAft>
+            </a:pPr>
+          </a:p>
+          <a:p>
+            <a:pPr algn="l">
+              <a:spcAft>
+                <a:spcPts val="0"/>
+              </a:spcAft>
+            </a:pPr>
+            <a:r>
+              <a:rPr sz="1400" i="0">
+                <a:solidFill>
+                  <a:srgbClr val="E2E8F0"/>
+                </a:solidFill>
+                <a:latin typeface="DejaVu Sans Mono"/>
+              </a:rPr>
+              <a:t>func WithPort(p int) Option {</a:t>
+            </a:r>
+          </a:p>
+          <a:p>
+            <a:pPr algn="l">
+              <a:spcAft>
+                <a:spcPts val="0"/>
+              </a:spcAft>
+            </a:pPr>
+            <a:r>
+              <a:rPr sz="1400" i="0">
+                <a:solidFill>
+                  <a:srgbClr val="E2E8F0"/>
+                </a:solidFill>
+                <a:latin typeface="DejaVu Sans Mono"/>
+              </a:rPr>
+              <a:t>    return func(s *Server) { s.port = p }</a:t>
+            </a:r>
+          </a:p>
+          <a:p>
+            <a:pPr algn="l">
+              <a:spcAft>
+                <a:spcPts val="0"/>
+              </a:spcAft>
+            </a:pPr>
+            <a:r>
+              <a:rPr sz="1400" i="0">
+                <a:solidFill>
+                  <a:srgbClr val="E2E8F0"/>
+                </a:solidFill>
+                <a:latin typeface="DejaVu Sans Mono"/>
+              </a:rPr>
+              <a:t>}</a:t>
+            </a:r>
+          </a:p>
+          <a:p>
+            <a:pPr algn="l">
+              <a:spcAft>
+                <a:spcPts val="0"/>
+              </a:spcAft>
+            </a:pPr>
+          </a:p>
+          <a:p>
+            <a:pPr algn="l">
+              <a:spcAft>
+                <a:spcPts val="0"/>
+              </a:spcAft>
+            </a:pPr>
+            <a:r>
+              <a:rPr sz="1400" i="0">
+                <a:solidFill>
+                  <a:srgbClr val="E2E8F0"/>
+                </a:solidFill>
+                <a:latin typeface="DejaVu Sans Mono"/>
+              </a:rPr>
+              <a:t>func New(host string, opts ...Option) *Server {</a:t>
+            </a:r>
+          </a:p>
+          <a:p>
+            <a:pPr algn="l">
+              <a:spcAft>
+                <a:spcPts val="0"/>
+              </a:spcAft>
+            </a:pPr>
+            <a:r>
+              <a:rPr sz="1400" i="0">
+                <a:solidFill>
+                  <a:srgbClr val="E2E8F0"/>
+                </a:solidFill>
+                <a:latin typeface="DejaVu Sans Mono"/>
+              </a:rPr>
+              <a:t>    s := &amp;Server{host: host, port: 8080} </a:t>
+            </a:r>
+            <a:r>
+              <a:rPr sz="1400" i="1">
+                <a:solidFill>
+                  <a:srgbClr val="94A3B8"/>
+                </a:solidFill>
+                <a:latin typeface="DejaVu Sans Mono"/>
+              </a:rPr>
+              <a:t>// default ก่อน</a:t>
+            </a:r>
+          </a:p>
+          <a:p>
+            <a:pPr algn="l">
+              <a:spcAft>
+                <a:spcPts val="0"/>
+              </a:spcAft>
+            </a:pPr>
+            <a:r>
+              <a:rPr sz="1400" i="0">
+                <a:solidFill>
+                  <a:srgbClr val="E2E8F0"/>
+                </a:solidFill>
+                <a:latin typeface="DejaVu Sans Mono"/>
+              </a:rPr>
+              <a:t>    for _, o := range opts { o(s) }      </a:t>
+            </a:r>
+            <a:r>
+              <a:rPr sz="1400" i="1">
+                <a:solidFill>
+                  <a:srgbClr val="94A3B8"/>
+                </a:solidFill>
+                <a:latin typeface="DejaVu Sans Mono"/>
+              </a:rPr>
+              <a:t>// แล้ว override</a:t>
+            </a:r>
+          </a:p>
+          <a:p>
+            <a:pPr algn="l">
+              <a:spcAft>
+                <a:spcPts val="0"/>
+              </a:spcAft>
+            </a:pPr>
+            <a:r>
+              <a:rPr sz="1400" i="0">
+                <a:solidFill>
+                  <a:srgbClr val="E2E8F0"/>
+                </a:solidFill>
+                <a:latin typeface="DejaVu Sans Mono"/>
+              </a:rPr>
+              <a:t>    return s</a:t>
+            </a:r>
+          </a:p>
+          <a:p>
+            <a:pPr algn="l">
+              <a:spcAft>
+                <a:spcPts val="0"/>
+              </a:spcAft>
+            </a:pPr>
+            <a:r>
+              <a:rPr sz="1400" i="0">
+                <a:solidFill>
+                  <a:srgbClr val="E2E8F0"/>
+                </a:solidFill>
+                <a:latin typeface="DejaVu Sans Mono"/>
+              </a:rPr>
+              <a:t>}</a:t>
+            </a:r>
+          </a:p>
+          <a:p>
+            <a:pPr algn="l">
+              <a:spcAft>
+                <a:spcPts val="0"/>
+              </a:spcAft>
+            </a:pPr>
+          </a:p>
+          <a:p>
+            <a:pPr algn="l">
+              <a:spcAft>
+                <a:spcPts val="0"/>
+              </a:spcAft>
+            </a:pPr>
+            <a:r>
+              <a:rPr sz="1400" i="0">
+                <a:solidFill>
+                  <a:srgbClr val="E2E8F0"/>
+                </a:solidFill>
+                <a:latin typeface="DejaVu Sans Mono"/>
+              </a:rPr>
+              <a:t>srv := New("localhost", WithPort(9090))</a:t>
+            </a:r>
+          </a:p>
+        </p:txBody>
+      </p:sp>
+      <p:sp>
+        <p:nvSpPr>
+          <p:cNvPr id="5" name="TextBox 4"/>
+          <p:cNvSpPr txBox="1"/>
+          <p:nvPr/>
+        </p:nvSpPr>
+        <p:spPr>
+          <a:xfrm>
+            <a:off x="548640" y="5440680"/>
+            <a:ext cx="11064240" cy="4937760"/>
+          </a:xfrm>
+          <a:prstGeom prst="rect">
+            <a:avLst/>
+          </a:prstGeom>
+          <a:noFill/>
+        </p:spPr>
+        <p:txBody>
+          <a:bodyPr wrap="square">
+            <a:spAutoFit/>
+          </a:bodyPr>
+          <a:lstStyle/>
+          <a:p>
+            <a:pPr algn="l">
+              <a:spcAft>
+                <a:spcPts val="500"/>
+              </a:spcAft>
+            </a:pPr>
+            <a:r>
+              <a:rPr sz="1500" b="0" i="0">
+                <a:solidFill>
+                  <a:srgbClr val="0F172A"/>
+                </a:solidFill>
+                <a:latin typeface="Noto Sans Thai Looped"/>
+              </a:rPr>
+              <a:t>• WithPort(</a:t>
+            </a:r>
+            <a:r>
+              <a:rPr sz="1500" b="0" i="0">
+                <a:solidFill>
+                  <a:srgbClr val="0F172A"/>
+                </a:solidFill>
+                <a:latin typeface="Ubuntu"/>
+              </a:rPr>
+              <a:t>9090</a:t>
+            </a:r>
+            <a:r>
+              <a:rPr sz="1500" b="0" i="0">
+                <a:solidFill>
+                  <a:srgbClr val="0F172A"/>
+                </a:solidFill>
+                <a:latin typeface="Noto Sans Thai Looped"/>
+              </a:rPr>
+              <a:t>) คือ 'ฟังก์ชันที่คืน action เล็ก ๆ' เอาไว้ยิงใส่ constructor ตอนหลัง</a:t>
+            </a:r>
+          </a:p>
+          <a:p>
+            <a:pPr algn="l">
+              <a:spcAft>
+                <a:spcPts val="500"/>
+              </a:spcAft>
+            </a:pPr>
+            <a:r>
+              <a:rPr sz="1500" b="0" i="0">
+                <a:solidFill>
+                  <a:srgbClr val="0F172A"/>
+                </a:solidFill>
+                <a:latin typeface="Noto Sans Thai Looped"/>
+              </a:rPr>
+              <a:t>• ทำไมไม่ใช้ struct config? — options ขยายได้โดยไม่ทำ breaking change และ default ชัดเจน</a:t>
+            </a:r>
+          </a:p>
+        </p:txBody>
+      </p:sp>
+      <p:sp>
+        <p:nvSpPr>
+          <p:cNvPr id="6" name="Rounded Rectangle 5"/>
+          <p:cNvSpPr/>
+          <p:nvPr/>
+        </p:nvSpPr>
+        <p:spPr>
+          <a:xfrm>
+            <a:off x="548640" y="5989320"/>
+            <a:ext cx="11109960" cy="566928"/>
+          </a:xfrm>
+          <a:prstGeom prst="roundRect">
+            <a:avLst/>
+          </a:prstGeom>
+          <a:solidFill>
+            <a:srgbClr val="CCFBF1"/>
+          </a:solidFill>
+          <a:ln>
+            <a:noFill/>
+          </a:ln>
+          <a:effectLst/>
+        </p:spPr>
+        <p:style>
+          <a:lnRef idx="1">
+            <a:schemeClr val="accent1"/>
+          </a:lnRef>
+          <a:fillRef idx="3">
+            <a:schemeClr val="accent1"/>
+          </a:fillRef>
+          <a:effectRef idx="2">
+            <a:schemeClr val="accent1"/>
+          </a:effectRef>
+          <a:fontRef idx="minor">
+            <a:schemeClr val="lt1"/>
+          </a:fontRef>
+        </p:style>
+        <p:txBody>
+          <a:bodyPr rtlCol="0" anchor="ctr" tIns="54864" bIns="36576" wrap="square"/>
+          <a:lstStyle/>
+          <a:p>
+            <a:pPr algn="l">
+              <a:spcAft>
+                <a:spcPts val="0"/>
+              </a:spcAft>
+            </a:pPr>
+            <a:r>
+              <a:rPr sz="1500" b="1" i="0">
+                <a:solidFill>
+                  <a:srgbClr val="0F766E"/>
+                </a:solidFill>
+                <a:latin typeface="Noto Sans Thai Looped"/>
+              </a:rPr>
+              <a:t>จำไว้: คุณเขียน FP อยู่แล้วโดยไม่รู้ตัว — งานวันนี้แค่ตั้งชื่อให้สิ่งที่ทำอยู่</a:t>
+            </a:r>
+          </a:p>
+        </p:txBody>
+      </p:sp>
+    </p:spTree>
+  </p:cSld>
+  <p:clrMapOvr>
+    <a:masterClrMapping/>
+  </p:clrMapOvr>
+</p:sld>
+</file>
+
+<file path=ppt/slides/slide12.xml><?xml version="1.0" encoding="utf-8"?>
+<p:sld xmlns:a="http://schemas.openxmlformats.org/drawingml/2006/main" xmlns:p="http://schemas.openxmlformats.org/presentationml/2006/main" xmlns:r="http://schemas.openxmlformats.org/officeDocument/2006/relationships">
+  <p:cSld>
+    <p:spTree>
+      <p:nvGrpSpPr>
+        <p:cNvPr id="1" name=""/>
+        <p:cNvGrpSpPr/>
+        <p:nvPr/>
+      </p:nvGrpSpPr>
+      <p:grpSpPr/>
+      <p:sp>
+        <p:nvSpPr>
+          <p:cNvPr id="2" name="TextBox 1"/>
+          <p:cNvSpPr txBox="1"/>
+          <p:nvPr/>
+        </p:nvSpPr>
+        <p:spPr>
+          <a:xfrm>
+            <a:off x="502920" y="292608"/>
+            <a:ext cx="11155680" cy="914400"/>
+          </a:xfrm>
+          <a:prstGeom prst="rect">
+            <a:avLst/>
+          </a:prstGeom>
+          <a:noFill/>
+        </p:spPr>
+        <p:txBody>
+          <a:bodyPr wrap="square">
+            <a:spAutoFit/>
+          </a:bodyPr>
+          <a:lstStyle/>
+          <a:p>
+            <a:pPr algn="l">
+              <a:spcAft>
+                <a:spcPts val="200"/>
+              </a:spcAft>
+            </a:pPr>
+            <a:r>
+              <a:rPr sz="3000" b="1" i="0">
+                <a:solidFill>
+                  <a:srgbClr val="0F172A"/>
+                </a:solidFill>
+                <a:latin typeface="Noto Sans Thai Looped"/>
+              </a:rPr>
+              <a:t>Middleware = Function Composition</a:t>
+            </a:r>
+          </a:p>
+          <a:p>
+            <a:pPr algn="l">
+              <a:spcAft>
+                <a:spcPts val="600"/>
+              </a:spcAft>
+            </a:pPr>
+            <a:r>
+              <a:rPr sz="1500" b="0" i="0">
+                <a:solidFill>
+                  <a:srgbClr val="64748B"/>
+                </a:solidFill>
+                <a:latin typeface="Noto Sans Thai Looped"/>
+              </a:rPr>
+              <a:t>http.Handler เป็น function เดียว → wrapper ครอบซ้อนกันคือ composition แบบ Go</a:t>
+            </a:r>
+          </a:p>
+        </p:txBody>
+      </p:sp>
+      <p:sp>
+        <p:nvSpPr>
+          <p:cNvPr id="3" name="Rectangle 2"/>
+          <p:cNvSpPr/>
+          <p:nvPr/>
+        </p:nvSpPr>
+        <p:spPr>
+          <a:xfrm>
+            <a:off x="502920" y="1207008"/>
+            <a:ext cx="11201400" cy="27940"/>
+          </a:xfrm>
+          <a:prstGeom prst="rect">
+            <a:avLst/>
+          </a:prstGeom>
+          <a:solidFill>
+            <a:srgbClr val="0D9488"/>
+          </a:solidFill>
+          <a:ln>
+            <a:noFill/>
+          </a:ln>
+        </p:spPr>
+        <p:style>
+          <a:lnRef idx="1">
+            <a:schemeClr val="accent1"/>
+          </a:lnRef>
+          <a:fillRef idx="3">
+            <a:schemeClr val="accent1"/>
+          </a:fillRef>
+          <a:effectRef idx="2">
+            <a:schemeClr val="accent1"/>
+          </a:effectRef>
+          <a:fontRef idx="minor">
+            <a:schemeClr val="lt1"/>
+          </a:fontRef>
+        </p:style>
+        <p:txBody>
+          <a:bodyPr rtlCol="0" anchor="ctr"/>
+          <a:lstStyle/>
+          <a:p>
+            <a:pPr algn="ctr"/>
+          </a:p>
+        </p:txBody>
+      </p:sp>
+      <p:sp>
+        <p:nvSpPr>
+          <p:cNvPr id="4" name="Rounded Rectangle 3"/>
           <p:cNvSpPr/>
           <p:nvPr/>
         </p:nvSpPr>
@@ -4998,6 +6111,22 @@
               </a:spcAft>
             </a:pPr>
             <a:r>
+              <a:rPr sz="1200" i="1">
+                <a:solidFill>
+                  <a:srgbClr val="94A3B8"/>
+                </a:solidFill>
+                <a:latin typeface="DejaVu Sans Mono"/>
+              </a:rPr>
+              <a:t>// เอา middleware มาครอบซ้อนกัน = composition</a:t>
+            </a:r>
+          </a:p>
+          <a:p>
+            <a:pPr algn="l">
+              <a:spcAft>
+                <a:spcPts val="0"/>
+              </a:spcAft>
+            </a:pPr>
+            <a:r>
               <a:rPr sz="1200" i="0">
                 <a:solidFill>
                   <a:srgbClr val="E2E8F0"/>
@@ -5123,188 +6252,25 @@
       </p:sp>
       <p:sp>
         <p:nvSpPr>
-          <p:cNvPr id="6" name="TextBox 5"/>
-          <p:cNvSpPr txBox="1"/>
+          <p:cNvPr id="5" name="Rounded Rectangle 4"/>
+          <p:cNvSpPr/>
           <p:nvPr/>
         </p:nvSpPr>
         <p:spPr>
           <a:xfrm>
-            <a:off x="548640" y="5715000"/>
-            <a:ext cx="11064240" cy="4937760"/>
-          </a:xfrm>
-          <a:prstGeom prst="rect">
-            <a:avLst/>
-          </a:prstGeom>
-          <a:noFill/>
-        </p:spPr>
-        <p:txBody>
-          <a:bodyPr wrap="square">
-            <a:spAutoFit/>
-          </a:bodyPr>
-          <a:lstStyle/>
-          <a:p>
-            <a:pPr algn="l">
-              <a:spcAft>
-                <a:spcPts val="800"/>
-              </a:spcAft>
-            </a:pPr>
-            <a:r>
-              <a:rPr sz="1500" b="0" i="0">
-                <a:solidFill>
-                  <a:srgbClr val="0F172A"/>
-                </a:solidFill>
-                <a:latin typeface="Noto Sans Thai Looped"/>
-              </a:rPr>
-              <a:t>• http.Handler เป็น function เดียว → wrapper ครอบซ้อน ๆ = composition แบบ Go</a:t>
-            </a:r>
-          </a:p>
-          <a:p>
-            <a:pPr algn="l">
-              <a:spcAft>
-                <a:spcPts val="800"/>
-              </a:spcAft>
-            </a:pPr>
-            <a:r>
-              <a:rPr sz="1500" b="0" i="0">
-                <a:solidFill>
-                  <a:srgbClr val="0F172A"/>
-                </a:solidFill>
-                <a:latin typeface="Noto Sans Thai Looped"/>
-              </a:rPr>
-              <a:t>• อ่าน Chain(Logger, Recover) จากในออกนอก: ลำดับ = ความหมายทางธุรกิจ</a:t>
-            </a:r>
-          </a:p>
-        </p:txBody>
-      </p:sp>
-    </p:spTree>
-  </p:cSld>
-  <p:clrMapOvr>
-    <a:masterClrMapping/>
-  </p:clrMapOvr>
-</p:sld>
-</file>
-
-<file path=ppt/slides/slide11.xml><?xml version="1.0" encoding="utf-8"?>
-<p:sld xmlns:a="http://schemas.openxmlformats.org/drawingml/2006/main" xmlns:p="http://schemas.openxmlformats.org/presentationml/2006/main" xmlns:r="http://schemas.openxmlformats.org/officeDocument/2006/relationships">
-  <p:cSld>
-    <p:spTree>
-      <p:nvGrpSpPr>
-        <p:cNvPr id="1" name=""/>
-        <p:cNvGrpSpPr/>
-        <p:nvPr/>
-      </p:nvGrpSpPr>
-      <p:grpSpPr/>
-      <p:sp>
-        <p:nvSpPr>
-          <p:cNvPr id="2" name="TextBox 1"/>
-          <p:cNvSpPr txBox="1"/>
-          <p:nvPr/>
-        </p:nvSpPr>
-        <p:spPr>
-          <a:xfrm>
-            <a:off x="502920" y="292608"/>
-            <a:ext cx="8778240" cy="914400"/>
-          </a:xfrm>
-          <a:prstGeom prst="rect">
-            <a:avLst/>
-          </a:prstGeom>
-          <a:noFill/>
-        </p:spPr>
-        <p:txBody>
-          <a:bodyPr wrap="square">
-            <a:spAutoFit/>
-          </a:bodyPr>
-          <a:lstStyle/>
-          <a:p>
-            <a:pPr algn="l">
-              <a:spcAft>
-                <a:spcPts val="200"/>
-              </a:spcAft>
-            </a:pPr>
-            <a:r>
-              <a:rPr sz="3000" b="1" i="0">
-                <a:solidFill>
-                  <a:srgbClr val="0F172A"/>
-                </a:solidFill>
-                <a:latin typeface="Noto Sans Thai Looped"/>
-              </a:rPr>
-              <a:t>เวิร์กชอป: Coupon Email</a:t>
-            </a:r>
-          </a:p>
-          <a:p>
-            <a:pPr algn="l">
-              <a:spcAft>
-                <a:spcPts val="600"/>
-              </a:spcAft>
-            </a:pPr>
-            <a:r>
-              <a:rPr sz="1400" b="0" i="0">
-                <a:solidFill>
-                  <a:srgbClr val="64748B"/>
-                </a:solidFill>
-                <a:latin typeface="Noto Sans Thai Looped"/>
-              </a:rPr>
-              <a:t>โจทย์จริงจาก Grokking Simplicity บท </a:t>
-            </a:r>
-            <a:r>
-              <a:rPr sz="1400" b="0" i="0">
-                <a:solidFill>
-                  <a:srgbClr val="64748B"/>
-                </a:solidFill>
-                <a:latin typeface="Ubuntu"/>
-              </a:rPr>
-              <a:t>3–5</a:t>
-            </a:r>
-            <a:r>
-              <a:rPr sz="1400" b="0" i="0">
-                <a:solidFill>
-                  <a:srgbClr val="64748B"/>
-                </a:solidFill>
-                <a:latin typeface="Noto Sans Thai Looped"/>
-              </a:rPr>
-              <a:t> (พอร์ตเป็น Go แล้ว: go-fp/</a:t>
-            </a:r>
-            <a:r>
-              <a:rPr sz="1400" b="0" i="0">
-                <a:solidFill>
-                  <a:srgbClr val="64748B"/>
-                </a:solidFill>
-                <a:latin typeface="Ubuntu"/>
-              </a:rPr>
-              <a:t>07-</a:t>
-            </a:r>
-            <a:r>
-              <a:rPr sz="1400" b="0" i="0">
-                <a:solidFill>
-                  <a:srgbClr val="64748B"/>
-                </a:solidFill>
-                <a:latin typeface="Noto Sans Thai Looped"/>
-              </a:rPr>
-              <a:t>coupon-email-exercise)</a:t>
-            </a:r>
-          </a:p>
-        </p:txBody>
-      </p:sp>
-      <p:sp>
-        <p:nvSpPr>
-          <p:cNvPr id="3" name="Rounded Rectangle 2"/>
-          <p:cNvSpPr/>
-          <p:nvPr/>
-        </p:nvSpPr>
-        <p:spPr>
-          <a:xfrm>
-            <a:off x="10104120" y="384048"/>
-            <a:ext cx="1600200" cy="502920"/>
+            <a:off x="548640" y="5989320"/>
+            <a:ext cx="11109960" cy="566928"/>
           </a:xfrm>
           <a:prstGeom prst="roundRect">
             <a:avLst/>
           </a:prstGeom>
           <a:solidFill>
-            <a:srgbClr val="0D9488"/>
+            <a:srgbClr val="CCFBF1"/>
           </a:solidFill>
           <a:ln>
             <a:noFill/>
           </a:ln>
+          <a:effectLst/>
         </p:spPr>
         <p:style>
           <a:lnRef idx="1">
@@ -5321,29 +6287,138 @@
           </a:fontRef>
         </p:style>
         <p:txBody>
-          <a:bodyPr rtlCol="0" anchor="ctr" wrap="none"/>
-          <a:lstStyle/>
-          <a:p>
-            <a:pPr algn="ctr">
-              <a:spcAft>
-                <a:spcPts val="0"/>
-              </a:spcAft>
-            </a:pPr>
-            <a:r>
-              <a:rPr sz="1400" b="1" i="0">
-                <a:solidFill>
-                  <a:srgbClr val="FFFFFF"/>
+          <a:bodyPr rtlCol="0" anchor="ctr" tIns="54864" bIns="36576" wrap="square"/>
+          <a:lstStyle/>
+          <a:p>
+            <a:pPr algn="l">
+              <a:spcAft>
+                <a:spcPts val="0"/>
+              </a:spcAft>
+            </a:pPr>
+            <a:r>
+              <a:rPr sz="1500" b="1" i="0">
+                <a:solidFill>
+                  <a:srgbClr val="0F766E"/>
+                </a:solidFill>
+                <a:latin typeface="Noto Sans Thai Looped"/>
+              </a:rPr>
+              <a:t>จำไว้: ลำดับของ Chain(Logger, Recover) มีความหมาย — composition คือ 'ลำดับ = ความหมาย'</a:t>
+            </a:r>
+          </a:p>
+        </p:txBody>
+      </p:sp>
+    </p:spTree>
+  </p:cSld>
+  <p:clrMapOvr>
+    <a:masterClrMapping/>
+  </p:clrMapOvr>
+</p:sld>
+</file>
+
+<file path=ppt/slides/slide13.xml><?xml version="1.0" encoding="utf-8"?>
+<p:sld xmlns:a="http://schemas.openxmlformats.org/drawingml/2006/main" xmlns:p="http://schemas.openxmlformats.org/presentationml/2006/main" xmlns:r="http://schemas.openxmlformats.org/officeDocument/2006/relationships">
+  <p:cSld>
+    <p:spTree>
+      <p:nvGrpSpPr>
+        <p:cNvPr id="1" name=""/>
+        <p:cNvGrpSpPr/>
+        <p:nvPr/>
+      </p:nvGrpSpPr>
+      <p:grpSpPr/>
+      <p:sp>
+        <p:nvSpPr>
+          <p:cNvPr id="2" name="TextBox 1"/>
+          <p:cNvSpPr txBox="1"/>
+          <p:nvPr/>
+        </p:nvSpPr>
+        <p:spPr>
+          <a:xfrm>
+            <a:off x="502920" y="292608"/>
+            <a:ext cx="11155680" cy="914400"/>
+          </a:xfrm>
+          <a:prstGeom prst="rect">
+            <a:avLst/>
+          </a:prstGeom>
+          <a:noFill/>
+        </p:spPr>
+        <p:txBody>
+          <a:bodyPr wrap="square">
+            <a:spAutoFit/>
+          </a:bodyPr>
+          <a:lstStyle/>
+          <a:p>
+            <a:pPr algn="l">
+              <a:spcAft>
+                <a:spcPts val="200"/>
+              </a:spcAft>
+            </a:pPr>
+            <a:r>
+              <a:rPr sz="3000" b="1" i="0">
+                <a:solidFill>
+                  <a:srgbClr val="0F172A"/>
+                </a:solidFill>
+                <a:latin typeface="Noto Sans Thai Looped"/>
+              </a:rPr>
+              <a:t>Workshop: แยกคูปองออกจากการส่งอีเมล</a:t>
+            </a:r>
+          </a:p>
+          <a:p>
+            <a:pPr algn="l">
+              <a:spcAft>
+                <a:spcPts val="600"/>
+              </a:spcAft>
+            </a:pPr>
+            <a:r>
+              <a:rPr sz="1500" b="0" i="0">
+                <a:solidFill>
+                  <a:srgbClr val="64748B"/>
+                </a:solidFill>
+                <a:latin typeface="Noto Sans Thai Looped"/>
+              </a:rPr>
+              <a:t>โจทย์จาก Grokking Simplicity บท </a:t>
+            </a:r>
+            <a:r>
+              <a:rPr sz="1500" b="0" i="0">
+                <a:solidFill>
+                  <a:srgbClr val="64748B"/>
                 </a:solidFill>
                 <a:latin typeface="Ubuntu"/>
               </a:rPr>
-              <a:t>1:25–1:45</a:t>
-            </a:r>
-          </a:p>
-        </p:txBody>
-      </p:sp>
-      <p:sp>
-        <p:nvSpPr>
-          <p:cNvPr id="4" name="Rectangle 3"/>
+              <a:t>3–5</a:t>
+            </a:r>
+            <a:r>
+              <a:rPr sz="1500" b="0" i="0">
+                <a:solidFill>
+                  <a:srgbClr val="64748B"/>
+                </a:solidFill>
+                <a:latin typeface="Noto Sans Thai Looped"/>
+              </a:rPr>
+              <a:t> พอร์ตเป็น Go — repo: go-fp/</a:t>
+            </a:r>
+            <a:r>
+              <a:rPr sz="1500" b="0" i="0">
+                <a:solidFill>
+                  <a:srgbClr val="64748B"/>
+                </a:solidFill>
+                <a:latin typeface="Ubuntu"/>
+              </a:rPr>
+              <a:t>07-</a:t>
+            </a:r>
+            <a:r>
+              <a:rPr sz="1500" b="0" i="0">
+                <a:solidFill>
+                  <a:srgbClr val="64748B"/>
+                </a:solidFill>
+                <a:latin typeface="Noto Sans Thai Looped"/>
+              </a:rPr>
+              <a:t>coupon-email-exercise</a:t>
+            </a:r>
+          </a:p>
+        </p:txBody>
+      </p:sp>
+      <p:sp>
+        <p:nvSpPr>
+          <p:cNvPr id="3" name="Rectangle 2"/>
           <p:cNvSpPr/>
           <p:nvPr/>
         </p:nvSpPr>
@@ -5386,7 +6461,7 @@
       </p:sp>
       <p:sp>
         <p:nvSpPr>
-          <p:cNvPr id="5" name="Rounded Rectangle 4"/>
+          <p:cNvPr id="4" name="Rounded Rectangle 3"/>
           <p:cNvSpPr/>
           <p:nvPr/>
         </p:nvSpPr>
@@ -5436,7 +6511,7 @@
                 </a:solidFill>
                 <a:latin typeface="DejaVu Sans Mono"/>
               </a:rPr>
-              <a:t>// จุดเริ่ม: ทุกอย่างอยู่ในฟังก์ชันเดียว</a:t>
+              <a:t>// ทุกอย่างอยู่ในฟังก์ชันเดียว — มองแล้วเจออะไรบ้าง?</a:t>
             </a:r>
           </a:p>
           <a:p>
@@ -5667,7 +6742,7 @@
       </p:sp>
       <p:sp>
         <p:nvSpPr>
-          <p:cNvPr id="6" name="Rounded Rectangle 5"/>
+          <p:cNvPr id="5" name="Rounded Rectangle 4"/>
           <p:cNvSpPr/>
           <p:nvPr/>
         </p:nvSpPr>
@@ -5724,7 +6799,7 @@
       </p:sp>
       <p:sp>
         <p:nvSpPr>
-          <p:cNvPr id="7" name="TextBox 6"/>
+          <p:cNvPr id="6" name="TextBox 5"/>
           <p:cNvSpPr txBox="1"/>
           <p:nvPr/>
         </p:nvSpPr>
@@ -5756,7 +6831,7 @@
                 </a:solidFill>
                 <a:latin typeface="Noto Sans Thai Looped"/>
               </a:rPr>
-              <a:t>โจทย์</a:t>
+              <a:t>โจทย์ของคุณ</a:t>
             </a:r>
           </a:p>
           <a:p>
@@ -5781,7 +6856,7 @@
                 </a:solidFill>
                 <a:latin typeface="Noto Sans Thai Looped"/>
               </a:rPr>
-              <a:t> จับคู่ — แยก A/C/D ให้ครบ (</a:t>
+              <a:t> แยก A/C/D ให้ครบ (</a:t>
             </a:r>
             <a:r>
               <a:rPr sz="1500" b="0" i="0">
@@ -5824,7 +6899,7 @@
                 </a:solidFill>
                 <a:latin typeface="Noto Sans Thai Looped"/>
               </a:rPr>
-              <a:t> ดึง FindApplicableCoupons ออกมา + เขียน table-driven test ก่อน implementation (</a:t>
+              <a:t> ดึง FindApplicableCoupons ออกมา — เขียน table-driven test ก่อน implementation (</a:t>
             </a:r>
             <a:r>
               <a:rPr sz="1500" b="0" i="0">
@@ -5944,7 +7019,7 @@
                 </a:solidFill>
                 <a:latin typeface="Noto Sans Thai Looped"/>
               </a:rPr>
-              <a:t>กติกา: เงินเป็นบาทเต็มไม่ติดลบ · coupon ไม่มีหมวด = ใช้ได้ทุกหมวด · รักษาลำดับเดิม</a:t>
+              <a:t>กติกาโจทย์: เงินเป็นบาทเต็มไม่ติดลบ · coupon ไม่มีหมวด = ใช้ได้ทุกหมวด · รักษาลำดับเดิม</a:t>
             </a:r>
           </a:p>
         </p:txBody>
@@ -5957,7 +7032,7 @@
 </p:sld>
 </file>
 
-<file path=ppt/slides/slide12.xml><?xml version="1.0" encoding="utf-8"?>
+<file path=ppt/slides/slide14.xml><?xml version="1.0" encoding="utf-8"?>
 <p:sld xmlns:a="http://schemas.openxmlformats.org/drawingml/2006/main" xmlns:p="http://schemas.openxmlformats.org/presentationml/2006/main" xmlns:r="http://schemas.openxmlformats.org/officeDocument/2006/relationships">
   <p:cSld>
     <p:spTree>
@@ -5976,7 +7051,7 @@
         <p:spPr>
           <a:xfrm>
             <a:off x="502920" y="292608"/>
-            <a:ext cx="8778240" cy="914400"/>
+            <a:ext cx="11155680" cy="914400"/>
           </a:xfrm>
           <a:prstGeom prst="rect">
             <a:avLst/>
@@ -6001,88 +7076,14 @@
                 </a:solidFill>
                 <a:latin typeface="Noto Sans Thai Looped"/>
               </a:rPr>
-              <a:t>เฉลย + ของหวานปิดท้าย: Lazy Pipeline (Go </a:t>
-            </a:r>
-            <a:r>
-              <a:rPr sz="3000" b="1" i="0">
-                <a:solidFill>
-                  <a:srgbClr val="0F172A"/>
-                </a:solidFill>
-                <a:latin typeface="Ubuntu"/>
-              </a:rPr>
-              <a:t>1.23</a:t>
-            </a:r>
-            <a:r>
-              <a:rPr sz="3000" b="1" i="0">
-                <a:solidFill>
-                  <a:srgbClr val="0F172A"/>
-                </a:solidFill>
-                <a:latin typeface="Noto Sans Thai Looped"/>
-              </a:rPr>
-              <a:t>+)</a:t>
-            </a:r>
-          </a:p>
-        </p:txBody>
-      </p:sp>
-      <p:sp>
-        <p:nvSpPr>
-          <p:cNvPr id="3" name="Rounded Rectangle 2"/>
-          <p:cNvSpPr/>
-          <p:nvPr/>
-        </p:nvSpPr>
-        <p:spPr>
-          <a:xfrm>
-            <a:off x="10104120" y="384048"/>
-            <a:ext cx="1600200" cy="502920"/>
-          </a:xfrm>
-          <a:prstGeom prst="roundRect">
-            <a:avLst/>
-          </a:prstGeom>
-          <a:solidFill>
-            <a:srgbClr val="0D9488"/>
-          </a:solidFill>
-          <a:ln>
-            <a:noFill/>
-          </a:ln>
-        </p:spPr>
-        <p:style>
-          <a:lnRef idx="1">
-            <a:schemeClr val="accent1"/>
-          </a:lnRef>
-          <a:fillRef idx="3">
-            <a:schemeClr val="accent1"/>
-          </a:fillRef>
-          <a:effectRef idx="2">
-            <a:schemeClr val="accent1"/>
-          </a:effectRef>
-          <a:fontRef idx="minor">
-            <a:schemeClr val="lt1"/>
-          </a:fontRef>
-        </p:style>
-        <p:txBody>
-          <a:bodyPr rtlCol="0" anchor="ctr" wrap="none"/>
-          <a:lstStyle/>
-          <a:p>
-            <a:pPr algn="ctr">
-              <a:spcAft>
-                <a:spcPts val="0"/>
-              </a:spcAft>
-            </a:pPr>
-            <a:r>
-              <a:rPr sz="1400" b="1" i="0">
-                <a:solidFill>
-                  <a:srgbClr val="FFFFFF"/>
-                </a:solidFill>
-                <a:latin typeface="Ubuntu"/>
-              </a:rPr>
-              <a:t>1:45–2:00</a:t>
-            </a:r>
-          </a:p>
-        </p:txBody>
-      </p:sp>
-      <p:sp>
-        <p:nvSpPr>
-          <p:cNvPr id="4" name="Rectangle 3"/>
+              <a:t>เฉลย: calculation ที่ pure เต็มตัว + action ที่บางที่สุด</a:t>
+            </a:r>
+          </a:p>
+        </p:txBody>
+      </p:sp>
+      <p:sp>
+        <p:nvSpPr>
+          <p:cNvPr id="3" name="Rectangle 2"/>
           <p:cNvSpPr/>
           <p:nvPr/>
         </p:nvSpPr>
@@ -6125,14 +7126,14 @@
       </p:sp>
       <p:sp>
         <p:nvSpPr>
-          <p:cNvPr id="5" name="Rounded Rectangle 4"/>
+          <p:cNvPr id="4" name="Rounded Rectangle 3"/>
           <p:cNvSpPr/>
           <p:nvPr/>
         </p:nvSpPr>
         <p:spPr>
           <a:xfrm>
-            <a:off x="548640" y="1600200"/>
-            <a:ext cx="5394960" cy="3154680"/>
+            <a:off x="548640" y="1691640"/>
+            <a:ext cx="7132320" cy="4023360"/>
           </a:xfrm>
           <a:prstGeom prst="roundRect">
             <a:avLst/>
@@ -6169,23 +7170,23 @@
               </a:spcAft>
             </a:pPr>
             <a:r>
-              <a:rPr sz="1050" i="1">
+              <a:rPr sz="1300" i="1">
                 <a:solidFill>
                   <a:srgbClr val="94A3B8"/>
                 </a:solidFill>
                 <a:latin typeface="DejaVu Sans Mono"/>
               </a:rPr>
-              <a:t>// Calculation — pure ทดสอบได้โดยไม่ต้อง mock อะไร</a:t>
-            </a:r>
-          </a:p>
-          <a:p>
-            <a:pPr algn="l">
-              <a:spcAft>
-                <a:spcPts val="0"/>
-              </a:spcAft>
-            </a:pPr>
-            <a:r>
-              <a:rPr sz="1050" i="0">
+              <a:t>// Calculation — pure: input เดิม ได้คูปองชุดเดิมเสมอ</a:t>
+            </a:r>
+          </a:p>
+          <a:p>
+            <a:pPr algn="l">
+              <a:spcAft>
+                <a:spcPts val="0"/>
+              </a:spcAft>
+            </a:pPr>
+            <a:r>
+              <a:rPr sz="1300" i="0">
                 <a:solidFill>
                   <a:srgbClr val="E2E8F0"/>
                 </a:solidFill>
@@ -6201,7 +7202,7 @@
               </a:spcAft>
             </a:pPr>
             <a:r>
-              <a:rPr sz="1050" i="0">
+              <a:rPr sz="1300" i="0">
                 <a:solidFill>
                   <a:srgbClr val="E2E8F0"/>
                 </a:solidFill>
@@ -6217,7 +7218,7 @@
               </a:spcAft>
             </a:pPr>
             <a:r>
-              <a:rPr sz="1050" i="0">
+              <a:rPr sz="1300" i="0">
                 <a:solidFill>
                   <a:srgbClr val="E2E8F0"/>
                 </a:solidFill>
@@ -6233,7 +7234,7 @@
               </a:spcAft>
             </a:pPr>
             <a:r>
-              <a:rPr sz="1050" i="0">
+              <a:rPr sz="1300" i="0">
                 <a:solidFill>
                   <a:srgbClr val="E2E8F0"/>
                 </a:solidFill>
@@ -6249,7 +7250,7 @@
               </a:spcAft>
             </a:pPr>
             <a:r>
-              <a:rPr sz="1050" i="0">
+              <a:rPr sz="1300" i="0">
                 <a:solidFill>
                   <a:srgbClr val="E2E8F0"/>
                 </a:solidFill>
@@ -6265,7 +7266,7 @@
               </a:spcAft>
             </a:pPr>
             <a:r>
-              <a:rPr sz="1050" i="0">
+              <a:rPr sz="1300" i="0">
                 <a:solidFill>
                   <a:srgbClr val="E2E8F0"/>
                 </a:solidFill>
@@ -6281,7 +7282,7 @@
               </a:spcAft>
             </a:pPr>
             <a:r>
-              <a:rPr sz="1050" i="0">
+              <a:rPr sz="1300" i="0">
                 <a:solidFill>
                   <a:srgbClr val="E2E8F0"/>
                 </a:solidFill>
@@ -6297,7 +7298,7 @@
               </a:spcAft>
             </a:pPr>
             <a:r>
-              <a:rPr sz="1050" i="0">
+              <a:rPr sz="1300" i="0">
                 <a:solidFill>
                   <a:srgbClr val="E2E8F0"/>
                 </a:solidFill>
@@ -6313,7 +7314,7 @@
               </a:spcAft>
             </a:pPr>
             <a:r>
-              <a:rPr sz="1050" i="0">
+              <a:rPr sz="1300" i="0">
                 <a:solidFill>
                   <a:srgbClr val="E2E8F0"/>
                 </a:solidFill>
@@ -6329,7 +7330,7 @@
               </a:spcAft>
             </a:pPr>
             <a:r>
-              <a:rPr sz="1050" i="0">
+              <a:rPr sz="1300" i="0">
                 <a:solidFill>
                   <a:srgbClr val="E2E8F0"/>
                 </a:solidFill>
@@ -6345,7 +7346,7 @@
               </a:spcAft>
             </a:pPr>
             <a:r>
-              <a:rPr sz="1050" i="0">
+              <a:rPr sz="1300" i="0">
                 <a:solidFill>
                   <a:srgbClr val="E2E8F0"/>
                 </a:solidFill>
@@ -6368,23 +7369,23 @@
               </a:spcAft>
             </a:pPr>
             <a:r>
-              <a:rPr sz="1050" i="1">
+              <a:rPr sz="1300" i="1">
                 <a:solidFill>
                   <a:srgbClr val="94A3B8"/>
                 </a:solidFill>
                 <a:latin typeface="DejaVu Sans Mono"/>
               </a:rPr>
-              <a:t>// Action — บาง ๆ ทำหน้าที่เดียว</a:t>
-            </a:r>
-          </a:p>
-          <a:p>
-            <a:pPr algn="l">
-              <a:spcAft>
-                <a:spcPts val="0"/>
-              </a:spcAft>
-            </a:pPr>
-            <a:r>
-              <a:rPr sz="1050" i="0">
+              <a:t>// Action — เหลือแค่ "จุดที่โลกเปลี่ยน"</a:t>
+            </a:r>
+          </a:p>
+          <a:p>
+            <a:pPr algn="l">
+              <a:spcAft>
+                <a:spcPts val="0"/>
+              </a:spcAft>
+            </a:pPr>
+            <a:r>
+              <a:rPr sz="1300" i="0">
                 <a:solidFill>
                   <a:srgbClr val="E2E8F0"/>
                 </a:solidFill>
@@ -6400,7 +7401,7 @@
               </a:spcAft>
             </a:pPr>
             <a:r>
-              <a:rPr sz="1050" i="0">
+              <a:rPr sz="1300" i="0">
                 <a:solidFill>
                   <a:srgbClr val="E2E8F0"/>
                 </a:solidFill>
@@ -6413,13 +7414,13 @@
       </p:sp>
       <p:sp>
         <p:nvSpPr>
-          <p:cNvPr id="6" name="Rounded Rectangle 5"/>
+          <p:cNvPr id="5" name="Rounded Rectangle 4"/>
           <p:cNvSpPr/>
           <p:nvPr/>
         </p:nvSpPr>
         <p:spPr>
           <a:xfrm>
-            <a:off x="548640" y="1289304"/>
+            <a:off x="548640" y="1380744"/>
             <a:ext cx="1271016" cy="274320"/>
           </a:xfrm>
           <a:prstGeom prst="roundRect">
@@ -6470,14 +7471,235 @@
       </p:sp>
       <p:sp>
         <p:nvSpPr>
-          <p:cNvPr id="7" name="Rounded Rectangle 6"/>
+          <p:cNvPr id="6" name="TextBox 5"/>
+          <p:cNvSpPr txBox="1"/>
+          <p:nvPr/>
+        </p:nvSpPr>
+        <p:spPr>
+          <a:xfrm>
+            <a:off x="8001000" y="1828800"/>
+            <a:ext cx="3657600" cy="3840480"/>
+          </a:xfrm>
+          <a:prstGeom prst="rect">
+            <a:avLst/>
+          </a:prstGeom>
+          <a:noFill/>
+        </p:spPr>
+        <p:txBody>
+          <a:bodyPr wrap="square">
+            <a:spAutoFit/>
+          </a:bodyPr>
+          <a:lstStyle/>
+          <a:p>
+            <a:pPr algn="l">
+              <a:spcAft>
+                <a:spcPts val="800"/>
+              </a:spcAft>
+            </a:pPr>
+            <a:r>
+              <a:rPr sz="1800" b="1" i="0">
+                <a:solidFill>
+                  <a:srgbClr val="0D9488"/>
+                </a:solidFill>
+                <a:latin typeface="Noto Sans Thai Looped"/>
+              </a:rPr>
+              <a:t>สังเกต</a:t>
+            </a:r>
+          </a:p>
+          <a:p>
+            <a:pPr algn="l">
+              <a:spcAft>
+                <a:spcPts val="1000"/>
+              </a:spcAft>
+            </a:pPr>
+            <a:r>
+              <a:rPr sz="1500" b="0" i="0">
+                <a:solidFill>
+                  <a:srgbClr val="0F172A"/>
+                </a:solidFill>
+                <a:latin typeface="Noto Sans Thai Looped"/>
+              </a:rPr>
+              <a:t>• กติกาธุรกิจทั้งหมดอยู่ใน calculation เดียว เทสต์ได้โดยไม่แตะ I/O</a:t>
+            </a:r>
+          </a:p>
+          <a:p>
+            <a:pPr algn="l">
+              <a:spcAft>
+                <a:spcPts val="1000"/>
+              </a:spcAft>
+            </a:pPr>
+            <a:r>
+              <a:rPr sz="1500" b="0" i="0">
+                <a:solidFill>
+                  <a:srgbClr val="0F172A"/>
+                </a:solidFill>
+                <a:latin typeface="Noto Sans Thai Looped"/>
+              </a:rPr>
+              <a:t>• SendCouponEmail รู้จักแค่การ 'ส่ง' — ไม่รู้ว่าคูปองมายังไง</a:t>
+            </a:r>
+          </a:p>
+          <a:p>
+            <a:pPr algn="l">
+              <a:spcAft>
+                <a:spcPts val="1000"/>
+              </a:spcAft>
+            </a:pPr>
+            <a:r>
+              <a:rPr sz="1500" b="0" i="0">
+                <a:solidFill>
+                  <a:srgbClr val="0F172A"/>
+                </a:solidFill>
+                <a:latin typeface="Noto Sans Thai Looped"/>
+              </a:rPr>
+              <a:t>• ลำดับการเรียก (หาก่อน → ส่งทีหลัง) เป็นของผู้เรียก ไม่ใช่ของฟังก์ชัน</a:t>
+            </a:r>
+          </a:p>
+        </p:txBody>
+      </p:sp>
+    </p:spTree>
+  </p:cSld>
+  <p:clrMapOvr>
+    <a:masterClrMapping/>
+  </p:clrMapOvr>
+</p:sld>
+</file>
+
+<file path=ppt/slides/slide15.xml><?xml version="1.0" encoding="utf-8"?>
+<p:sld xmlns:a="http://schemas.openxmlformats.org/drawingml/2006/main" xmlns:p="http://schemas.openxmlformats.org/presentationml/2006/main" xmlns:r="http://schemas.openxmlformats.org/officeDocument/2006/relationships">
+  <p:cSld>
+    <p:spTree>
+      <p:nvGrpSpPr>
+        <p:cNvPr id="1" name=""/>
+        <p:cNvGrpSpPr/>
+        <p:nvPr/>
+      </p:nvGrpSpPr>
+      <p:grpSpPr/>
+      <p:sp>
+        <p:nvSpPr>
+          <p:cNvPr id="2" name="TextBox 1"/>
+          <p:cNvSpPr txBox="1"/>
+          <p:nvPr/>
+        </p:nvSpPr>
+        <p:spPr>
+          <a:xfrm>
+            <a:off x="502920" y="292608"/>
+            <a:ext cx="11155680" cy="914400"/>
+          </a:xfrm>
+          <a:prstGeom prst="rect">
+            <a:avLst/>
+          </a:prstGeom>
+          <a:noFill/>
+        </p:spPr>
+        <p:txBody>
+          <a:bodyPr wrap="square">
+            <a:spAutoFit/>
+          </a:bodyPr>
+          <a:lstStyle/>
+          <a:p>
+            <a:pPr algn="l">
+              <a:spcAft>
+                <a:spcPts val="200"/>
+              </a:spcAft>
+            </a:pPr>
+            <a:r>
+              <a:rPr sz="3000" b="1" i="0">
+                <a:solidFill>
+                  <a:srgbClr val="0F172A"/>
+                </a:solidFill>
+                <a:latin typeface="Noto Sans Thai Looped"/>
+              </a:rPr>
+              <a:t>ของหวาน: Lazy Sequence ด้วย iter.Seq (Go </a:t>
+            </a:r>
+            <a:r>
+              <a:rPr sz="3000" b="1" i="0">
+                <a:solidFill>
+                  <a:srgbClr val="0F172A"/>
+                </a:solidFill>
+                <a:latin typeface="Ubuntu"/>
+              </a:rPr>
+              <a:t>1.23</a:t>
+            </a:r>
+            <a:r>
+              <a:rPr sz="3000" b="1" i="0">
+                <a:solidFill>
+                  <a:srgbClr val="0F172A"/>
+                </a:solidFill>
+                <a:latin typeface="Noto Sans Thai Looped"/>
+              </a:rPr>
+              <a:t>+)</a:t>
+            </a:r>
+          </a:p>
+          <a:p>
+            <a:pPr algn="l">
+              <a:spcAft>
+                <a:spcPts val="600"/>
+              </a:spcAft>
+            </a:pPr>
+            <a:r>
+              <a:rPr sz="1500" b="0" i="0">
+                <a:solidFill>
+                  <a:srgbClr val="64748B"/>
+                </a:solidFill>
+                <a:latin typeface="Noto Sans Thai Looped"/>
+              </a:rPr>
+              <a:t>อนุกรมไม่รู้จบที่คำนวณเท่าที่ถูกขอ — range-over-func ในภาษา Go เอง</a:t>
+            </a:r>
+          </a:p>
+        </p:txBody>
+      </p:sp>
+      <p:sp>
+        <p:nvSpPr>
+          <p:cNvPr id="3" name="Rectangle 2"/>
           <p:cNvSpPr/>
           <p:nvPr/>
         </p:nvSpPr>
         <p:spPr>
           <a:xfrm>
-            <a:off x="6263640" y="1600200"/>
-            <a:ext cx="5394960" cy="3154680"/>
+            <a:off x="502920" y="1207008"/>
+            <a:ext cx="11201400" cy="27940"/>
+          </a:xfrm>
+          <a:prstGeom prst="rect">
+            <a:avLst/>
+          </a:prstGeom>
+          <a:solidFill>
+            <a:srgbClr val="0D9488"/>
+          </a:solidFill>
+          <a:ln>
+            <a:noFill/>
+          </a:ln>
+        </p:spPr>
+        <p:style>
+          <a:lnRef idx="1">
+            <a:schemeClr val="accent1"/>
+          </a:lnRef>
+          <a:fillRef idx="3">
+            <a:schemeClr val="accent1"/>
+          </a:fillRef>
+          <a:effectRef idx="2">
+            <a:schemeClr val="accent1"/>
+          </a:effectRef>
+          <a:fontRef idx="minor">
+            <a:schemeClr val="lt1"/>
+          </a:fontRef>
+        </p:style>
+        <p:txBody>
+          <a:bodyPr rtlCol="0" anchor="ctr"/>
+          <a:lstStyle/>
+          <a:p>
+            <a:pPr algn="ctr"/>
+          </a:p>
+        </p:txBody>
+      </p:sp>
+      <p:sp>
+        <p:nvSpPr>
+          <p:cNvPr id="4" name="Rounded Rectangle 3"/>
+          <p:cNvSpPr/>
+          <p:nvPr/>
+        </p:nvSpPr>
+        <p:spPr>
+          <a:xfrm>
+            <a:off x="548640" y="1691640"/>
+            <a:ext cx="11109960" cy="3977639"/>
           </a:xfrm>
           <a:prstGeom prst="roundRect">
             <a:avLst/>
@@ -6514,23 +7736,23 @@
               </a:spcAft>
             </a:pPr>
             <a:r>
-              <a:rPr sz="1050" i="1">
+              <a:rPr sz="1300" i="1">
                 <a:solidFill>
                   <a:srgbClr val="94A3B8"/>
                 </a:solidFill>
                 <a:latin typeface="DejaVu Sans Mono"/>
               </a:rPr>
-              <a:t>// infinite sequence — ไม่มีเงื่อนไขหยุดในตัว</a:t>
-            </a:r>
-          </a:p>
-          <a:p>
-            <a:pPr algn="l">
-              <a:spcAft>
-                <a:spcPts val="0"/>
-              </a:spcAft>
-            </a:pPr>
-            <a:r>
-              <a:rPr sz="1050" i="0">
+              <a:t>// อนุกรมไม่รู้จบ — ไม่มีเงื่อนไขหยุดในตัว</a:t>
+            </a:r>
+          </a:p>
+          <a:p>
+            <a:pPr algn="l">
+              <a:spcAft>
+                <a:spcPts val="0"/>
+              </a:spcAft>
+            </a:pPr>
+            <a:r>
+              <a:rPr sz="1300" i="0">
                 <a:solidFill>
                   <a:srgbClr val="E2E8F0"/>
                 </a:solidFill>
@@ -6546,7 +7768,7 @@
               </a:spcAft>
             </a:pPr>
             <a:r>
-              <a:rPr sz="1050" i="0">
+              <a:rPr sz="1300" i="0">
                 <a:solidFill>
                   <a:srgbClr val="E2E8F0"/>
                 </a:solidFill>
@@ -6562,7 +7784,7 @@
               </a:spcAft>
             </a:pPr>
             <a:r>
-              <a:rPr sz="1050" i="0">
+              <a:rPr sz="1300" i="0">
                 <a:solidFill>
                   <a:srgbClr val="E2E8F0"/>
                 </a:solidFill>
@@ -6578,7 +7800,7 @@
               </a:spcAft>
             </a:pPr>
             <a:r>
-              <a:rPr sz="1050" i="0">
+              <a:rPr sz="1300" i="0">
                 <a:solidFill>
                   <a:srgbClr val="E2E8F0"/>
                 </a:solidFill>
@@ -6594,7 +7816,7 @@
               </a:spcAft>
             </a:pPr>
             <a:r>
-              <a:rPr sz="1050" i="0">
+              <a:rPr sz="1300" i="0">
                 <a:solidFill>
                   <a:srgbClr val="E2E8F0"/>
                 </a:solidFill>
@@ -6603,23 +7825,23 @@
               <a:t>            if !yield(a) { return } </a:t>
             </a:r>
             <a:r>
-              <a:rPr sz="1050" i="1">
+              <a:rPr sz="1300" i="1">
                 <a:solidFill>
                   <a:srgbClr val="94A3B8"/>
                 </a:solidFill>
                 <a:latin typeface="DejaVu Sans Mono"/>
               </a:rPr>
-              <a:t>// ผู้บริโภคเป็นคนหยุด</a:t>
-            </a:r>
-          </a:p>
-          <a:p>
-            <a:pPr algn="l">
-              <a:spcAft>
-                <a:spcPts val="0"/>
-              </a:spcAft>
-            </a:pPr>
-            <a:r>
-              <a:rPr sz="1050" i="0">
+              <a:t>// ผู้อ่านเป็นคนสั่งหยุด</a:t>
+            </a:r>
+          </a:p>
+          <a:p>
+            <a:pPr algn="l">
+              <a:spcAft>
+                <a:spcPts val="0"/>
+              </a:spcAft>
+            </a:pPr>
+            <a:r>
+              <a:rPr sz="1300" i="0">
                 <a:solidFill>
                   <a:srgbClr val="E2E8F0"/>
                 </a:solidFill>
@@ -6635,7 +7857,7 @@
               </a:spcAft>
             </a:pPr>
             <a:r>
-              <a:rPr sz="1050" i="0">
+              <a:rPr sz="1300" i="0">
                 <a:solidFill>
                   <a:srgbClr val="E2E8F0"/>
                 </a:solidFill>
@@ -6651,7 +7873,7 @@
               </a:spcAft>
             </a:pPr>
             <a:r>
-              <a:rPr sz="1050" i="0">
+              <a:rPr sz="1300" i="0">
                 <a:solidFill>
                   <a:srgbClr val="E2E8F0"/>
                 </a:solidFill>
@@ -6667,7 +7889,7 @@
               </a:spcAft>
             </a:pPr>
             <a:r>
-              <a:rPr sz="1050" i="0">
+              <a:rPr sz="1300" i="0">
                 <a:solidFill>
                   <a:srgbClr val="E2E8F0"/>
                 </a:solidFill>
@@ -6690,7 +7912,7 @@
               </a:spcAft>
             </a:pPr>
             <a:r>
-              <a:rPr sz="1050" i="0">
+              <a:rPr sz="1300" i="0">
                 <a:solidFill>
                   <a:srgbClr val="E2E8F0"/>
                 </a:solidFill>
@@ -6706,7 +7928,7 @@
               </a:spcAft>
             </a:pPr>
             <a:r>
-              <a:rPr sz="1050" i="0">
+              <a:rPr sz="1300" i="0">
                 <a:solidFill>
                   <a:srgbClr val="E2E8F0"/>
                 </a:solidFill>
@@ -6722,7 +7944,7 @@
               </a:spcAft>
             </a:pPr>
             <a:r>
-              <a:rPr sz="1050" i="0">
+              <a:rPr sz="1300" i="0">
                 <a:solidFill>
                   <a:srgbClr val="E2E8F0"/>
                 </a:solidFill>
@@ -6738,7 +7960,7 @@
               </a:spcAft>
             </a:pPr>
             <a:r>
-              <a:rPr sz="1050" i="0">
+              <a:rPr sz="1300" i="0">
                 <a:solidFill>
                   <a:srgbClr val="E2E8F0"/>
                 </a:solidFill>
@@ -6747,23 +7969,23 @@
               <a:t>for n := range Take(10, even) { </a:t>
             </a:r>
             <a:r>
-              <a:rPr sz="1050" i="1">
+              <a:rPr sz="1300" i="1">
                 <a:solidFill>
                   <a:srgbClr val="94A3B8"/>
                 </a:solidFill>
                 <a:latin typeface="DejaVu Sans Mono"/>
               </a:rPr>
-              <a:t>// lazy คำนวณเท่าที่จำเป็น</a:t>
-            </a:r>
-          </a:p>
-          <a:p>
-            <a:pPr algn="l">
-              <a:spcAft>
-                <a:spcPts val="0"/>
-              </a:spcAft>
-            </a:pPr>
-            <a:r>
-              <a:rPr sz="1050" i="0">
+              <a:t>// คำนวณเท่าที่ขอเท่านั้น</a:t>
+            </a:r>
+          </a:p>
+          <a:p>
+            <a:pPr algn="l">
+              <a:spcAft>
+                <a:spcPts val="0"/>
+              </a:spcAft>
+            </a:pPr>
+            <a:r>
+              <a:rPr sz="1300" i="0">
                 <a:solidFill>
                   <a:srgbClr val="E2E8F0"/>
                 </a:solidFill>
@@ -6779,7 +8001,7 @@
               </a:spcAft>
             </a:pPr>
             <a:r>
-              <a:rPr sz="1050" i="0">
+              <a:rPr sz="1300" i="0">
                 <a:solidFill>
                   <a:srgbClr val="E2E8F0"/>
                 </a:solidFill>
@@ -6788,7 +8010,7 @@
               <a:t>} </a:t>
             </a:r>
             <a:r>
-              <a:rPr sz="1050" i="1">
+              <a:rPr sz="1300" i="1">
                 <a:solidFill>
                   <a:srgbClr val="94A3B8"/>
                 </a:solidFill>
@@ -6801,20 +8023,20 @@
       </p:sp>
       <p:sp>
         <p:nvSpPr>
-          <p:cNvPr id="8" name="Rounded Rectangle 7"/>
+          <p:cNvPr id="5" name="Rounded Rectangle 4"/>
           <p:cNvSpPr/>
           <p:nvPr/>
         </p:nvSpPr>
         <p:spPr>
           <a:xfrm>
-            <a:off x="6263640" y="1289304"/>
-            <a:ext cx="1975104" cy="274320"/>
+            <a:off x="548640" y="5989320"/>
+            <a:ext cx="11109960" cy="566928"/>
           </a:xfrm>
           <a:prstGeom prst="roundRect">
             <a:avLst/>
           </a:prstGeom>
           <a:solidFill>
-            <a:srgbClr val="0D9488"/>
+            <a:srgbClr val="CCFBF1"/>
           </a:solidFill>
           <a:ln>
             <a:noFill/>
@@ -6836,104 +8058,58 @@
           </a:fontRef>
         </p:style>
         <p:txBody>
-          <a:bodyPr rtlCol="0" anchor="ctr" tIns="0" bIns="0"/>
-          <a:lstStyle/>
-          <a:p>
-            <a:pPr algn="l">
-              <a:spcAft>
-                <a:spcPts val="0"/>
-              </a:spcAft>
-            </a:pPr>
-            <a:r>
-              <a:rPr sz="1200" b="1" i="0">
-                <a:solidFill>
-                  <a:srgbClr val="FFFFFF"/>
+          <a:bodyPr rtlCol="0" anchor="ctr" tIns="54864" bIns="36576" wrap="square"/>
+          <a:lstStyle/>
+          <a:p>
+            <a:pPr algn="l">
+              <a:spcAft>
+                <a:spcPts val="0"/>
+              </a:spcAft>
+            </a:pPr>
+            <a:r>
+              <a:rPr sz="1500" b="1" i="0">
+                <a:solidFill>
+                  <a:srgbClr val="0F766E"/>
+                </a:solidFill>
+                <a:latin typeface="Noto Sans Thai Looped"/>
+              </a:rPr>
+              <a:t>จำไว้: Fibonacci ไม่มีจุดจบ แต่ Take(</a:t>
+            </a:r>
+            <a:r>
+              <a:rPr sz="1500" b="1" i="0">
+                <a:solidFill>
+                  <a:srgbClr val="0F766E"/>
                 </a:solidFill>
                 <a:latin typeface="Ubuntu"/>
               </a:rPr>
-              <a:t>09-</a:t>
-            </a:r>
-            <a:r>
-              <a:rPr sz="1200" b="1" i="0">
-                <a:solidFill>
-                  <a:srgbClr val="FFFFFF"/>
+              <a:t>10</a:t>
+            </a:r>
+            <a:r>
+              <a:rPr sz="1500" b="1" i="0">
+                <a:solidFill>
+                  <a:srgbClr val="0F766E"/>
                 </a:solidFill>
                 <a:latin typeface="Noto Sans Thai Looped"/>
               </a:rPr>
-              <a:t>lazy-iter-seq</a:t>
-            </a:r>
-          </a:p>
-        </p:txBody>
-      </p:sp>
-      <p:sp>
-        <p:nvSpPr>
-          <p:cNvPr id="9" name="TextBox 8"/>
-          <p:cNvSpPr txBox="1"/>
-          <p:nvPr/>
-        </p:nvSpPr>
-        <p:spPr>
-          <a:xfrm>
-            <a:off x="548640" y="4937760"/>
-            <a:ext cx="11064240" cy="4937760"/>
-          </a:xfrm>
-          <a:prstGeom prst="rect">
-            <a:avLst/>
-          </a:prstGeom>
-          <a:noFill/>
-        </p:spPr>
-        <p:txBody>
-          <a:bodyPr wrap="square">
-            <a:spAutoFit/>
-          </a:bodyPr>
-          <a:lstStyle/>
-          <a:p>
-            <a:pPr algn="l">
-              <a:spcAft>
-                <a:spcPts val="800"/>
-              </a:spcAft>
-            </a:pPr>
-            <a:r>
-              <a:rPr sz="1400" b="0" i="0">
-                <a:solidFill>
-                  <a:srgbClr val="0F172A"/>
+              <a:t>) คำนวณแค่ </a:t>
+            </a:r>
+            <a:r>
+              <a:rPr sz="1500" b="1" i="0">
+                <a:solidFill>
+                  <a:srgbClr val="0F766E"/>
+                </a:solidFill>
+                <a:latin typeface="Ubuntu"/>
+              </a:rPr>
+              <a:t>10</a:t>
+            </a:r>
+            <a:r>
+              <a:rPr sz="1500" b="1" i="0">
+                <a:solidFill>
+                  <a:srgbClr val="0F766E"/>
                 </a:solidFill>
                 <a:latin typeface="Noto Sans Thai Looped"/>
               </a:rPr>
-              <a:t>• calculation ที่ pure เต็มตัว = test ไม่ต้อง mock / action ที่บาง = เหลือแค่ 'จุดที่โลกเปลี่ยน'</a:t>
-            </a:r>
-          </a:p>
-          <a:p>
-            <a:pPr algn="l">
-              <a:spcAft>
-                <a:spcPts val="800"/>
-              </a:spcAft>
-            </a:pPr>
-            <a:r>
-              <a:rPr sz="1400" b="0" i="0">
-                <a:solidFill>
-                  <a:srgbClr val="0F172A"/>
-                </a:solidFill>
-                <a:latin typeface="Noto Sans Thai Looped"/>
-              </a:rPr>
-              <a:t>• iter.Seq = lazy sequence ใน std lib: Fibonacci เป็นอนุกรมไม่รู้จบ แต่ Take(</a:t>
-            </a:r>
-            <a:r>
-              <a:rPr sz="1400" b="0" i="0">
-                <a:solidFill>
-                  <a:srgbClr val="0F172A"/>
-                </a:solidFill>
-                <a:latin typeface="Ubuntu"/>
-              </a:rPr>
-              <a:t>10</a:t>
-            </a:r>
-            <a:r>
-              <a:rPr sz="1400" b="0" i="0">
-                <a:solidFill>
-                  <a:srgbClr val="0F172A"/>
-                </a:solidFill>
-                <a:latin typeface="Noto Sans Thai Looped"/>
-              </a:rPr>
-              <a:t>) คำนวณแค่ที่จำเป็น</a:t>
+              <a:t> ตัว — lazy คือคำนวณ 'เท่าที่จำเป็น' ไม่ใช่ 'ทั้งหมดก่อนแล้วค่อยตัด'</a:t>
             </a:r>
           </a:p>
         </p:txBody>
@@ -6946,7 +8122,7 @@
 </p:sld>
 </file>
 
-<file path=ppt/slides/slide13.xml><?xml version="1.0" encoding="utf-8"?>
+<file path=ppt/slides/slide16.xml><?xml version="1.0" encoding="utf-8"?>
 <p:sld xmlns:a="http://schemas.openxmlformats.org/drawingml/2006/main" xmlns:p="http://schemas.openxmlformats.org/presentationml/2006/main" xmlns:r="http://schemas.openxmlformats.org/officeDocument/2006/relationships">
   <p:cSld>
     <p:spTree>
@@ -6965,7 +8141,7 @@
         <p:spPr>
           <a:xfrm>
             <a:off x="502920" y="292608"/>
-            <a:ext cx="8778240" cy="914400"/>
+            <a:ext cx="11155680" cy="914400"/>
           </a:xfrm>
           <a:prstGeom prst="rect">
             <a:avLst/>
@@ -6990,7 +8166,7 @@
                 </a:solidFill>
                 <a:latin typeface="Noto Sans Thai Looped"/>
               </a:rPr>
-              <a:t>Cheat Sheet: ถาม–ตอบ </a:t>
+              <a:t>สรุป: </a:t>
             </a:r>
             <a:r>
               <a:rPr sz="3000" b="1" i="0">
@@ -7160,7 +8336,7 @@
                           </a:solidFill>
                           <a:latin typeface="Noto Sans Thai Looped"/>
                         </a:rPr>
-                        <a:t>"ผลลัพธ์ขึ้นกับเวลา/จำนวนครั้งไหม?"</a:t>
+                        <a:t>"ผลขึ้นกับเวลา/จำนวนครั้งไหม?"</a:t>
                       </a:r>
                     </a:p>
                   </a:txBody>
@@ -7196,7 +8372,7 @@
                           </a:solidFill>
                           <a:latin typeface="Noto Sans Thai Looped"/>
                         </a:rPr>
-                        <a:t>ดันไปไว้ขอบระบบ ทำให้บางที่สุด ไม่ test ก็ได้</a:t>
+                        <a:t>ย้ายไปไว้ขอบระบบ ทำให้บางที่สุด</a:t>
                       </a:r>
                     </a:p>
                   </a:txBody>
@@ -7339,7 +8515,7 @@
         </p:nvSpPr>
         <p:spPr>
           <a:xfrm>
-            <a:off x="548640" y="4206240"/>
+            <a:off x="548640" y="4160520"/>
             <a:ext cx="11064240" cy="4937760"/>
           </a:xfrm>
           <a:prstGeom prst="rect">
@@ -7359,16 +8535,16 @@
               </a:spcAft>
             </a:pPr>
             <a:r>
-              <a:rPr sz="1500" b="0" i="0">
+              <a:rPr sz="1600" b="0" i="0">
                 <a:solidFill>
                   <a:srgbClr val="0F172A"/>
                 </a:solidFill>
                 <a:latin typeface="Noto Sans Thai Looped"/>
               </a:rPr>
-              <a:t>• Go ทำได้ดี: HOF, closures, generics (</a:t>
-            </a:r>
-            <a:r>
-              <a:rPr sz="1500" b="0" i="0">
+              <a:t>• Go ทำได้ดี: HOF · closures · generics (</a:t>
+            </a:r>
+            <a:r>
+              <a:rPr sz="1600" b="0" i="0">
                 <a:solidFill>
                   <a:srgbClr val="0F172A"/>
                 </a:solidFill>
@@ -7377,16 +8553,16 @@
               <a:t>1.18</a:t>
             </a:r>
             <a:r>
-              <a:rPr sz="1500" b="0" i="0">
+              <a:rPr sz="1600" b="0" i="0">
                 <a:solidFill>
                   <a:srgbClr val="0F172A"/>
                 </a:solidFill>
                 <a:latin typeface="Noto Sans Thai Looped"/>
               </a:rPr>
-              <a:t>+), iter.Seq (</a:t>
-            </a:r>
-            <a:r>
-              <a:rPr sz="1500" b="0" i="0">
+              <a:t>+) · iter.Seq (</a:t>
+            </a:r>
+            <a:r>
+              <a:rPr sz="1600" b="0" i="0">
                 <a:solidFill>
                   <a:srgbClr val="0F172A"/>
                 </a:solidFill>
@@ -7395,7 +8571,7 @@
               <a:t>1.23</a:t>
             </a:r>
             <a:r>
-              <a:rPr sz="1500" b="0" i="0">
+              <a:rPr sz="1600" b="0" i="0">
                 <a:solidFill>
                   <a:srgbClr val="0F172A"/>
                 </a:solidFill>
@@ -7411,29 +8587,70 @@
               </a:spcAft>
             </a:pPr>
             <a:r>
-              <a:rPr sz="1500" b="0" i="0">
+              <a:rPr sz="1600" b="0" i="0">
                 <a:solidFill>
                   <a:srgbClr val="0F172A"/>
                 </a:solidFill>
                 <a:latin typeface="Noto Sans Thai Looped"/>
               </a:rPr>
-              <a:t>• Go ไม่มี: built-in map/filter, immutability guarantee, tail-call optimization — รู้ขีดจำกัด แล้วออกแบบรอบมัน</a:t>
-            </a:r>
-          </a:p>
-          <a:p>
-            <a:pPr algn="l">
-              <a:spcAft>
-                <a:spcPts val="800"/>
+              <a:t>• Go ไม่มี: built-in map/filter · immutability guarantee · tail-call optimization — รู้ขีดจำกัด แล้วออกแบบรอบมัน</a:t>
+            </a:r>
+          </a:p>
+        </p:txBody>
+      </p:sp>
+      <p:sp>
+        <p:nvSpPr>
+          <p:cNvPr id="6" name="Rounded Rectangle 5"/>
+          <p:cNvSpPr/>
+          <p:nvPr/>
+        </p:nvSpPr>
+        <p:spPr>
+          <a:xfrm>
+            <a:off x="548640" y="5989320"/>
+            <a:ext cx="11109960" cy="566928"/>
+          </a:xfrm>
+          <a:prstGeom prst="roundRect">
+            <a:avLst/>
+          </a:prstGeom>
+          <a:solidFill>
+            <a:srgbClr val="CCFBF1"/>
+          </a:solidFill>
+          <a:ln>
+            <a:noFill/>
+          </a:ln>
+          <a:effectLst/>
+        </p:spPr>
+        <p:style>
+          <a:lnRef idx="1">
+            <a:schemeClr val="accent1"/>
+          </a:lnRef>
+          <a:fillRef idx="3">
+            <a:schemeClr val="accent1"/>
+          </a:fillRef>
+          <a:effectRef idx="2">
+            <a:schemeClr val="accent1"/>
+          </a:effectRef>
+          <a:fontRef idx="minor">
+            <a:schemeClr val="lt1"/>
+          </a:fontRef>
+        </p:style>
+        <p:txBody>
+          <a:bodyPr rtlCol="0" anchor="ctr" tIns="54864" bIns="36576" wrap="square"/>
+          <a:lstStyle/>
+          <a:p>
+            <a:pPr algn="l">
+              <a:spcAft>
+                <a:spcPts val="0"/>
               </a:spcAft>
             </a:pPr>
             <a:r>
               <a:rPr sz="1500" b="1" i="0">
                 <a:solidFill>
-                  <a:srgbClr val="0D9488"/>
+                  <a:srgbClr val="0F766E"/>
                 </a:solidFill>
                 <a:latin typeface="Noto Sans Thai Looped"/>
               </a:rPr>
-              <a:t>• คำโปรย: 'คุณไม่ต้องเขียน FP ทั้งวัน — แค่หมั่นย้าย calculation ออกจาก action ทีละฟังก์ชัน'</a:t>
+              <a:t>จำไว้: ไม่ต้องเขียน FP ทั้งวัน — แค่หมั่นย้าย calculation ออกจาก action ทีละฟังก์ชัน</a:t>
             </a:r>
           </a:p>
         </p:txBody>
@@ -7446,7 +8663,7 @@
 </p:sld>
 </file>
 
-<file path=ppt/slides/slide14.xml><?xml version="1.0" encoding="utf-8"?>
+<file path=ppt/slides/slide17.xml><?xml version="1.0" encoding="utf-8"?>
 <p:sld xmlns:a="http://schemas.openxmlformats.org/drawingml/2006/main" xmlns:p="http://schemas.openxmlformats.org/presentationml/2006/main" xmlns:r="http://schemas.openxmlformats.org/officeDocument/2006/relationships">
   <p:cSld>
     <p:spTree>
@@ -7465,7 +8682,7 @@
         <p:spPr>
           <a:xfrm>
             <a:off x="502920" y="292608"/>
-            <a:ext cx="8778240" cy="914400"/>
+            <a:ext cx="11155680" cy="914400"/>
           </a:xfrm>
           <a:prstGeom prst="rect">
             <a:avLst/>
@@ -7738,29 +8955,13 @@
               </a:spcAft>
             </a:pPr>
             <a:r>
-              <a:rPr sz="1700" b="0" i="0">
+              <a:rPr sz="1700" b="1" i="0">
                 <a:solidFill>
                   <a:srgbClr val="0F172A"/>
                 </a:solidFill>
                 <a:latin typeface="Noto Sans Thai Looped"/>
               </a:rPr>
-              <a:t>• Eli Bendersky: Higher-order functions in Go — eli.thegreenplace.net</a:t>
-            </a:r>
-          </a:p>
-          <a:p>
-            <a:pPr algn="l">
-              <a:spcAft>
-                <a:spcPts val="800"/>
-              </a:spcAft>
-            </a:pPr>
-            <a:r>
-              <a:rPr sz="1700" b="1" i="0">
-                <a:solidFill>
-                  <a:srgbClr val="0F172A"/>
-                </a:solidFill>
-                <a:latin typeface="Noto Sans Thai Looped"/>
-              </a:rPr>
-              <a:t>• โค้ดทั้งหมดวันนี้: github.com/…/go-fp (หรือ ~/src/go-fp) — go test ./... ผ่านทุก package</a:t>
+              <a:t>• โค้ดทั้งหมดในวันนี้ (พร้อมเทสต์): ~/src/go-fp — go test ./... ผ่านทุก package</a:t>
             </a:r>
           </a:p>
         </p:txBody>
@@ -7831,7 +9032,7 @@
         <p:spPr>
           <a:xfrm>
             <a:off x="502920" y="292608"/>
-            <a:ext cx="8778240" cy="914400"/>
+            <a:ext cx="11155680" cy="914400"/>
           </a:xfrm>
           <a:prstGeom prst="rect">
             <a:avLst/>
@@ -7856,7 +9057,7 @@
                 </a:solidFill>
                 <a:latin typeface="Noto Sans Thai Looped"/>
               </a:rPr>
-              <a:t>แผนวันนี้ (</a:t>
+              <a:t>จบ </a:t>
             </a:r>
             <a:r>
               <a:rPr sz="3000" b="1" i="0">
@@ -7874,7 +9075,7 @@
                 </a:solidFill>
                 <a:latin typeface="Noto Sans Thai Looped"/>
               </a:rPr>
-              <a:t> ชม.)</a:t>
+              <a:t> ชั่วโมงนี้ คุณจะได้</a:t>
             </a:r>
           </a:p>
           <a:p>
@@ -7884,13 +9085,13 @@
               </a:spcAft>
             </a:pPr>
             <a:r>
-              <a:rPr sz="1400" b="0" i="0">
+              <a:rPr sz="1500" b="0" i="0">
                 <a:solidFill>
                   <a:srgbClr val="64748B"/>
                 </a:solidFill>
                 <a:latin typeface="Noto Sans Thai Looped"/>
               </a:rPr>
-              <a:t>มองโค้ด → เขียนโค้ด → ใช้จริง → ลงมือทำ</a:t>
+              <a:t>เรียงจาก 'มองเป็น' → 'เขียนเป็น' → 'ใช้เป็น'</a:t>
             </a:r>
           </a:p>
         </p:txBody>
@@ -7938,491 +9139,127 @@
           </a:p>
         </p:txBody>
       </p:sp>
-      <p:graphicFrame>
-        <p:nvGraphicFramePr>
-          <p:cNvPr id="4" name="Table 3"/>
-          <p:cNvGraphicFramePr>
-            <a:graphicFrameLocks noGrp="1"/>
-          </p:cNvGraphicFramePr>
+      <p:sp>
+        <p:nvSpPr>
+          <p:cNvPr id="4" name="TextBox 3"/>
+          <p:cNvSpPr txBox="1"/>
           <p:nvPr/>
-        </p:nvGraphicFramePr>
-        <p:xfrm>
-          <a:off x="548640" y="1417320"/>
-          <a:ext cx="11109958" cy="4846320"/>
-        </p:xfrm>
-        <a:graphic>
-          <a:graphicData uri="http://schemas.openxmlformats.org/drawingml/2006/table">
-            <a:tbl>
-              <a:tblPr firstRow="1" bandRow="1">
-                <a:tableStyleId>{5C22544A-7EE6-4342-B048-85BDC9FD1C3A}</a:tableStyleId>
-              </a:tblPr>
-              <a:tblGrid>
-                <a:gridCol w="1469085"/>
-                <a:gridCol w="3121806"/>
-                <a:gridCol w="6519067"/>
-              </a:tblGrid>
-              <a:tr h="692331">
-                <a:tc>
-                  <a:txBody>
-                    <a:bodyPr wrap="square"/>
-                    <a:lstStyle/>
-                    <a:p>
-                      <a:r>
-                        <a:rPr sz="1400" b="1">
-                          <a:solidFill>
-                            <a:srgbClr val="FFFFFF"/>
-                          </a:solidFill>
-                          <a:latin typeface="Noto Sans Thai Looped"/>
-                        </a:rPr>
-                        <a:t>เวลา</a:t>
-                      </a:r>
-                    </a:p>
-                  </a:txBody>
-                  <a:tcPr marT="36576" marB="36576">
-                    <a:solidFill>
-                      <a:srgbClr val="0D9488"/>
-                    </a:solidFill>
-                  </a:tcPr>
-                </a:tc>
-                <a:tc>
-                  <a:txBody>
-                    <a:bodyPr wrap="square"/>
-                    <a:lstStyle/>
-                    <a:p>
-                      <a:r>
-                        <a:rPr sz="1400" b="1">
-                          <a:solidFill>
-                            <a:srgbClr val="FFFFFF"/>
-                          </a:solidFill>
-                          <a:latin typeface="Noto Sans Thai Looped"/>
-                        </a:rPr>
-                        <a:t>เรื่อง</a:t>
-                      </a:r>
-                    </a:p>
-                  </a:txBody>
-                  <a:tcPr marT="36576" marB="36576">
-                    <a:solidFill>
-                      <a:srgbClr val="0D9488"/>
-                    </a:solidFill>
-                  </a:tcPr>
-                </a:tc>
-                <a:tc>
-                  <a:txBody>
-                    <a:bodyPr wrap="square"/>
-                    <a:lstStyle/>
-                    <a:p>
-                      <a:r>
-                        <a:rPr sz="1400" b="1">
-                          <a:solidFill>
-                            <a:srgbClr val="FFFFFF"/>
-                          </a:solidFill>
-                          <a:latin typeface="Noto Sans Thai Looped"/>
-                        </a:rPr>
-                        <a:t>วิธี</a:t>
-                      </a:r>
-                    </a:p>
-                  </a:txBody>
-                  <a:tcPr marT="36576" marB="36576">
-                    <a:solidFill>
-                      <a:srgbClr val="0D9488"/>
-                    </a:solidFill>
-                  </a:tcPr>
-                </a:tc>
-              </a:tr>
-              <a:tr h="692331">
-                <a:tc>
-                  <a:txBody>
-                    <a:bodyPr wrap="square"/>
-                    <a:lstStyle/>
-                    <a:p>
-                      <a:r>
-                        <a:rPr sz="1400" b="0">
-                          <a:solidFill>
-                            <a:srgbClr val="0F172A"/>
-                          </a:solidFill>
-                          <a:latin typeface="Ubuntu"/>
-                        </a:rPr>
-                        <a:t>0:00–0:15</a:t>
-                      </a:r>
-                    </a:p>
-                  </a:txBody>
-                  <a:tcPr marT="36576" marB="36576"/>
-                </a:tc>
-                <a:tc>
-                  <a:txBody>
-                    <a:bodyPr wrap="square"/>
-                    <a:lstStyle/>
-                    <a:p>
-                      <a:r>
-                        <a:rPr sz="1400" b="0">
-                          <a:solidFill>
-                            <a:srgbClr val="0F172A"/>
-                          </a:solidFill>
-                          <a:latin typeface="Noto Sans Thai Looped"/>
-                        </a:rPr>
-                        <a:t>เปิด: โค้ดปนเปื้อน </a:t>
-                      </a:r>
-                      <a:r>
-                        <a:rPr sz="1400" b="0">
-                          <a:solidFill>
-                            <a:srgbClr val="0F172A"/>
-                          </a:solidFill>
-                          <a:latin typeface="Ubuntu"/>
-                        </a:rPr>
-                        <a:t>1</a:t>
-                      </a:r>
-                      <a:r>
-                        <a:rPr sz="1400" b="0">
-                          <a:solidFill>
-                            <a:srgbClr val="0F172A"/>
-                          </a:solidFill>
-                          <a:latin typeface="Noto Sans Thai Looped"/>
-                        </a:rPr>
-                        <a:t> หน้า</a:t>
-                      </a:r>
-                    </a:p>
-                  </a:txBody>
-                  <a:tcPr marT="36576" marB="36576"/>
-                </a:tc>
-                <a:tc>
-                  <a:txBody>
-                    <a:bodyPr wrap="square"/>
-                    <a:lstStyle/>
-                    <a:p>
-                      <a:r>
-                        <a:rPr sz="1400" b="0">
-                          <a:solidFill>
-                            <a:srgbClr val="0F172A"/>
-                          </a:solidFill>
-                          <a:latin typeface="Noto Sans Thai Looped"/>
-                        </a:rPr>
-                        <a:t>แยก Action/Calculation/Data ร่วมกันบนกระดาน</a:t>
-                      </a:r>
-                    </a:p>
-                  </a:txBody>
-                  <a:tcPr marT="36576" marB="36576"/>
-                </a:tc>
-              </a:tr>
-              <a:tr h="692331">
-                <a:tc>
-                  <a:txBody>
-                    <a:bodyPr wrap="square"/>
-                    <a:lstStyle/>
-                    <a:p>
-                      <a:r>
-                        <a:rPr sz="1400" b="0">
-                          <a:solidFill>
-                            <a:srgbClr val="0F172A"/>
-                          </a:solidFill>
-                          <a:latin typeface="Ubuntu"/>
-                        </a:rPr>
-                        <a:t>0:15–0:40</a:t>
-                      </a:r>
-                    </a:p>
-                  </a:txBody>
-                  <a:tcPr marT="36576" marB="36576">
-                    <a:solidFill>
-                      <a:srgbClr val="F1F5F9"/>
-                    </a:solidFill>
-                  </a:tcPr>
-                </a:tc>
-                <a:tc>
-                  <a:txBody>
-                    <a:bodyPr wrap="square"/>
-                    <a:lstStyle/>
-                    <a:p>
-                      <a:r>
-                        <a:rPr sz="1400" b="0">
-                          <a:solidFill>
-                            <a:srgbClr val="0F172A"/>
-                          </a:solidFill>
-                          <a:latin typeface="Noto Sans Thai Looped"/>
-                        </a:rPr>
-                        <a:t>Refactor live</a:t>
-                      </a:r>
-                    </a:p>
-                  </a:txBody>
-                  <a:tcPr marT="36576" marB="36576">
-                    <a:solidFill>
-                      <a:srgbClr val="F1F5F9"/>
-                    </a:solidFill>
-                  </a:tcPr>
-                </a:tc>
-                <a:tc>
-                  <a:txBody>
-                    <a:bodyPr wrap="square"/>
-                    <a:lstStyle/>
-                    <a:p>
-                      <a:r>
-                        <a:rPr sz="1400" b="0">
-                          <a:solidFill>
-                            <a:srgbClr val="0F172A"/>
-                          </a:solidFill>
-                          <a:latin typeface="Noto Sans Thai Looped"/>
-                        </a:rPr>
-                        <a:t>ดึง calculation ออกจาก action → test ง่ายขึ้น</a:t>
-                      </a:r>
-                    </a:p>
-                  </a:txBody>
-                  <a:tcPr marT="36576" marB="36576">
-                    <a:solidFill>
-                      <a:srgbClr val="F1F5F9"/>
-                    </a:solidFill>
-                  </a:tcPr>
-                </a:tc>
-              </a:tr>
-              <a:tr h="692331">
-                <a:tc>
-                  <a:txBody>
-                    <a:bodyPr wrap="square"/>
-                    <a:lstStyle/>
-                    <a:p>
-                      <a:r>
-                        <a:rPr sz="1400" b="0">
-                          <a:solidFill>
-                            <a:srgbClr val="0F172A"/>
-                          </a:solidFill>
-                          <a:latin typeface="Ubuntu"/>
-                        </a:rPr>
-                        <a:t>0:40–1:05</a:t>
-                      </a:r>
-                    </a:p>
-                  </a:txBody>
-                  <a:tcPr marT="36576" marB="36576"/>
-                </a:tc>
-                <a:tc>
-                  <a:txBody>
-                    <a:bodyPr wrap="square"/>
-                    <a:lstStyle/>
-                    <a:p>
-                      <a:r>
-                        <a:rPr sz="1400" b="0">
-                          <a:solidFill>
-                            <a:srgbClr val="0F172A"/>
-                          </a:solidFill>
-                          <a:latin typeface="Noto Sans Thai Looped"/>
-                        </a:rPr>
-                        <a:t>เครื่องมือของ Go</a:t>
-                      </a:r>
-                    </a:p>
-                  </a:txBody>
-                  <a:tcPr marT="36576" marB="36576"/>
-                </a:tc>
-                <a:tc>
-                  <a:txBody>
-                    <a:bodyPr wrap="square"/>
-                    <a:lstStyle/>
-                    <a:p>
-                      <a:r>
-                        <a:rPr sz="1400" b="0">
-                          <a:solidFill>
-                            <a:srgbClr val="0F172A"/>
-                          </a:solidFill>
-                          <a:latin typeface="Noto Sans Thai Looped"/>
-                        </a:rPr>
-                        <a:t>HOF, closures (+ pitfall), generics Map/Filter/Reduce</a:t>
-                      </a:r>
-                    </a:p>
-                  </a:txBody>
-                  <a:tcPr marT="36576" marB="36576"/>
-                </a:tc>
-              </a:tr>
-              <a:tr h="692331">
-                <a:tc>
-                  <a:txBody>
-                    <a:bodyPr wrap="square"/>
-                    <a:lstStyle/>
-                    <a:p>
-                      <a:r>
-                        <a:rPr sz="1400" b="0">
-                          <a:solidFill>
-                            <a:srgbClr val="0F172A"/>
-                          </a:solidFill>
-                          <a:latin typeface="Ubuntu"/>
-                        </a:rPr>
-                        <a:t>1:05–1:25</a:t>
-                      </a:r>
-                    </a:p>
-                  </a:txBody>
-                  <a:tcPr marT="36576" marB="36576">
-                    <a:solidFill>
-                      <a:srgbClr val="F1F5F9"/>
-                    </a:solidFill>
-                  </a:tcPr>
-                </a:tc>
-                <a:tc>
-                  <a:txBody>
-                    <a:bodyPr wrap="square"/>
-                    <a:lstStyle/>
-                    <a:p>
-                      <a:r>
-                        <a:rPr sz="1400" b="0">
-                          <a:solidFill>
-                            <a:srgbClr val="0F172A"/>
-                          </a:solidFill>
-                          <a:latin typeface="Noto Sans Thai Looped"/>
-                        </a:rPr>
-                        <a:t>FP ในโค้ดจริง</a:t>
-                      </a:r>
-                    </a:p>
-                  </a:txBody>
-                  <a:tcPr marT="36576" marB="36576">
-                    <a:solidFill>
-                      <a:srgbClr val="F1F5F9"/>
-                    </a:solidFill>
-                  </a:tcPr>
-                </a:tc>
-                <a:tc>
-                  <a:txBody>
-                    <a:bodyPr wrap="square"/>
-                    <a:lstStyle/>
-                    <a:p>
-                      <a:r>
-                        <a:rPr sz="1400" b="0">
-                          <a:solidFill>
-                            <a:srgbClr val="0F172A"/>
-                          </a:solidFill>
-                          <a:latin typeface="Noto Sans Thai Looped"/>
-                        </a:rPr>
-                        <a:t>Functional Options + middleware (= composition)</a:t>
-                      </a:r>
-                    </a:p>
-                  </a:txBody>
-                  <a:tcPr marT="36576" marB="36576">
-                    <a:solidFill>
-                      <a:srgbClr val="F1F5F9"/>
-                    </a:solidFill>
-                  </a:tcPr>
-                </a:tc>
-              </a:tr>
-              <a:tr h="692331">
-                <a:tc>
-                  <a:txBody>
-                    <a:bodyPr wrap="square"/>
-                    <a:lstStyle/>
-                    <a:p>
-                      <a:r>
-                        <a:rPr sz="1400" b="0">
-                          <a:solidFill>
-                            <a:srgbClr val="0F172A"/>
-                          </a:solidFill>
-                          <a:latin typeface="Ubuntu"/>
-                        </a:rPr>
-                        <a:t>1:25–1:45</a:t>
-                      </a:r>
-                    </a:p>
-                  </a:txBody>
-                  <a:tcPr marT="36576" marB="36576"/>
-                </a:tc>
-                <a:tc>
-                  <a:txBody>
-                    <a:bodyPr wrap="square"/>
-                    <a:lstStyle/>
-                    <a:p>
-                      <a:r>
-                        <a:rPr sz="1400" b="0">
-                          <a:solidFill>
-                            <a:srgbClr val="0F172A"/>
-                          </a:solidFill>
-                          <a:latin typeface="Noto Sans Thai Looped"/>
-                        </a:rPr>
-                        <a:t>เวิร์กชอป</a:t>
-                      </a:r>
-                    </a:p>
-                  </a:txBody>
-                  <a:tcPr marT="36576" marB="36576"/>
-                </a:tc>
-                <a:tc>
-                  <a:txBody>
-                    <a:bodyPr wrap="square"/>
-                    <a:lstStyle/>
-                    <a:p>
-                      <a:r>
-                        <a:rPr sz="1400" b="0">
-                          <a:solidFill>
-                            <a:srgbClr val="0F172A"/>
-                          </a:solidFill>
-                          <a:latin typeface="Noto Sans Thai Looped"/>
-                        </a:rPr>
-                        <a:t>แยก coupon ออกจาก sending email ด้วยมือตัวเอง</a:t>
-                      </a:r>
-                    </a:p>
-                  </a:txBody>
-                  <a:tcPr marT="36576" marB="36576"/>
-                </a:tc>
-              </a:tr>
-              <a:tr h="692334">
-                <a:tc>
-                  <a:txBody>
-                    <a:bodyPr wrap="square"/>
-                    <a:lstStyle/>
-                    <a:p>
-                      <a:r>
-                        <a:rPr sz="1400" b="0">
-                          <a:solidFill>
-                            <a:srgbClr val="0F172A"/>
-                          </a:solidFill>
-                          <a:latin typeface="Ubuntu"/>
-                        </a:rPr>
-                        <a:t>1:45–2:00</a:t>
-                      </a:r>
-                    </a:p>
-                  </a:txBody>
-                  <a:tcPr marT="36576" marB="36576">
-                    <a:solidFill>
-                      <a:srgbClr val="F1F5F9"/>
-                    </a:solidFill>
-                  </a:tcPr>
-                </a:tc>
-                <a:tc>
-                  <a:txBody>
-                    <a:bodyPr wrap="square"/>
-                    <a:lstStyle/>
-                    <a:p>
-                      <a:r>
-                        <a:rPr sz="1400" b="0">
-                          <a:solidFill>
-                            <a:srgbClr val="0F172A"/>
-                          </a:solidFill>
-                          <a:latin typeface="Noto Sans Thai Looped"/>
-                        </a:rPr>
-                        <a:t>ของหวาน + สรุป</a:t>
-                      </a:r>
-                    </a:p>
-                  </a:txBody>
-                  <a:tcPr marT="36576" marB="36576">
-                    <a:solidFill>
-                      <a:srgbClr val="F1F5F9"/>
-                    </a:solidFill>
-                  </a:tcPr>
-                </a:tc>
-                <a:tc>
-                  <a:txBody>
-                    <a:bodyPr wrap="square"/>
-                    <a:lstStyle/>
-                    <a:p>
-                      <a:r>
-                        <a:rPr sz="1400" b="0">
-                          <a:solidFill>
-                            <a:srgbClr val="0F172A"/>
-                          </a:solidFill>
-                          <a:latin typeface="Noto Sans Thai Looped"/>
-                        </a:rPr>
-                        <a:t>iter.Seq lazy pipeline + cheat sheet</a:t>
-                      </a:r>
-                    </a:p>
-                  </a:txBody>
-                  <a:tcPr marT="36576" marB="36576">
-                    <a:solidFill>
-                      <a:srgbClr val="F1F5F9"/>
-                    </a:solidFill>
-                  </a:tcPr>
-                </a:tc>
-              </a:tr>
-            </a:tbl>
-          </a:graphicData>
-        </a:graphic>
-      </p:graphicFrame>
+        </p:nvSpPr>
+        <p:spPr>
+          <a:xfrm>
+            <a:off x="548640" y="1600200"/>
+            <a:ext cx="11064240" cy="4937760"/>
+          </a:xfrm>
+          <a:prstGeom prst="rect">
+            <a:avLst/>
+          </a:prstGeom>
+          <a:noFill/>
+        </p:spPr>
+        <p:txBody>
+          <a:bodyPr wrap="square">
+            <a:spAutoFit/>
+          </a:bodyPr>
+          <a:lstStyle/>
+          <a:p>
+            <a:pPr algn="l">
+              <a:spcAft>
+                <a:spcPts val="1400"/>
+              </a:spcAft>
+            </a:pPr>
+            <a:r>
+              <a:rPr sz="1900" b="0" i="0">
+                <a:solidFill>
+                  <a:srgbClr val="0F172A"/>
+                </a:solidFill>
+                <a:latin typeface="Noto Sans Thai Looped"/>
+              </a:rPr>
+              <a:t>• ทักษะมองโค้ด — เห็นว่าบรรทัดไหนเป็น Action / Calculation / Data แล้วรู้ว่ามันแปลว่าอะไร</a:t>
+            </a:r>
+          </a:p>
+          <a:p>
+            <a:pPr algn="l">
+              <a:spcAft>
+                <a:spcPts val="1400"/>
+              </a:spcAft>
+            </a:pPr>
+            <a:r>
+              <a:rPr sz="1900" b="0" i="0">
+                <a:solidFill>
+                  <a:srgbClr val="0F172A"/>
+                </a:solidFill>
+                <a:latin typeface="Noto Sans Thai Looped"/>
+              </a:rPr>
+              <a:t>• วิธีดึง calculation ออกจาก action ให้โค้ดทดสอบง่ายขึ้น — ใช้กับ legacy Go ได้ทันที</a:t>
+            </a:r>
+          </a:p>
+          <a:p>
+            <a:pPr algn="l">
+              <a:spcAft>
+                <a:spcPts val="1400"/>
+              </a:spcAft>
+            </a:pPr>
+            <a:r>
+              <a:rPr sz="1900" b="0" i="0">
+                <a:solidFill>
+                  <a:srgbClr val="0F172A"/>
+                </a:solidFill>
+                <a:latin typeface="Noto Sans Thai Looped"/>
+              </a:rPr>
+              <a:t>• เครื่องมือของ Go สำหรับเขียนแบบ functional: closures, generics, iter.Seq</a:t>
+            </a:r>
+          </a:p>
+          <a:p>
+            <a:pPr algn="l">
+              <a:spcAft>
+                <a:spcPts val="1400"/>
+              </a:spcAft>
+            </a:pPr>
+            <a:r>
+              <a:rPr sz="1900" b="0" i="0">
+                <a:solidFill>
+                  <a:srgbClr val="0F172A"/>
+                </a:solidFill>
+                <a:latin typeface="Noto Sans Thai Looped"/>
+              </a:rPr>
+              <a:t>• สายตาใหม่กับ pattern ที่คุณใช้อยู่แล้ว (Functional Options, middleware) — ที่จริงมันคือ FP</a:t>
+            </a:r>
+          </a:p>
+          <a:p>
+            <a:pPr algn="l">
+              <a:spcAft>
+                <a:spcPts val="1400"/>
+              </a:spcAft>
+            </a:pPr>
+            <a:r>
+              <a:rPr sz="1900" b="1" i="0">
+                <a:solidFill>
+                  <a:srgbClr val="0D9488"/>
+                </a:solidFill>
+                <a:latin typeface="Noto Sans Thai Looped"/>
+              </a:rPr>
+              <a:t>• และได้ลงมือ refactor โค้ดจริงด้วยมือตัวเอง </a:t>
+            </a:r>
+            <a:r>
+              <a:rPr sz="1900" b="1" i="0">
+                <a:solidFill>
+                  <a:srgbClr val="0D9488"/>
+                </a:solidFill>
+                <a:latin typeface="Ubuntu"/>
+              </a:rPr>
+              <a:t>1</a:t>
+            </a:r>
+            <a:r>
+              <a:rPr sz="1900" b="1" i="0">
+                <a:solidFill>
+                  <a:srgbClr val="0D9488"/>
+                </a:solidFill>
+                <a:latin typeface="Noto Sans Thai Looped"/>
+              </a:rPr>
+              <a:t> ชิ้น ในชั่วโมงสุดท้าย</a:t>
+            </a:r>
+          </a:p>
+        </p:txBody>
+      </p:sp>
     </p:spTree>
   </p:cSld>
   <p:clrMapOvr>
@@ -8450,7 +9287,7 @@
         <p:spPr>
           <a:xfrm>
             <a:off x="502920" y="292608"/>
-            <a:ext cx="8778240" cy="914400"/>
+            <a:ext cx="11155680" cy="914400"/>
           </a:xfrm>
           <a:prstGeom prst="rect">
             <a:avLst/>
@@ -8475,7 +9312,43 @@
                 </a:solidFill>
                 <a:latin typeface="Noto Sans Thai Looped"/>
               </a:rPr>
-              <a:t>แกนคิดของวันนี้: Actions / Calculations / Data</a:t>
+              <a:t>แกนคิดของวันนี้: ทุกบรรทัดโค้ดคือ </a:t>
+            </a:r>
+            <a:r>
+              <a:rPr sz="3000" b="1" i="0">
+                <a:solidFill>
+                  <a:srgbClr val="0F172A"/>
+                </a:solidFill>
+                <a:latin typeface="Ubuntu"/>
+              </a:rPr>
+              <a:t>1</a:t>
+            </a:r>
+            <a:r>
+              <a:rPr sz="3000" b="1" i="0">
+                <a:solidFill>
+                  <a:srgbClr val="0F172A"/>
+                </a:solidFill>
+                <a:latin typeface="Noto Sans Thai Looped"/>
+              </a:rPr>
+              <a:t> ใน </a:t>
+            </a:r>
+            <a:r>
+              <a:rPr sz="3000" b="1" i="0">
+                <a:solidFill>
+                  <a:srgbClr val="0F172A"/>
+                </a:solidFill>
+                <a:latin typeface="Ubuntu"/>
+              </a:rPr>
+              <a:t>3</a:t>
+            </a:r>
+            <a:r>
+              <a:rPr sz="3000" b="1" i="0">
+                <a:solidFill>
+                  <a:srgbClr val="0F172A"/>
+                </a:solidFill>
+                <a:latin typeface="Noto Sans Thai Looped"/>
+              </a:rPr>
+              <a:t> อย่างนี้</a:t>
             </a:r>
           </a:p>
         </p:txBody>
@@ -8533,7 +9406,7 @@
         </p:nvGraphicFramePr>
         <p:xfrm>
           <a:off x="548640" y="1463040"/>
-          <a:ext cx="11109959" cy="2377440"/>
+          <a:ext cx="11109959" cy="2468880"/>
         </p:xfrm>
         <a:graphic>
           <a:graphicData uri="http://schemas.openxmlformats.org/drawingml/2006/table">
@@ -8547,22 +9420,12 @@
                 <a:gridCol w="4223621"/>
                 <a:gridCol w="1836357"/>
               </a:tblGrid>
-              <a:tr h="594360">
+              <a:tr h="617220">
                 <a:tc>
                   <a:txBody>
                     <a:bodyPr wrap="square"/>
                     <a:lstStyle/>
-                    <a:p>
-                      <a:r>
-                        <a:rPr sz="1400" b="1">
-                          <a:solidFill>
-                            <a:srgbClr val="FFFFFF"/>
-                          </a:solidFill>
-                          <a:latin typeface="Noto Sans Thai Looped"/>
-                        </a:rPr>
-                        <a:t>ประเภท</a:t>
-                      </a:r>
-                    </a:p>
+                    <a:p/>
                   </a:txBody>
                   <a:tcPr marT="36576" marB="36576">
                     <a:solidFill>
@@ -8637,7 +9500,7 @@
                   </a:tcPr>
                 </a:tc>
               </a:tr>
-              <a:tr h="594360">
+              <a:tr h="617220">
                 <a:tc>
                   <a:txBody>
                     <a:bodyPr wrap="square"/>
@@ -8711,7 +9574,7 @@
                   <a:tcPr marT="36576" marB="36576"/>
                 </a:tc>
               </a:tr>
-              <a:tr h="594360">
+              <a:tr h="617220">
                 <a:tc>
                   <a:txBody>
                     <a:bodyPr wrap="square"/>
@@ -8801,7 +9664,7 @@
                   </a:tcPr>
                 </a:tc>
               </a:tr>
-              <a:tr h="594360">
+              <a:tr h="617220">
                 <a:tc>
                   <a:txBody>
                     <a:bodyPr wrap="square"/>
@@ -8887,7 +9750,7 @@
         </p:nvSpPr>
         <p:spPr>
           <a:xfrm>
-            <a:off x="548640" y="4114800"/>
+            <a:off x="548640" y="4297680"/>
             <a:ext cx="11064240" cy="4937760"/>
           </a:xfrm>
           <a:prstGeom prst="rect">
@@ -8903,17 +9766,33 @@
           <a:p>
             <a:pPr algn="l">
               <a:spcAft>
+                <a:spcPts val="1200"/>
+              </a:spcAft>
+            </a:pPr>
+            <a:r>
+              <a:rPr sz="1800" b="1" i="0">
+                <a:solidFill>
+                  <a:srgbClr val="0D9488"/>
+                </a:solidFill>
+                <a:latin typeface="Noto Sans Thai Looped"/>
+              </a:rPr>
+              <a:t>• คำถามเดียวที่ต้องตอบเก่ง: "บรรทัดนี้พึ่งโลกภายนอกไหม?"</a:t>
+            </a:r>
+          </a:p>
+          <a:p>
+            <a:pPr algn="l">
+              <a:spcAft>
                 <a:spcPts val="800"/>
               </a:spcAft>
             </a:pPr>
             <a:r>
-              <a:rPr sz="1700" b="0" i="0">
+              <a:rPr sz="1600" b="0" i="0">
                 <a:solidFill>
                   <a:srgbClr val="0F172A"/>
                 </a:solidFill>
                 <a:latin typeface="Noto Sans Thai Looped"/>
               </a:rPr>
-              <a:t>• ทักษะที่ต้องการคือ "การมองโค้ด" (spotting) ก่อนเทคนิค — ใช้กับ legacy Go ได้ทันที</a:t>
+              <a:t>• อ่านนาฬิกา, พิมพ์ log, เขียนไฟล์ → พึ่ง (ผลเปลี่ยนตามเวลา/จำนวนครั้ง)</a:t>
             </a:r>
           </a:p>
           <a:p>
@@ -8923,29 +9802,13 @@
               </a:spcAft>
             </a:pPr>
             <a:r>
-              <a:rPr sz="1700" b="0" i="0">
+              <a:rPr sz="1600" b="0" i="0">
                 <a:solidFill>
                   <a:srgbClr val="0F172A"/>
                 </a:solidFill>
                 <a:latin typeface="Noto Sans Thai Looped"/>
               </a:rPr>
-              <a:t>• Go เป็นภาษาที่ action หลุดมาง่าย: mutation, goroutine, I/O อยู่ใกล้มือเสมอ</a:t>
-            </a:r>
-          </a:p>
-          <a:p>
-            <a:pPr algn="l">
-              <a:spcAft>
-                <a:spcPts val="800"/>
-              </a:spcAft>
-            </a:pPr>
-            <a:r>
-              <a:rPr sz="1700" b="1" i="0">
-                <a:solidFill>
-                  <a:srgbClr val="0D9488"/>
-                </a:solidFill>
-                <a:latin typeface="Noto Sans Thai Looped"/>
-              </a:rPr>
-              <a:t>• วันนี้ไม่มี monad / functor / type theory — มีแต่คำถามเดียว: โค้ดบรรทัดนี้ "พึ่งโลกภายนอก" ไหม?</a:t>
+              <a:t>• บวกเลข, ตรวจ format, หาคูปองที่ใช้ได้ → ไม่พึ่ง (input ชุดเดิม = คำตอบชุดเดิม)</a:t>
             </a:r>
           </a:p>
         </p:txBody>
@@ -8977,7 +9840,7 @@
         <p:spPr>
           <a:xfrm>
             <a:off x="502920" y="292608"/>
-            <a:ext cx="8778240" cy="914400"/>
+            <a:ext cx="11155680" cy="914400"/>
           </a:xfrm>
           <a:prstGeom prst="rect">
             <a:avLst/>
@@ -9002,7 +9865,7 @@
                 </a:solidFill>
                 <a:latin typeface="Noto Sans Thai Looped"/>
               </a:rPr>
-              <a:t>เปิด: โค้ดนี้ทำอะไรบ้าง?</a:t>
+              <a:t>ลองอ่านโค้ดนี้</a:t>
             </a:r>
           </a:p>
           <a:p>
@@ -9012,94 +9875,20 @@
               </a:spcAft>
             </a:pPr>
             <a:r>
-              <a:rPr sz="1400" b="0" i="0">
+              <a:rPr sz="1500" b="0" i="0">
                 <a:solidFill>
                   <a:srgbClr val="64748B"/>
                 </a:solidFill>
                 <a:latin typeface="Noto Sans Thai Looped"/>
               </a:rPr>
-              <a:t>จาก go-fp/</a:t>
-            </a:r>
-            <a:r>
-              <a:rPr sz="1400" b="0" i="0">
-                <a:solidFill>
-                  <a:srgbClr val="64748B"/>
-                </a:solidFill>
-                <a:latin typeface="Ubuntu"/>
-              </a:rPr>
-              <a:t>01-</a:t>
-            </a:r>
-            <a:r>
-              <a:rPr sz="1400" b="0" i="0">
-                <a:solidFill>
-                  <a:srgbClr val="64748B"/>
-                </a:solidFill>
-                <a:latin typeface="Noto Sans Thai Looped"/>
-              </a:rPr>
-              <a:t>acd-opener — ลองตีเส้นแยก: บรรทัดไหน Data / Calculation / Action?</a:t>
-            </a:r>
-          </a:p>
-        </p:txBody>
-      </p:sp>
-      <p:sp>
-        <p:nvSpPr>
-          <p:cNvPr id="3" name="Rounded Rectangle 2"/>
-          <p:cNvSpPr/>
-          <p:nvPr/>
-        </p:nvSpPr>
-        <p:spPr>
-          <a:xfrm>
-            <a:off x="10104120" y="384048"/>
-            <a:ext cx="1600200" cy="502920"/>
-          </a:xfrm>
-          <a:prstGeom prst="roundRect">
-            <a:avLst/>
-          </a:prstGeom>
-          <a:solidFill>
-            <a:srgbClr val="0D9488"/>
-          </a:solidFill>
-          <a:ln>
-            <a:noFill/>
-          </a:ln>
-        </p:spPr>
-        <p:style>
-          <a:lnRef idx="1">
-            <a:schemeClr val="accent1"/>
-          </a:lnRef>
-          <a:fillRef idx="3">
-            <a:schemeClr val="accent1"/>
-          </a:fillRef>
-          <a:effectRef idx="2">
-            <a:schemeClr val="accent1"/>
-          </a:effectRef>
-          <a:fontRef idx="minor">
-            <a:schemeClr val="lt1"/>
-          </a:fontRef>
-        </p:style>
-        <p:txBody>
-          <a:bodyPr rtlCol="0" anchor="ctr" wrap="none"/>
-          <a:lstStyle/>
-          <a:p>
-            <a:pPr algn="ctr">
-              <a:spcAft>
-                <a:spcPts val="0"/>
-              </a:spcAft>
-            </a:pPr>
-            <a:r>
-              <a:rPr sz="1400" b="1" i="0">
-                <a:solidFill>
-                  <a:srgbClr val="FFFFFF"/>
-                </a:solidFill>
-                <a:latin typeface="Ubuntu"/>
-              </a:rPr>
-              <a:t>0:00–0:15</a:t>
-            </a:r>
-          </a:p>
-        </p:txBody>
-      </p:sp>
-      <p:sp>
-        <p:nvSpPr>
-          <p:cNvPr id="4" name="Rectangle 3"/>
+              <a:t>บรรทัดไหนคือ Data · Calculation · Action? — บรรทัดเดียวซ้อนหลายอย่างได้</a:t>
+            </a:r>
+          </a:p>
+        </p:txBody>
+      </p:sp>
+      <p:sp>
+        <p:nvSpPr>
+          <p:cNvPr id="3" name="Rectangle 2"/>
           <p:cNvSpPr/>
           <p:nvPr/>
         </p:nvSpPr>
@@ -9142,14 +9931,14 @@
       </p:sp>
       <p:sp>
         <p:nvSpPr>
-          <p:cNvPr id="5" name="Rounded Rectangle 4"/>
+          <p:cNvPr id="4" name="Rounded Rectangle 3"/>
           <p:cNvSpPr/>
           <p:nvPr/>
         </p:nvSpPr>
         <p:spPr>
           <a:xfrm>
-            <a:off x="548640" y="1691640"/>
-            <a:ext cx="7406640" cy="4480560"/>
+            <a:off x="548640" y="1600200"/>
+            <a:ext cx="7132320" cy="4206240"/>
           </a:xfrm>
           <a:prstGeom prst="roundRect">
             <a:avLst/>
@@ -9186,7 +9975,7 @@
               </a:spcAft>
             </a:pPr>
             <a:r>
-              <a:rPr sz="1300" i="0">
+              <a:rPr sz="1400" i="0">
                 <a:solidFill>
                   <a:srgbClr val="E2E8F0"/>
                 </a:solidFill>
@@ -9202,32 +9991,23 @@
               </a:spcAft>
             </a:pPr>
             <a:r>
-              <a:rPr sz="1300" i="0">
+              <a:rPr sz="1400" i="0">
                 <a:solidFill>
                   <a:srgbClr val="E2E8F0"/>
                 </a:solidFill>
                 <a:latin typeface="DejaVu Sans Mono"/>
               </a:rPr>
-              <a:t>    order.ProcessedAt = time.Now()          </a:t>
-            </a:r>
-            <a:r>
-              <a:rPr sz="1300" i="1">
-                <a:solidFill>
-                  <a:srgbClr val="94A3B8"/>
-                </a:solidFill>
-                <a:latin typeface="DejaVu Sans Mono"/>
-              </a:rPr>
-              <a:t>// ????</a:t>
-            </a:r>
-          </a:p>
-          <a:p>
-            <a:pPr algn="l">
-              <a:spcAft>
-                <a:spcPts val="0"/>
-              </a:spcAft>
-            </a:pPr>
-            <a:r>
-              <a:rPr sz="1300" i="0">
+              <a:t>    order.ProcessedAt = time.Now()</a:t>
+            </a:r>
+          </a:p>
+          <a:p>
+            <a:pPr algn="l">
+              <a:spcAft>
+                <a:spcPts val="0"/>
+              </a:spcAft>
+            </a:pPr>
+            <a:r>
+              <a:rPr sz="1400" i="0">
                 <a:solidFill>
                   <a:srgbClr val="E2E8F0"/>
                 </a:solidFill>
@@ -9243,32 +10023,23 @@
               </a:spcAft>
             </a:pPr>
             <a:r>
-              <a:rPr sz="1300" i="0">
+              <a:rPr sz="1400" i="0">
                 <a:solidFill>
                   <a:srgbClr val="E2E8F0"/>
                 </a:solidFill>
                 <a:latin typeface="DejaVu Sans Mono"/>
               </a:rPr>
-              <a:t>    order.Total = 0                          </a:t>
-            </a:r>
-            <a:r>
-              <a:rPr sz="1300" i="1">
-                <a:solidFill>
-                  <a:srgbClr val="94A3B8"/>
-                </a:solidFill>
-                <a:latin typeface="DejaVu Sans Mono"/>
-              </a:rPr>
-              <a:t>// ????</a:t>
-            </a:r>
-          </a:p>
-          <a:p>
-            <a:pPr algn="l">
-              <a:spcAft>
-                <a:spcPts val="0"/>
-              </a:spcAft>
-            </a:pPr>
-            <a:r>
-              <a:rPr sz="1300" i="0">
+              <a:t>    order.Total = 0</a:t>
+            </a:r>
+          </a:p>
+          <a:p>
+            <a:pPr algn="l">
+              <a:spcAft>
+                <a:spcPts val="0"/>
+              </a:spcAft>
+            </a:pPr>
+            <a:r>
+              <a:rPr sz="1400" i="0">
                 <a:solidFill>
                   <a:srgbClr val="E2E8F0"/>
                 </a:solidFill>
@@ -9284,7 +10055,7 @@
               </a:spcAft>
             </a:pPr>
             <a:r>
-              <a:rPr sz="1300" i="0">
+              <a:rPr sz="1400" i="0">
                 <a:solidFill>
                   <a:srgbClr val="E2E8F0"/>
                 </a:solidFill>
@@ -9300,7 +10071,7 @@
               </a:spcAft>
             </a:pPr>
             <a:r>
-              <a:rPr sz="1300" i="0">
+              <a:rPr sz="1400" i="0">
                 <a:solidFill>
                   <a:srgbClr val="E2E8F0"/>
                 </a:solidFill>
@@ -9316,7 +10087,7 @@
               </a:spcAft>
             </a:pPr>
             <a:r>
-              <a:rPr sz="1300" i="0">
+              <a:rPr sz="1400" i="0">
                 <a:solidFill>
                   <a:srgbClr val="E2E8F0"/>
                 </a:solidFill>
@@ -9332,32 +10103,23 @@
               </a:spcAft>
             </a:pPr>
             <a:r>
-              <a:rPr sz="1300" i="0">
+              <a:rPr sz="1400" i="0">
                 <a:solidFill>
                   <a:srgbClr val="E2E8F0"/>
                 </a:solidFill>
                 <a:latin typeface="DejaVu Sans Mono"/>
               </a:rPr>
-              <a:t>        order.Total = order.Total * 90 / 100 </a:t>
-            </a:r>
-            <a:r>
-              <a:rPr sz="1300" i="1">
-                <a:solidFill>
-                  <a:srgbClr val="94A3B8"/>
-                </a:solidFill>
-                <a:latin typeface="DejaVu Sans Mono"/>
-              </a:rPr>
-              <a:t>// ????</a:t>
-            </a:r>
-          </a:p>
-          <a:p>
-            <a:pPr algn="l">
-              <a:spcAft>
-                <a:spcPts val="0"/>
-              </a:spcAft>
-            </a:pPr>
-            <a:r>
-              <a:rPr sz="1300" i="0">
+              <a:t>        order.Total = order.Total * 90 / 100</a:t>
+            </a:r>
+          </a:p>
+          <a:p>
+            <a:pPr algn="l">
+              <a:spcAft>
+                <a:spcPts val="0"/>
+              </a:spcAft>
+            </a:pPr>
+            <a:r>
+              <a:rPr sz="1400" i="0">
                 <a:solidFill>
                   <a:srgbClr val="E2E8F0"/>
                 </a:solidFill>
@@ -9373,32 +10135,23 @@
               </a:spcAft>
             </a:pPr>
             <a:r>
-              <a:rPr sz="1300" i="0">
+              <a:rPr sz="1400" i="0">
                 <a:solidFill>
                   <a:srgbClr val="E2E8F0"/>
                 </a:solidFill>
                 <a:latin typeface="DejaVu Sans Mono"/>
               </a:rPr>
-              <a:t>    orders[order.Email] = *order             </a:t>
-            </a:r>
-            <a:r>
-              <a:rPr sz="1300" i="1">
-                <a:solidFill>
-                  <a:srgbClr val="94A3B8"/>
-                </a:solidFill>
-                <a:latin typeface="DejaVu Sans Mono"/>
-              </a:rPr>
-              <a:t>// ????</a:t>
-            </a:r>
-          </a:p>
-          <a:p>
-            <a:pPr algn="l">
-              <a:spcAft>
-                <a:spcPts val="0"/>
-              </a:spcAft>
-            </a:pPr>
-            <a:r>
-              <a:rPr sz="1300" i="0">
+              <a:t>    orders[order.Email] = *order</a:t>
+            </a:r>
+          </a:p>
+          <a:p>
+            <a:pPr algn="l">
+              <a:spcAft>
+                <a:spcPts val="0"/>
+              </a:spcAft>
+            </a:pPr>
+            <a:r>
+              <a:rPr sz="1400" i="0">
                 <a:solidFill>
                   <a:srgbClr val="E2E8F0"/>
                 </a:solidFill>
@@ -9414,7 +10167,7 @@
               </a:spcAft>
             </a:pPr>
             <a:r>
-              <a:rPr sz="1300" i="0">
+              <a:rPr sz="1400" i="0">
                 <a:solidFill>
                   <a:srgbClr val="E2E8F0"/>
                 </a:solidFill>
@@ -9427,14 +10180,14 @@
       </p:sp>
       <p:sp>
         <p:nvSpPr>
-          <p:cNvPr id="6" name="TextBox 5"/>
+          <p:cNvPr id="5" name="TextBox 4"/>
           <p:cNvSpPr txBox="1"/>
           <p:nvPr/>
         </p:nvSpPr>
         <p:spPr>
           <a:xfrm>
-            <a:off x="8229600" y="1737360"/>
-            <a:ext cx="3474720" cy="4206240"/>
+            <a:off x="8001000" y="1737360"/>
+            <a:ext cx="3657600" cy="4023360"/>
           </a:xfrm>
           <a:prstGeom prst="rect">
             <a:avLst/>
@@ -9459,13 +10212,13 @@
                 </a:solidFill>
                 <a:latin typeface="Noto Sans Thai Looped"/>
               </a:rPr>
-              <a:t>กติกา</a:t>
-            </a:r>
-          </a:p>
-          <a:p>
-            <a:pPr algn="l">
-              <a:spcAft>
-                <a:spcPts val="600"/>
+              <a:t>ชวนคิด</a:t>
+            </a:r>
+          </a:p>
+          <a:p>
+            <a:pPr algn="l">
+              <a:spcAft>
+                <a:spcPts val="1000"/>
               </a:spcAft>
             </a:pPr>
             <a:r>
@@ -9475,7 +10228,7 @@
                 </a:solidFill>
                 <a:latin typeface="Noto Sans Thai Looped"/>
               </a:rPr>
-              <a:t>• อ่านเงียบ ๆ </a:t>
+              <a:t>• ทำไมฟังก์ชันนี้รัน </a:t>
             </a:r>
             <a:r>
               <a:rPr sz="1500" b="0" i="0">
@@ -9484,7 +10237,7 @@
                 </a:solidFill>
                 <a:latin typeface="Ubuntu"/>
               </a:rPr>
-              <a:t>1</a:t>
+              <a:t>2</a:t>
             </a:r>
             <a:r>
               <a:rPr sz="1500" b="0" i="0">
@@ -9493,13 +10246,13 @@
                 </a:solidFill>
                 <a:latin typeface="Noto Sans Thai Looped"/>
               </a:rPr>
-              <a:t> นาที</a:t>
-            </a:r>
-          </a:p>
-          <a:p>
-            <a:pPr algn="l">
-              <a:spcAft>
-                <a:spcPts val="600"/>
+              <a:t> ครั้ง ผลอาจไม่เหมือนกัน?</a:t>
+            </a:r>
+          </a:p>
+          <a:p>
+            <a:pPr algn="l">
+              <a:spcAft>
+                <a:spcPts val="1000"/>
               </a:spcAft>
             </a:pPr>
             <a:r>
@@ -9509,82 +10262,23 @@
                 </a:solidFill>
                 <a:latin typeface="Noto Sans Thai Looped"/>
               </a:rPr>
-              <a:t>• จับคู่ชี้บรรทัด </a:t>
-            </a:r>
+              <a:t>• ถ้ากติกาส่วนลดเปลี่ยน ต้องรันระบบทั้งระบบเพื่อทดสอบไหม?</a:t>
+            </a:r>
+          </a:p>
+          <a:p>
+            <a:pPr algn="l">
+              <a:spcAft>
+                <a:spcPts val="1000"/>
+              </a:spcAft>
+            </a:pPr>
             <a:r>
               <a:rPr sz="1500" b="0" i="0">
                 <a:solidFill>
                   <a:srgbClr val="0F172A"/>
                 </a:solidFill>
-                <a:latin typeface="Ubuntu"/>
-              </a:rPr>
-              <a:t>3</a:t>
-            </a:r>
-            <a:r>
-              <a:rPr sz="1500" b="0" i="0">
-                <a:solidFill>
-                  <a:srgbClr val="0F172A"/>
-                </a:solidFill>
                 <a:latin typeface="Noto Sans Thai Looped"/>
               </a:rPr>
-              <a:t> นาที</a:t>
-            </a:r>
-          </a:p>
-          <a:p>
-            <a:pPr algn="l">
-              <a:spcAft>
-                <a:spcPts val="600"/>
-              </a:spcAft>
-            </a:pPr>
-            <a:r>
-              <a:rPr sz="1500" b="0" i="0">
-                <a:solidFill>
-                  <a:srgbClr val="0F172A"/>
-                </a:solidFill>
-                <a:latin typeface="Noto Sans Thai Looped"/>
-              </a:rPr>
-              <a:t>• เฉลยบนกระดานร่วมกัน</a:t>
-            </a:r>
-          </a:p>
-          <a:p>
-            <a:pPr algn="l">
-              <a:spcAft>
-                <a:spcPts val="0"/>
-              </a:spcAft>
-            </a:pPr>
-          </a:p>
-          <a:p>
-            <a:pPr algn="l">
-              <a:spcAft>
-                <a:spcPts val="600"/>
-              </a:spcAft>
-            </a:pPr>
-            <a:r>
-              <a:rPr sz="1300" b="0" i="1">
-                <a:solidFill>
-                  <a:srgbClr val="64748B"/>
-                </a:solidFill>
-                <a:latin typeface="Noto Sans Thai Looped"/>
-              </a:rPr>
-              <a:t>คำใบ้: บรรทัดเดียวอาจมีมากกว่า </a:t>
-            </a:r>
-            <a:r>
-              <a:rPr sz="1300" b="0" i="1">
-                <a:solidFill>
-                  <a:srgbClr val="64748B"/>
-                </a:solidFill>
-                <a:latin typeface="Ubuntu"/>
-              </a:rPr>
-              <a:t>1</a:t>
-            </a:r>
-            <a:r>
-              <a:rPr sz="1300" b="0" i="1">
-                <a:solidFill>
-                  <a:srgbClr val="64748B"/>
-                </a:solidFill>
-                <a:latin typeface="Noto Sans Thai Looped"/>
-              </a:rPr>
-              <a:t> ประเภทซ้อนกัน</a:t>
+              <a:t>• ข้อมูล (Data) ที่ไหลผ่านฟังก์ชันนี้มีอะไรบ้าง?</a:t>
             </a:r>
           </a:p>
         </p:txBody>
@@ -9616,7 +10310,7 @@
         <p:spPr>
           <a:xfrm>
             <a:off x="502920" y="292608"/>
-            <a:ext cx="8778240" cy="914400"/>
+            <a:ext cx="11155680" cy="914400"/>
           </a:xfrm>
           <a:prstGeom prst="rect">
             <a:avLst/>
@@ -9641,70 +10335,30 @@
                 </a:solidFill>
                 <a:latin typeface="Noto Sans Thai Looped"/>
               </a:rPr>
-              <a:t>Refactor live: ดึง Calculation ออกจาก Action</a:t>
-            </a:r>
-          </a:p>
-        </p:txBody>
-      </p:sp>
-      <p:sp>
-        <p:nvSpPr>
-          <p:cNvPr id="3" name="Rounded Rectangle 2"/>
-          <p:cNvSpPr/>
-          <p:nvPr/>
-        </p:nvSpPr>
-        <p:spPr>
-          <a:xfrm>
-            <a:off x="10104120" y="384048"/>
-            <a:ext cx="1600200" cy="502920"/>
-          </a:xfrm>
-          <a:prstGeom prst="roundRect">
-            <a:avLst/>
-          </a:prstGeom>
-          <a:solidFill>
-            <a:srgbClr val="0D9488"/>
-          </a:solidFill>
-          <a:ln>
-            <a:noFill/>
-          </a:ln>
-        </p:spPr>
-        <p:style>
-          <a:lnRef idx="1">
-            <a:schemeClr val="accent1"/>
-          </a:lnRef>
-          <a:fillRef idx="3">
-            <a:schemeClr val="accent1"/>
-          </a:fillRef>
-          <a:effectRef idx="2">
-            <a:schemeClr val="accent1"/>
-          </a:effectRef>
-          <a:fontRef idx="minor">
-            <a:schemeClr val="lt1"/>
-          </a:fontRef>
-        </p:style>
-        <p:txBody>
-          <a:bodyPr rtlCol="0" anchor="ctr" wrap="none"/>
-          <a:lstStyle/>
-          <a:p>
-            <a:pPr algn="ctr">
-              <a:spcAft>
-                <a:spcPts val="0"/>
-              </a:spcAft>
-            </a:pPr>
-            <a:r>
-              <a:rPr sz="1400" b="1" i="0">
-                <a:solidFill>
-                  <a:srgbClr val="FFFFFF"/>
-                </a:solidFill>
-                <a:latin typeface="Ubuntu"/>
-              </a:rPr>
-              <a:t>0:15–0:40</a:t>
-            </a:r>
-          </a:p>
-        </p:txBody>
-      </p:sp>
-      <p:sp>
-        <p:nvSpPr>
-          <p:cNvPr id="4" name="Rectangle 3"/>
+              <a:t>โค้ดที่ปนกันทำให้ชีวิตยาก</a:t>
+            </a:r>
+          </a:p>
+          <a:p>
+            <a:pPr algn="l">
+              <a:spcAft>
+                <a:spcPts val="600"/>
+              </a:spcAft>
+            </a:pPr>
+            <a:r>
+              <a:rPr sz="1500" b="0" i="0">
+                <a:solidFill>
+                  <a:srgbClr val="64748B"/>
+                </a:solidFill>
+                <a:latin typeface="Noto Sans Thai Looped"/>
+              </a:rPr>
+              <a:t>ตัวอย่างเดิม — มองผ่านกรอบ ACD แล้วปัญหาชัดขึ้นเอง</a:t>
+            </a:r>
+          </a:p>
+        </p:txBody>
+      </p:sp>
+      <p:sp>
+        <p:nvSpPr>
+          <p:cNvPr id="3" name="Rectangle 2"/>
           <p:cNvSpPr/>
           <p:nvPr/>
         </p:nvSpPr>
@@ -9747,7 +10401,371 @@
       </p:sp>
       <p:sp>
         <p:nvSpPr>
+          <p:cNvPr id="4" name="TextBox 3"/>
+          <p:cNvSpPr txBox="1"/>
+          <p:nvPr/>
+        </p:nvSpPr>
+        <p:spPr>
+          <a:xfrm>
+            <a:off x="548640" y="1600200"/>
+            <a:ext cx="11064240" cy="4937760"/>
+          </a:xfrm>
+          <a:prstGeom prst="rect">
+            <a:avLst/>
+          </a:prstGeom>
+          <a:noFill/>
+        </p:spPr>
+        <p:txBody>
+          <a:bodyPr wrap="square">
+            <a:spAutoFit/>
+          </a:bodyPr>
+          <a:lstStyle/>
+          <a:p>
+            <a:pPr algn="l">
+              <a:spcAft>
+                <a:spcPts val="600"/>
+              </a:spcAft>
+            </a:pPr>
+            <a:r>
+              <a:rPr sz="2000" b="1" i="0">
+                <a:solidFill>
+                  <a:srgbClr val="0F172A"/>
+                </a:solidFill>
+                <a:latin typeface="Noto Sans Thai Looped"/>
+              </a:rPr>
+              <a:t>• Action แฝงใน calculation → ทดสอบยาก</a:t>
+            </a:r>
+          </a:p>
+          <a:p>
+            <a:pPr algn="l" lvl="1">
+              <a:spcAft>
+                <a:spcPts val="1200"/>
+              </a:spcAft>
+            </a:pPr>
+            <a:r>
+              <a:rPr sz="1600" b="0" i="0">
+                <a:solidFill>
+                  <a:srgbClr val="0F172A"/>
+                </a:solidFill>
+                <a:latin typeface="Noto Sans Thai Looped"/>
+              </a:rPr>
+              <a:t>– อยากทดสอบแค่กติกาส่วนลด ต้องรัน ProcessOrder ทั้งฟังก์ชัน — จับ stdout, ล้าง map, ปลอมเวลา</a:t>
+            </a:r>
+          </a:p>
+          <a:p>
+            <a:pPr algn="l">
+              <a:spcAft>
+                <a:spcPts val="600"/>
+              </a:spcAft>
+            </a:pPr>
+            <a:r>
+              <a:rPr sz="2000" b="1" i="0">
+                <a:solidFill>
+                  <a:srgbClr val="0F172A"/>
+                </a:solidFill>
+                <a:latin typeface="Noto Sans Thai Looped"/>
+              </a:rPr>
+              <a:t>• Mutate input → ผู้เรียกไม่รู้ว่า order ของตัวเองถูกแก้ไปแล้ว</a:t>
+            </a:r>
+          </a:p>
+          <a:p>
+            <a:pPr algn="l" lvl="1">
+              <a:spcAft>
+                <a:spcPts val="1200"/>
+              </a:spcAft>
+            </a:pPr>
+            <a:r>
+              <a:rPr sz="1600" b="0" i="0">
+                <a:solidFill>
+                  <a:srgbClr val="0F172A"/>
+                </a:solidFill>
+                <a:latin typeface="Noto Sans Thai Looped"/>
+              </a:rPr>
+              <a:t>– bug ยอดฮิต: ผ่าน order เข้าไป </a:t>
+            </a:r>
+            <a:r>
+              <a:rPr sz="1600" b="0" i="0">
+                <a:solidFill>
+                  <a:srgbClr val="0F172A"/>
+                </a:solidFill>
+                <a:latin typeface="Ubuntu"/>
+              </a:rPr>
+              <a:t>2</a:t>
+            </a:r>
+            <a:r>
+              <a:rPr sz="1600" b="0" i="0">
+                <a:solidFill>
+                  <a:srgbClr val="0F172A"/>
+                </a:solidFill>
+                <a:latin typeface="Noto Sans Thai Looped"/>
+              </a:rPr>
+              <a:t> ครั้ง ยอดหายเพราะถูกลดสองรอบ</a:t>
+            </a:r>
+          </a:p>
+          <a:p>
+            <a:pPr algn="l">
+              <a:spcAft>
+                <a:spcPts val="600"/>
+              </a:spcAft>
+            </a:pPr>
+            <a:r>
+              <a:rPr sz="2000" b="1" i="0">
+                <a:solidFill>
+                  <a:srgbClr val="0F172A"/>
+                </a:solidFill>
+                <a:latin typeface="Noto Sans Thai Looped"/>
+              </a:rPr>
+              <a:t>• กติกาธุรกิจ (ลด </a:t>
+            </a:r>
+            <a:r>
+              <a:rPr sz="2000" b="1" i="0">
+                <a:solidFill>
+                  <a:srgbClr val="0F172A"/>
+                </a:solidFill>
+                <a:latin typeface="Ubuntu"/>
+              </a:rPr>
+              <a:t>10</a:t>
+            </a:r>
+            <a:r>
+              <a:rPr sz="2000" b="1" i="0">
+                <a:solidFill>
+                  <a:srgbClr val="0F172A"/>
+                </a:solidFill>
+                <a:latin typeface="Noto Sans Thai Looped"/>
+              </a:rPr>
+              <a:t>% เมื่อยอดถึง </a:t>
+            </a:r>
+            <a:r>
+              <a:rPr sz="2000" b="1" i="0">
+                <a:solidFill>
+                  <a:srgbClr val="0F172A"/>
+                </a:solidFill>
+                <a:latin typeface="Ubuntu"/>
+              </a:rPr>
+              <a:t>1</a:t>
+            </a:r>
+            <a:r>
+              <a:rPr sz="2000" b="1" i="0">
+                <a:solidFill>
+                  <a:srgbClr val="0F172A"/>
+                </a:solidFill>
+                <a:latin typeface="Noto Sans Thai Looped"/>
+              </a:rPr>
+              <a:t>,</a:t>
+            </a:r>
+            <a:r>
+              <a:rPr sz="2000" b="1" i="0">
+                <a:solidFill>
+                  <a:srgbClr val="0F172A"/>
+                </a:solidFill>
+                <a:latin typeface="Ubuntu"/>
+              </a:rPr>
+              <a:t>000</a:t>
+            </a:r>
+            <a:r>
+              <a:rPr sz="2000" b="1" i="0">
+                <a:solidFill>
+                  <a:srgbClr val="0F172A"/>
+                </a:solidFill>
+                <a:latin typeface="Noto Sans Thai Looped"/>
+              </a:rPr>
+              <a:t>) ฝังอยู่ใน action → มองไม่เห็นเป็น 'ความรู้'</a:t>
+            </a:r>
+          </a:p>
+          <a:p>
+            <a:pPr algn="l" lvl="1">
+              <a:spcAft>
+                <a:spcPts val="1200"/>
+              </a:spcAft>
+            </a:pPr>
+            <a:r>
+              <a:rPr sz="1600" b="0" i="0">
+                <a:solidFill>
+                  <a:srgbClr val="0F172A"/>
+                </a:solidFill>
+                <a:latin typeface="Noto Sans Thai Looped"/>
+              </a:rPr>
+              <a:t>– กติกาพวกนี้คือ calculation ที่ควรรวมอยู่ด้วยกัน เทสต์ได้เอง และใช้ซ้ำได้</a:t>
+            </a:r>
+          </a:p>
+        </p:txBody>
+      </p:sp>
+      <p:sp>
+        <p:nvSpPr>
           <p:cNvPr id="5" name="Rounded Rectangle 4"/>
+          <p:cNvSpPr/>
+          <p:nvPr/>
+        </p:nvSpPr>
+        <p:spPr>
+          <a:xfrm>
+            <a:off x="548640" y="5989320"/>
+            <a:ext cx="11109960" cy="566928"/>
+          </a:xfrm>
+          <a:prstGeom prst="roundRect">
+            <a:avLst/>
+          </a:prstGeom>
+          <a:solidFill>
+            <a:srgbClr val="CCFBF1"/>
+          </a:solidFill>
+          <a:ln>
+            <a:noFill/>
+          </a:ln>
+          <a:effectLst/>
+        </p:spPr>
+        <p:style>
+          <a:lnRef idx="1">
+            <a:schemeClr val="accent1"/>
+          </a:lnRef>
+          <a:fillRef idx="3">
+            <a:schemeClr val="accent1"/>
+          </a:fillRef>
+          <a:effectRef idx="2">
+            <a:schemeClr val="accent1"/>
+          </a:effectRef>
+          <a:fontRef idx="minor">
+            <a:schemeClr val="lt1"/>
+          </a:fontRef>
+        </p:style>
+        <p:txBody>
+          <a:bodyPr rtlCol="0" anchor="ctr" tIns="54864" bIns="36576" wrap="square"/>
+          <a:lstStyle/>
+          <a:p>
+            <a:pPr algn="l">
+              <a:spcAft>
+                <a:spcPts val="0"/>
+              </a:spcAft>
+            </a:pPr>
+            <a:r>
+              <a:rPr sz="1500" b="1" i="0">
+                <a:solidFill>
+                  <a:srgbClr val="0F766E"/>
+                </a:solidFill>
+                <a:latin typeface="Noto Sans Thai Looped"/>
+              </a:rPr>
+              <a:t>จำไว้: โค้ดที่ปนกันยังทำงานได้ — แต่คุณจ่ายค่ามันตอนเทสต์ ตอนแก้ และตอนเจอ bug</a:t>
+            </a:r>
+          </a:p>
+        </p:txBody>
+      </p:sp>
+    </p:spTree>
+  </p:cSld>
+  <p:clrMapOvr>
+    <a:masterClrMapping/>
+  </p:clrMapOvr>
+</p:sld>
+</file>
+
+<file path=ppt/slides/slide6.xml><?xml version="1.0" encoding="utf-8"?>
+<p:sld xmlns:a="http://schemas.openxmlformats.org/drawingml/2006/main" xmlns:p="http://schemas.openxmlformats.org/presentationml/2006/main" xmlns:r="http://schemas.openxmlformats.org/officeDocument/2006/relationships">
+  <p:cSld>
+    <p:spTree>
+      <p:nvGrpSpPr>
+        <p:cNvPr id="1" name=""/>
+        <p:cNvGrpSpPr/>
+        <p:nvPr/>
+      </p:nvGrpSpPr>
+      <p:grpSpPr/>
+      <p:sp>
+        <p:nvSpPr>
+          <p:cNvPr id="2" name="TextBox 1"/>
+          <p:cNvSpPr txBox="1"/>
+          <p:nvPr/>
+        </p:nvSpPr>
+        <p:spPr>
+          <a:xfrm>
+            <a:off x="502920" y="292608"/>
+            <a:ext cx="11155680" cy="914400"/>
+          </a:xfrm>
+          <a:prstGeom prst="rect">
+            <a:avLst/>
+          </a:prstGeom>
+          <a:noFill/>
+        </p:spPr>
+        <p:txBody>
+          <a:bodyPr wrap="square">
+            <a:spAutoFit/>
+          </a:bodyPr>
+          <a:lstStyle/>
+          <a:p>
+            <a:pPr algn="l">
+              <a:spcAft>
+                <a:spcPts val="200"/>
+              </a:spcAft>
+            </a:pPr>
+            <a:r>
+              <a:rPr sz="3000" b="1" i="0">
+                <a:solidFill>
+                  <a:srgbClr val="0F172A"/>
+                </a:solidFill>
+                <a:latin typeface="Noto Sans Thai Looped"/>
+              </a:rPr>
+              <a:t>จาก Action สู่ Calculation</a:t>
+            </a:r>
+          </a:p>
+          <a:p>
+            <a:pPr algn="l">
+              <a:spcAft>
+                <a:spcPts val="600"/>
+              </a:spcAft>
+            </a:pPr>
+            <a:r>
+              <a:rPr sz="1500" b="0" i="0">
+                <a:solidFill>
+                  <a:srgbClr val="64748B"/>
+                </a:solidFill>
+                <a:latin typeface="Noto Sans Thai Looped"/>
+              </a:rPr>
+              <a:t>หัวใจของวันนี้ — แยก 'การคำนวณ' ออกจาก 'การทำลงโลกภายนอก'</a:t>
+            </a:r>
+          </a:p>
+        </p:txBody>
+      </p:sp>
+      <p:sp>
+        <p:nvSpPr>
+          <p:cNvPr id="3" name="Rectangle 2"/>
+          <p:cNvSpPr/>
+          <p:nvPr/>
+        </p:nvSpPr>
+        <p:spPr>
+          <a:xfrm>
+            <a:off x="502920" y="1207008"/>
+            <a:ext cx="11201400" cy="27940"/>
+          </a:xfrm>
+          <a:prstGeom prst="rect">
+            <a:avLst/>
+          </a:prstGeom>
+          <a:solidFill>
+            <a:srgbClr val="0D9488"/>
+          </a:solidFill>
+          <a:ln>
+            <a:noFill/>
+          </a:ln>
+        </p:spPr>
+        <p:style>
+          <a:lnRef idx="1">
+            <a:schemeClr val="accent1"/>
+          </a:lnRef>
+          <a:fillRef idx="3">
+            <a:schemeClr val="accent1"/>
+          </a:fillRef>
+          <a:effectRef idx="2">
+            <a:schemeClr val="accent1"/>
+          </a:effectRef>
+          <a:fontRef idx="minor">
+            <a:schemeClr val="lt1"/>
+          </a:fontRef>
+        </p:style>
+        <p:txBody>
+          <a:bodyPr rtlCol="0" anchor="ctr"/>
+          <a:lstStyle/>
+          <a:p>
+            <a:pPr algn="ctr"/>
+          </a:p>
+        </p:txBody>
+      </p:sp>
+      <p:sp>
+        <p:nvSpPr>
+          <p:cNvPr id="4" name="Rounded Rectangle 3"/>
           <p:cNvSpPr/>
           <p:nvPr/>
         </p:nvSpPr>
@@ -9797,7 +10815,7 @@
                 </a:solidFill>
                 <a:latin typeface="DejaVu Sans Mono"/>
               </a:rPr>
-              <a:t>// ❌ Action ปน Calculation</a:t>
+              <a:t>// ฟังก์ชันนี้ "คำนวณ" หรือ "ทำอะไรลงโลกภายนอก"?</a:t>
             </a:r>
           </a:p>
           <a:p>
@@ -9829,16 +10847,7 @@
                 </a:solidFill>
                 <a:latin typeface="DejaVu Sans Mono"/>
               </a:rPr>
-              <a:t>    fmt.Println("applying discount")   </a:t>
-            </a:r>
-            <a:r>
-              <a:rPr sz="1200" i="1">
-                <a:solidFill>
-                  <a:srgbClr val="94A3B8"/>
-                </a:solidFill>
-                <a:latin typeface="DejaVu Sans Mono"/>
-              </a:rPr>
-              <a:t>// side effect</a:t>
+              <a:t>    fmt.Println("applying discount")</a:t>
             </a:r>
           </a:p>
           <a:p>
@@ -9854,16 +10863,7 @@
                 </a:solidFill>
                 <a:latin typeface="DejaVu Sans Mono"/>
               </a:rPr>
-              <a:t>    cart.Total = cart.Total * 90 / 100 </a:t>
-            </a:r>
-            <a:r>
-              <a:rPr sz="1200" i="1">
-                <a:solidFill>
-                  <a:srgbClr val="94A3B8"/>
-                </a:solidFill>
-                <a:latin typeface="DejaVu Sans Mono"/>
-              </a:rPr>
-              <a:t>// mutate input</a:t>
+              <a:t>    cart.Total = cart.Total * 90 / 100</a:t>
             </a:r>
           </a:p>
           <a:p>
@@ -9902,14 +10902,14 @@
       </p:sp>
       <p:sp>
         <p:nvSpPr>
-          <p:cNvPr id="6" name="Rounded Rectangle 5"/>
+          <p:cNvPr id="5" name="Rounded Rectangle 4"/>
           <p:cNvSpPr/>
           <p:nvPr/>
         </p:nvSpPr>
         <p:spPr>
           <a:xfrm>
             <a:off x="548640" y="1380744"/>
-            <a:ext cx="969264" cy="274320"/>
+            <a:ext cx="868680" cy="274320"/>
           </a:xfrm>
           <a:prstGeom prst="roundRect">
             <a:avLst/>
@@ -9952,14 +10952,14 @@
                 </a:solidFill>
                 <a:latin typeface="Noto Sans Thai Looped"/>
               </a:rPr>
-              <a:t>❌ ก่อน</a:t>
-            </a:r>
-          </a:p>
-        </p:txBody>
-      </p:sp>
-      <p:sp>
-        <p:nvSpPr>
-          <p:cNvPr id="7" name="Rounded Rectangle 6"/>
+              <a:t>ปนกัน</a:t>
+            </a:r>
+          </a:p>
+        </p:txBody>
+      </p:sp>
+      <p:sp>
+        <p:nvSpPr>
+          <p:cNvPr id="6" name="Rounded Rectangle 5"/>
           <p:cNvSpPr/>
           <p:nvPr/>
         </p:nvSpPr>
@@ -10009,7 +11009,7 @@
                 </a:solidFill>
                 <a:latin typeface="DejaVu Sans Mono"/>
               </a:rPr>
-              <a:t>// ✅ Calculation — pure, ทดสอบง่าย</a:t>
+              <a:t>// คำนวณอย่างเดียว — input เดิม ได้ผลเดิมเสมอ</a:t>
             </a:r>
           </a:p>
           <a:p>
@@ -10080,7 +11080,7 @@
                 </a:solidFill>
                 <a:latin typeface="DejaVu Sans Mono"/>
               </a:rPr>
-              <a:t>// action บาง ๆ ทำหน้าที่แค่ "เกิดขึ้น"</a:t>
+              <a:t>// การ "ทำลงโลกภายนอก" แยกเป็นอีกฟังก์ชัน</a:t>
             </a:r>
           </a:p>
           <a:p>
@@ -10135,14 +11135,14 @@
       </p:sp>
       <p:sp>
         <p:nvSpPr>
-          <p:cNvPr id="8" name="Rounded Rectangle 7"/>
+          <p:cNvPr id="7" name="Rounded Rectangle 6"/>
           <p:cNvSpPr/>
           <p:nvPr/>
         </p:nvSpPr>
         <p:spPr>
           <a:xfrm>
             <a:off x="6263640" y="1380744"/>
-            <a:ext cx="969264" cy="274320"/>
+            <a:ext cx="1069848" cy="274320"/>
           </a:xfrm>
           <a:prstGeom prst="roundRect">
             <a:avLst/>
@@ -10185,7 +11185,62 @@
                 </a:solidFill>
                 <a:latin typeface="Noto Sans Thai Looped"/>
               </a:rPr>
-              <a:t>✅ หลัง</a:t>
+              <a:t>แยกแล้ว</a:t>
+            </a:r>
+          </a:p>
+        </p:txBody>
+      </p:sp>
+      <p:sp>
+        <p:nvSpPr>
+          <p:cNvPr id="8" name="TextBox 7"/>
+          <p:cNvSpPr txBox="1"/>
+          <p:nvPr/>
+        </p:nvSpPr>
+        <p:spPr>
+          <a:xfrm>
+            <a:off x="548640" y="4297680"/>
+            <a:ext cx="11064240" cy="4937760"/>
+          </a:xfrm>
+          <a:prstGeom prst="rect">
+            <a:avLst/>
+          </a:prstGeom>
+          <a:noFill/>
+        </p:spPr>
+        <p:txBody>
+          <a:bodyPr wrap="square">
+            <a:spAutoFit/>
+          </a:bodyPr>
+          <a:lstStyle/>
+          <a:p>
+            <a:pPr algn="l">
+              <a:spcAft>
+                <a:spcPts val="500"/>
+              </a:spcAft>
+            </a:pPr>
+            <a:r>
+              <a:rPr sz="1600" b="0" i="0">
+                <a:solidFill>
+                  <a:srgbClr val="0F172A"/>
+                </a:solidFill>
+                <a:latin typeface="Noto Sans Thai Looped"/>
+              </a:rPr>
+              <a:t>• Discounted เป็น calculation แท้: ไม่พิมพ์ ไม่แก้ input ไม่ถามเวลา</a:t>
+            </a:r>
+          </a:p>
+          <a:p>
+            <a:pPr algn="l">
+              <a:spcAft>
+                <a:spcPts val="500"/>
+              </a:spcAft>
+            </a:pPr>
+            <a:r>
+              <a:rPr sz="1600" b="0" i="0">
+                <a:solidFill>
+                  <a:srgbClr val="0F172A"/>
+                </a:solidFill>
+                <a:latin typeface="Noto Sans Thai Looped"/>
+              </a:rPr>
+              <a:t>• action ไม่หายไปไหน — ถูก 'ย้ายไปไว้ที่ขอบ' ของระบบ ตรงที่ต้องเกิดจริงเท่านั้น</a:t>
             </a:r>
           </a:p>
         </p:txBody>
@@ -10198,14 +11253,14 @@
         </p:nvSpPr>
         <p:spPr>
           <a:xfrm>
-            <a:off x="548640" y="4434840"/>
-            <a:ext cx="11109960" cy="2240280"/>
+            <a:off x="548640" y="5989320"/>
+            <a:ext cx="11109960" cy="566928"/>
           </a:xfrm>
           <a:prstGeom prst="roundRect">
             <a:avLst/>
           </a:prstGeom>
           <a:solidFill>
-            <a:srgbClr val="1E1E2E"/>
+            <a:srgbClr val="CCFBF1"/>
           </a:solidFill>
           <a:ln>
             <a:noFill/>
@@ -10227,239 +11282,22 @@
           </a:fontRef>
         </p:style>
         <p:txBody>
-          <a:bodyPr rtlCol="0" anchor="t" wrap="none" lIns="164592" rIns="109728" tIns="109728"/>
-          <a:lstStyle/>
-          <a:p>
-            <a:pPr algn="l">
-              <a:spcAft>
-                <a:spcPts val="0"/>
-              </a:spcAft>
-            </a:pPr>
-            <a:r>
-              <a:rPr sz="1100" i="0">
-                <a:solidFill>
-                  <a:srgbClr val="E2E8F0"/>
-                </a:solidFill>
-                <a:latin typeface="DejaVu Sans Mono"/>
-              </a:rPr>
-              <a:t>func TestDiscounted(t *testing.T) {</a:t>
-            </a:r>
-          </a:p>
-          <a:p>
-            <a:pPr algn="l">
-              <a:spcAft>
-                <a:spcPts val="0"/>
-              </a:spcAft>
-            </a:pPr>
-            <a:r>
-              <a:rPr sz="1100" i="0">
-                <a:solidFill>
-                  <a:srgbClr val="E2E8F0"/>
-                </a:solidFill>
-                <a:latin typeface="DejaVu Sans Mono"/>
-              </a:rPr>
-              <a:t>    tests := []struct{ in, want int }{</a:t>
-            </a:r>
-          </a:p>
-          <a:p>
-            <a:pPr algn="l">
-              <a:spcAft>
-                <a:spcPts val="0"/>
-              </a:spcAft>
-            </a:pPr>
-            <a:r>
-              <a:rPr sz="1100" i="0">
-                <a:solidFill>
-                  <a:srgbClr val="E2E8F0"/>
-                </a:solidFill>
-                <a:latin typeface="DejaVu Sans Mono"/>
-              </a:rPr>
-              <a:t>        {1000, 900}, {999, 999}, {0, 0},</a:t>
-            </a:r>
-          </a:p>
-          <a:p>
-            <a:pPr algn="l">
-              <a:spcAft>
-                <a:spcPts val="0"/>
-              </a:spcAft>
-            </a:pPr>
-            <a:r>
-              <a:rPr sz="1100" i="0">
-                <a:solidFill>
-                  <a:srgbClr val="E2E8F0"/>
-                </a:solidFill>
-                <a:latin typeface="DejaVu Sans Mono"/>
-              </a:rPr>
-              <a:t>    }</a:t>
-            </a:r>
-          </a:p>
-          <a:p>
-            <a:pPr algn="l">
-              <a:spcAft>
-                <a:spcPts val="0"/>
-              </a:spcAft>
-            </a:pPr>
-            <a:r>
-              <a:rPr sz="1100" i="0">
-                <a:solidFill>
-                  <a:srgbClr val="E2E8F0"/>
-                </a:solidFill>
-                <a:latin typeface="DejaVu Sans Mono"/>
-              </a:rPr>
-              <a:t>    for _, tt := range tests {</a:t>
-            </a:r>
-          </a:p>
-          <a:p>
-            <a:pPr algn="l">
-              <a:spcAft>
-                <a:spcPts val="0"/>
-              </a:spcAft>
-            </a:pPr>
-            <a:r>
-              <a:rPr sz="1100" i="0">
-                <a:solidFill>
-                  <a:srgbClr val="E2E8F0"/>
-                </a:solidFill>
-                <a:latin typeface="DejaVu Sans Mono"/>
-              </a:rPr>
-              <a:t>        if got := Discounted(tt.in); got != tt.want {</a:t>
-            </a:r>
-          </a:p>
-          <a:p>
-            <a:pPr algn="l">
-              <a:spcAft>
-                <a:spcPts val="0"/>
-              </a:spcAft>
-            </a:pPr>
-            <a:r>
-              <a:rPr sz="1100" i="0">
-                <a:solidFill>
-                  <a:srgbClr val="E2E8F0"/>
-                </a:solidFill>
-                <a:latin typeface="DejaVu Sans Mono"/>
-              </a:rPr>
-              <a:t>            t.Errorf("Discounted(%d) = %d; want %d",</a:t>
-            </a:r>
-          </a:p>
-          <a:p>
-            <a:pPr algn="l">
-              <a:spcAft>
-                <a:spcPts val="0"/>
-              </a:spcAft>
-            </a:pPr>
-            <a:r>
-              <a:rPr sz="1100" i="0">
-                <a:solidFill>
-                  <a:srgbClr val="E2E8F0"/>
-                </a:solidFill>
-                <a:latin typeface="DejaVu Sans Mono"/>
-              </a:rPr>
-              <a:t>                tt.in, got, tt.want)</a:t>
-            </a:r>
-          </a:p>
-          <a:p>
-            <a:pPr algn="l">
-              <a:spcAft>
-                <a:spcPts val="0"/>
-              </a:spcAft>
-            </a:pPr>
-            <a:r>
-              <a:rPr sz="1100" i="0">
-                <a:solidFill>
-                  <a:srgbClr val="E2E8F0"/>
-                </a:solidFill>
-                <a:latin typeface="DejaVu Sans Mono"/>
-              </a:rPr>
-              <a:t>        }</a:t>
-            </a:r>
-          </a:p>
-          <a:p>
-            <a:pPr algn="l">
-              <a:spcAft>
-                <a:spcPts val="0"/>
-              </a:spcAft>
-            </a:pPr>
-            <a:r>
-              <a:rPr sz="1100" i="0">
-                <a:solidFill>
-                  <a:srgbClr val="E2E8F0"/>
-                </a:solidFill>
-                <a:latin typeface="DejaVu Sans Mono"/>
-              </a:rPr>
-              <a:t>    }</a:t>
-            </a:r>
-          </a:p>
-          <a:p>
-            <a:pPr algn="l">
-              <a:spcAft>
-                <a:spcPts val="0"/>
-              </a:spcAft>
-            </a:pPr>
-            <a:r>
-              <a:rPr sz="1100" i="0">
-                <a:solidFill>
-                  <a:srgbClr val="E2E8F0"/>
-                </a:solidFill>
-                <a:latin typeface="DejaVu Sans Mono"/>
-              </a:rPr>
-              <a:t>}</a:t>
-            </a:r>
-          </a:p>
-        </p:txBody>
-      </p:sp>
-      <p:sp>
-        <p:nvSpPr>
-          <p:cNvPr id="10" name="Rounded Rectangle 9"/>
-          <p:cNvSpPr/>
-          <p:nvPr/>
-        </p:nvSpPr>
-        <p:spPr>
-          <a:xfrm>
-            <a:off x="548640" y="4123944"/>
-            <a:ext cx="5998464" cy="274320"/>
-          </a:xfrm>
-          <a:prstGeom prst="roundRect">
-            <a:avLst/>
-          </a:prstGeom>
-          <a:solidFill>
-            <a:srgbClr val="64748B"/>
-          </a:solidFill>
-          <a:ln>
-            <a:noFill/>
-          </a:ln>
-          <a:effectLst/>
-        </p:spPr>
-        <p:style>
-          <a:lnRef idx="1">
-            <a:schemeClr val="accent1"/>
-          </a:lnRef>
-          <a:fillRef idx="3">
-            <a:schemeClr val="accent1"/>
-          </a:fillRef>
-          <a:effectRef idx="2">
-            <a:schemeClr val="accent1"/>
-          </a:effectRef>
-          <a:fontRef idx="minor">
-            <a:schemeClr val="lt1"/>
-          </a:fontRef>
-        </p:style>
-        <p:txBody>
-          <a:bodyPr rtlCol="0" anchor="ctr" tIns="0" bIns="0"/>
-          <a:lstStyle/>
-          <a:p>
-            <a:pPr algn="l">
-              <a:spcAft>
-                <a:spcPts val="0"/>
-              </a:spcAft>
-            </a:pPr>
-            <a:r>
-              <a:rPr sz="1200" b="1" i="0">
-                <a:solidFill>
-                  <a:srgbClr val="FFFFFF"/>
+          <a:bodyPr rtlCol="0" anchor="ctr" tIns="54864" bIns="36576" wrap="square"/>
+          <a:lstStyle/>
+          <a:p>
+            <a:pPr algn="l">
+              <a:spcAft>
+                <a:spcPts val="0"/>
+              </a:spcAft>
+            </a:pPr>
+            <a:r>
+              <a:rPr sz="1500" b="1" i="0">
+                <a:solidFill>
+                  <a:srgbClr val="0F766E"/>
                 </a:solidFill>
                 <a:latin typeface="Noto Sans Thai Looped"/>
               </a:rPr>
-              <a:t>table-driven test — ไม่ต้อง mock, ไม่ต้อง capture stdout</a:t>
+              <a:t>จำไว้: แยกแล้วง่ายขึ้น: calculation เทสต์เองได้ · action เหลือบาง ๆ จุดเดียว</a:t>
             </a:r>
           </a:p>
         </p:txBody>
@@ -10472,7 +11310,7 @@
 </p:sld>
 </file>
 
-<file path=ppt/slides/slide6.xml><?xml version="1.0" encoding="utf-8"?>
+<file path=ppt/slides/slide7.xml><?xml version="1.0" encoding="utf-8"?>
 <p:sld xmlns:a="http://schemas.openxmlformats.org/drawingml/2006/main" xmlns:p="http://schemas.openxmlformats.org/presentationml/2006/main" xmlns:r="http://schemas.openxmlformats.org/officeDocument/2006/relationships">
   <p:cSld>
     <p:spTree>
@@ -10491,7 +11329,7 @@
         <p:spPr>
           <a:xfrm>
             <a:off x="502920" y="292608"/>
-            <a:ext cx="8778240" cy="914400"/>
+            <a:ext cx="11155680" cy="914400"/>
           </a:xfrm>
           <a:prstGeom prst="rect">
             <a:avLst/>
@@ -10516,104 +11354,14 @@
                 </a:solidFill>
                 <a:latin typeface="Noto Sans Thai Looped"/>
               </a:rPr>
-              <a:t>เครื่องมือของ Go (</a:t>
-            </a:r>
-            <a:r>
-              <a:rPr sz="3000" b="1" i="0">
-                <a:solidFill>
-                  <a:srgbClr val="0F172A"/>
-                </a:solidFill>
-                <a:latin typeface="Ubuntu"/>
-              </a:rPr>
-              <a:t>1</a:t>
-            </a:r>
-            <a:r>
-              <a:rPr sz="3000" b="1" i="0">
-                <a:solidFill>
-                  <a:srgbClr val="0F172A"/>
-                </a:solidFill>
-                <a:latin typeface="Noto Sans Thai Looped"/>
-              </a:rPr>
-              <a:t>): Higher-order + Closures</a:t>
-            </a:r>
-          </a:p>
-          <a:p>
-            <a:pPr algn="l">
-              <a:spcAft>
-                <a:spcPts val="600"/>
-              </a:spcAft>
-            </a:pPr>
-            <a:r>
-              <a:rPr sz="1400" b="0" i="0">
-                <a:solidFill>
-                  <a:srgbClr val="64748B"/>
-                </a:solidFill>
-                <a:latin typeface="Noto Sans Thai Looped"/>
-              </a:rPr>
-              <a:t>ฟังก์ชันเป็นค่าได้ — std lib ใช้เยอะแล้ว: sort.Slice, http.HandleFunc, context.WithCancel</a:t>
-            </a:r>
-          </a:p>
-        </p:txBody>
-      </p:sp>
-      <p:sp>
-        <p:nvSpPr>
-          <p:cNvPr id="3" name="Rounded Rectangle 2"/>
-          <p:cNvSpPr/>
-          <p:nvPr/>
-        </p:nvSpPr>
-        <p:spPr>
-          <a:xfrm>
-            <a:off x="10104120" y="384048"/>
-            <a:ext cx="1600200" cy="502920"/>
-          </a:xfrm>
-          <a:prstGeom prst="roundRect">
-            <a:avLst/>
-          </a:prstGeom>
-          <a:solidFill>
-            <a:srgbClr val="0D9488"/>
-          </a:solidFill>
-          <a:ln>
-            <a:noFill/>
-          </a:ln>
-        </p:spPr>
-        <p:style>
-          <a:lnRef idx="1">
-            <a:schemeClr val="accent1"/>
-          </a:lnRef>
-          <a:fillRef idx="3">
-            <a:schemeClr val="accent1"/>
-          </a:fillRef>
-          <a:effectRef idx="2">
-            <a:schemeClr val="accent1"/>
-          </a:effectRef>
-          <a:fontRef idx="minor">
-            <a:schemeClr val="lt1"/>
-          </a:fontRef>
-        </p:style>
-        <p:txBody>
-          <a:bodyPr rtlCol="0" anchor="ctr" wrap="none"/>
-          <a:lstStyle/>
-          <a:p>
-            <a:pPr algn="ctr">
-              <a:spcAft>
-                <a:spcPts val="0"/>
-              </a:spcAft>
-            </a:pPr>
-            <a:r>
-              <a:rPr sz="1400" b="1" i="0">
-                <a:solidFill>
-                  <a:srgbClr val="FFFFFF"/>
-                </a:solidFill>
-                <a:latin typeface="Ubuntu"/>
-              </a:rPr>
-              <a:t>0:40–1:05</a:t>
-            </a:r>
-          </a:p>
-        </p:txBody>
-      </p:sp>
-      <p:sp>
-        <p:nvSpPr>
-          <p:cNvPr id="4" name="Rectangle 3"/>
+              <a:t>ผลลัพธ์: ทดสอบได้โดยไม่ต้อง mock อะไรเลย</a:t>
+            </a:r>
+          </a:p>
+        </p:txBody>
+      </p:sp>
+      <p:sp>
+        <p:nvSpPr>
+          <p:cNvPr id="3" name="Rectangle 2"/>
           <p:cNvSpPr/>
           <p:nvPr/>
         </p:nvSpPr>
@@ -10656,14 +11404,14 @@
       </p:sp>
       <p:sp>
         <p:nvSpPr>
-          <p:cNvPr id="5" name="Rounded Rectangle 4"/>
+          <p:cNvPr id="4" name="Rounded Rectangle 3"/>
           <p:cNvSpPr/>
           <p:nvPr/>
         </p:nvSpPr>
         <p:spPr>
           <a:xfrm>
-            <a:off x="548640" y="1783080"/>
-            <a:ext cx="11109960" cy="3749039"/>
+            <a:off x="548640" y="1645920"/>
+            <a:ext cx="11109960" cy="3200400"/>
           </a:xfrm>
           <a:prstGeom prst="roundRect">
             <a:avLst/>
@@ -10700,29 +11448,13 @@
               </a:spcAft>
             </a:pPr>
             <a:r>
-              <a:rPr sz="1400" i="1">
-                <a:solidFill>
-                  <a:srgbClr val="94A3B8"/>
-                </a:solidFill>
-                <a:latin typeface="DejaVu Sans Mono"/>
-              </a:rPr>
-              <a:t>// currying ด้วย closure</a:t>
-            </a:r>
-          </a:p>
-          <a:p>
-            <a:pPr algn="l">
-              <a:spcAft>
-                <a:spcPts val="0"/>
-              </a:spcAft>
-            </a:pPr>
-            <a:r>
               <a:rPr sz="1400" i="0">
                 <a:solidFill>
                   <a:srgbClr val="E2E8F0"/>
                 </a:solidFill>
                 <a:latin typeface="DejaVu Sans Mono"/>
               </a:rPr>
-              <a:t>func Adder(a int) func(int) int {</a:t>
+              <a:t>func TestDiscounted(t *testing.T) {</a:t>
             </a:r>
           </a:p>
           <a:p>
@@ -10738,7 +11470,7 @@
                 </a:solidFill>
                 <a:latin typeface="DejaVu Sans Mono"/>
               </a:rPr>
-              <a:t>    return func(b int) int { return a + b }</a:t>
+              <a:t>    tests := []struct{ in, want int }{</a:t>
             </a:r>
           </a:p>
           <a:p>
@@ -10754,180 +11486,148 @@
                 </a:solidFill>
                 <a:latin typeface="DejaVu Sans Mono"/>
               </a:rPr>
+              <a:t>        {1000, 900}, {999, 999}, {0, 0},</a:t>
+            </a:r>
+          </a:p>
+          <a:p>
+            <a:pPr algn="l">
+              <a:spcAft>
+                <a:spcPts val="0"/>
+              </a:spcAft>
+            </a:pPr>
+            <a:r>
+              <a:rPr sz="1400" i="0">
+                <a:solidFill>
+                  <a:srgbClr val="E2E8F0"/>
+                </a:solidFill>
+                <a:latin typeface="DejaVu Sans Mono"/>
+              </a:rPr>
+              <a:t>    }</a:t>
+            </a:r>
+          </a:p>
+          <a:p>
+            <a:pPr algn="l">
+              <a:spcAft>
+                <a:spcPts val="0"/>
+              </a:spcAft>
+            </a:pPr>
+            <a:r>
+              <a:rPr sz="1400" i="0">
+                <a:solidFill>
+                  <a:srgbClr val="E2E8F0"/>
+                </a:solidFill>
+                <a:latin typeface="DejaVu Sans Mono"/>
+              </a:rPr>
+              <a:t>    for _, tt := range tests {</a:t>
+            </a:r>
+          </a:p>
+          <a:p>
+            <a:pPr algn="l">
+              <a:spcAft>
+                <a:spcPts val="0"/>
+              </a:spcAft>
+            </a:pPr>
+            <a:r>
+              <a:rPr sz="1400" i="0">
+                <a:solidFill>
+                  <a:srgbClr val="E2E8F0"/>
+                </a:solidFill>
+                <a:latin typeface="DejaVu Sans Mono"/>
+              </a:rPr>
+              <a:t>        if got := Discounted(tt.in); got != tt.want {</a:t>
+            </a:r>
+          </a:p>
+          <a:p>
+            <a:pPr algn="l">
+              <a:spcAft>
+                <a:spcPts val="0"/>
+              </a:spcAft>
+            </a:pPr>
+            <a:r>
+              <a:rPr sz="1400" i="0">
+                <a:solidFill>
+                  <a:srgbClr val="E2E8F0"/>
+                </a:solidFill>
+                <a:latin typeface="DejaVu Sans Mono"/>
+              </a:rPr>
+              <a:t>            t.Errorf("Discounted(%d) = %d; want %d",</a:t>
+            </a:r>
+          </a:p>
+          <a:p>
+            <a:pPr algn="l">
+              <a:spcAft>
+                <a:spcPts val="0"/>
+              </a:spcAft>
+            </a:pPr>
+            <a:r>
+              <a:rPr sz="1400" i="0">
+                <a:solidFill>
+                  <a:srgbClr val="E2E8F0"/>
+                </a:solidFill>
+                <a:latin typeface="DejaVu Sans Mono"/>
+              </a:rPr>
+              <a:t>                tt.in, got, tt.want)</a:t>
+            </a:r>
+          </a:p>
+          <a:p>
+            <a:pPr algn="l">
+              <a:spcAft>
+                <a:spcPts val="0"/>
+              </a:spcAft>
+            </a:pPr>
+            <a:r>
+              <a:rPr sz="1400" i="0">
+                <a:solidFill>
+                  <a:srgbClr val="E2E8F0"/>
+                </a:solidFill>
+                <a:latin typeface="DejaVu Sans Mono"/>
+              </a:rPr>
+              <a:t>        }</a:t>
+            </a:r>
+          </a:p>
+          <a:p>
+            <a:pPr algn="l">
+              <a:spcAft>
+                <a:spcPts val="0"/>
+              </a:spcAft>
+            </a:pPr>
+            <a:r>
+              <a:rPr sz="1400" i="0">
+                <a:solidFill>
+                  <a:srgbClr val="E2E8F0"/>
+                </a:solidFill>
+                <a:latin typeface="DejaVu Sans Mono"/>
+              </a:rPr>
+              <a:t>    }</a:t>
+            </a:r>
+          </a:p>
+          <a:p>
+            <a:pPr algn="l">
+              <a:spcAft>
+                <a:spcPts val="0"/>
+              </a:spcAft>
+            </a:pPr>
+            <a:r>
+              <a:rPr sz="1400" i="0">
+                <a:solidFill>
+                  <a:srgbClr val="E2E8F0"/>
+                </a:solidFill>
+                <a:latin typeface="DejaVu Sans Mono"/>
+              </a:rPr>
               <a:t>}</a:t>
             </a:r>
           </a:p>
-          <a:p>
-            <a:pPr algn="l">
-              <a:spcAft>
-                <a:spcPts val="0"/>
-              </a:spcAft>
-            </a:pPr>
-          </a:p>
-          <a:p>
-            <a:pPr algn="l">
-              <a:spcAft>
-                <a:spcPts val="0"/>
-              </a:spcAft>
-            </a:pPr>
-            <a:r>
-              <a:rPr sz="1400" i="0">
-                <a:solidFill>
-                  <a:srgbClr val="E2E8F0"/>
-                </a:solidFill>
-                <a:latin typeface="DejaVu Sans Mono"/>
-              </a:rPr>
-              <a:t>add10 := Adder(10)        </a:t>
-            </a:r>
-            <a:r>
-              <a:rPr sz="1400" i="1">
-                <a:solidFill>
-                  <a:srgbClr val="94A3B8"/>
-                </a:solidFill>
-                <a:latin typeface="DejaVu Sans Mono"/>
-              </a:rPr>
-              <a:t>// เก็บ "ครึ่งการคำนวณ" ไว้ก่อน</a:t>
-            </a:r>
-          </a:p>
-          <a:p>
-            <a:pPr algn="l">
-              <a:spcAft>
-                <a:spcPts val="0"/>
-              </a:spcAft>
-            </a:pPr>
-            <a:r>
-              <a:rPr sz="1400" i="0">
-                <a:solidFill>
-                  <a:srgbClr val="E2E8F0"/>
-                </a:solidFill>
-                <a:latin typeface="DejaVu Sans Mono"/>
-              </a:rPr>
-              <a:t>add10(5)                  </a:t>
-            </a:r>
-            <a:r>
-              <a:rPr sz="1400" i="1">
-                <a:solidFill>
-                  <a:srgbClr val="94A3B8"/>
-                </a:solidFill>
-                <a:latin typeface="DejaVu Sans Mono"/>
-              </a:rPr>
-              <a:t>// == 15</a:t>
-            </a:r>
-          </a:p>
-          <a:p>
-            <a:pPr algn="l">
-              <a:spcAft>
-                <a:spcPts val="0"/>
-              </a:spcAft>
-            </a:pPr>
-          </a:p>
-          <a:p>
-            <a:pPr algn="l">
-              <a:spcAft>
-                <a:spcPts val="0"/>
-              </a:spcAft>
-            </a:pPr>
-            <a:r>
-              <a:rPr sz="1400" i="1">
-                <a:solidFill>
-                  <a:srgbClr val="94A3B8"/>
-                </a:solidFill>
-                <a:latin typeface="DejaVu Sans Mono"/>
-              </a:rPr>
-              <a:t>// generic curry 2 พารามิเตอร์</a:t>
-            </a:r>
-          </a:p>
-          <a:p>
-            <a:pPr algn="l">
-              <a:spcAft>
-                <a:spcPts val="0"/>
-              </a:spcAft>
-            </a:pPr>
-            <a:r>
-              <a:rPr sz="1400" i="0">
-                <a:solidFill>
-                  <a:srgbClr val="E2E8F0"/>
-                </a:solidFill>
-                <a:latin typeface="DejaVu Sans Mono"/>
-              </a:rPr>
-              <a:t>func Curry2[A, B, R any](f func(A, B) R) func(A) func(B) R {</a:t>
-            </a:r>
-          </a:p>
-          <a:p>
-            <a:pPr algn="l">
-              <a:spcAft>
-                <a:spcPts val="0"/>
-              </a:spcAft>
-            </a:pPr>
-            <a:r>
-              <a:rPr sz="1400" i="0">
-                <a:solidFill>
-                  <a:srgbClr val="E2E8F0"/>
-                </a:solidFill>
-                <a:latin typeface="DejaVu Sans Mono"/>
-              </a:rPr>
-              <a:t>    return func(a A) func(B) R {</a:t>
-            </a:r>
-          </a:p>
-          <a:p>
-            <a:pPr algn="l">
-              <a:spcAft>
-                <a:spcPts val="0"/>
-              </a:spcAft>
-            </a:pPr>
-            <a:r>
-              <a:rPr sz="1400" i="0">
-                <a:solidFill>
-                  <a:srgbClr val="E2E8F0"/>
-                </a:solidFill>
-                <a:latin typeface="DejaVu Sans Mono"/>
-              </a:rPr>
-              <a:t>        return func(b B) R { return f(a, b) }</a:t>
-            </a:r>
-          </a:p>
-          <a:p>
-            <a:pPr algn="l">
-              <a:spcAft>
-                <a:spcPts val="0"/>
-              </a:spcAft>
-            </a:pPr>
-            <a:r>
-              <a:rPr sz="1400" i="0">
-                <a:solidFill>
-                  <a:srgbClr val="E2E8F0"/>
-                </a:solidFill>
-                <a:latin typeface="DejaVu Sans Mono"/>
-              </a:rPr>
-              <a:t>    }</a:t>
-            </a:r>
-          </a:p>
-          <a:p>
-            <a:pPr algn="l">
-              <a:spcAft>
-                <a:spcPts val="0"/>
-              </a:spcAft>
-            </a:pPr>
-            <a:r>
-              <a:rPr sz="1400" i="0">
-                <a:solidFill>
-                  <a:srgbClr val="E2E8F0"/>
-                </a:solidFill>
-                <a:latin typeface="DejaVu Sans Mono"/>
-              </a:rPr>
-              <a:t>}</a:t>
-            </a:r>
-          </a:p>
-        </p:txBody>
-      </p:sp>
-      <p:sp>
-        <p:nvSpPr>
-          <p:cNvPr id="6" name="TextBox 5"/>
+        </p:txBody>
+      </p:sp>
+      <p:sp>
+        <p:nvSpPr>
+          <p:cNvPr id="5" name="TextBox 4"/>
           <p:cNvSpPr txBox="1"/>
           <p:nvPr/>
         </p:nvSpPr>
         <p:spPr>
           <a:xfrm>
-            <a:off x="548640" y="5669280"/>
+            <a:off x="548640" y="5074920"/>
             <a:ext cx="11064240" cy="4937760"/>
           </a:xfrm>
           <a:prstGeom prst="rect">
@@ -10943,132 +11643,58 @@
           <a:p>
             <a:pPr algn="l">
               <a:spcAft>
-                <a:spcPts val="800"/>
-              </a:spcAft>
-            </a:pPr>
-            <a:r>
-              <a:rPr sz="1500" b="0" i="0">
+                <a:spcPts val="500"/>
+              </a:spcAft>
+            </a:pPr>
+            <a:r>
+              <a:rPr sz="1600" b="0" i="0">
                 <a:solidFill>
                   <a:srgbClr val="0F172A"/>
                 </a:solidFill>
                 <a:latin typeface="Noto Sans Thai Looped"/>
               </a:rPr>
-              <a:t>• closure = ฟังก์ชันที่จำบริบทตอนถูกสร้าง → นี่คือวิธี Go ทำ partial application</a:t>
-            </a:r>
-          </a:p>
-          <a:p>
-            <a:pPr algn="l">
-              <a:spcAft>
-                <a:spcPts val="800"/>
-              </a:spcAft>
-            </a:pPr>
-            <a:r>
-              <a:rPr sz="1500" b="0" i="0">
+              <a:t>• เทียบกับตอนก่อน: เทสต์ ApplyDiscount ต้องจับ stdout + เช็คว่า input โดนแก้ — เทสต์กลายเป็นงานโบราณคดี</a:t>
+            </a:r>
+          </a:p>
+          <a:p>
+            <a:pPr algn="l">
+              <a:spcAft>
+                <a:spcPts val="500"/>
+              </a:spcAft>
+            </a:pPr>
+            <a:r>
+              <a:rPr sz="1600" b="0" i="0">
                 <a:solidFill>
                   <a:srgbClr val="0F172A"/>
                 </a:solidFill>
                 <a:latin typeface="Noto Sans Thai Looped"/>
               </a:rPr>
-              <a:t>• แต่ระวัง: closure จับ 'ตัวแปร' ไม่ใช่ 'ค่า' → เจอเรื่องในสไลด์ถัดไป</a:t>
-            </a:r>
-          </a:p>
-        </p:txBody>
-      </p:sp>
-    </p:spTree>
-  </p:cSld>
-  <p:clrMapOvr>
-    <a:masterClrMapping/>
-  </p:clrMapOvr>
-</p:sld>
-</file>
-
-<file path=ppt/slides/slide7.xml><?xml version="1.0" encoding="utf-8"?>
-<p:sld xmlns:a="http://schemas.openxmlformats.org/drawingml/2006/main" xmlns:p="http://schemas.openxmlformats.org/presentationml/2006/main" xmlns:r="http://schemas.openxmlformats.org/officeDocument/2006/relationships">
-  <p:cSld>
-    <p:spTree>
-      <p:nvGrpSpPr>
-        <p:cNvPr id="1" name=""/>
-        <p:cNvGrpSpPr/>
-        <p:nvPr/>
-      </p:nvGrpSpPr>
-      <p:grpSpPr/>
-      <p:sp>
-        <p:nvSpPr>
-          <p:cNvPr id="2" name="TextBox 1"/>
-          <p:cNvSpPr txBox="1"/>
+              <a:t>• calculation ที่ pure = เทสต์เป็นตาราง input → output ได้เลย — กติกาธุรกิจทั้งหมดอยู่ตรงนี้</a:t>
+            </a:r>
+          </a:p>
+        </p:txBody>
+      </p:sp>
+      <p:sp>
+        <p:nvSpPr>
+          <p:cNvPr id="6" name="Rounded Rectangle 5"/>
+          <p:cNvSpPr/>
           <p:nvPr/>
         </p:nvSpPr>
         <p:spPr>
           <a:xfrm>
-            <a:off x="502920" y="292608"/>
-            <a:ext cx="8778240" cy="914400"/>
-          </a:xfrm>
-          <a:prstGeom prst="rect">
-            <a:avLst/>
-          </a:prstGeom>
-          <a:noFill/>
-        </p:spPr>
-        <p:txBody>
-          <a:bodyPr wrap="square">
-            <a:spAutoFit/>
-          </a:bodyPr>
-          <a:lstStyle/>
-          <a:p>
-            <a:pPr algn="l">
-              <a:spcAft>
-                <a:spcPts val="200"/>
-              </a:spcAft>
-            </a:pPr>
-            <a:r>
-              <a:rPr sz="3000" b="1" i="0">
-                <a:solidFill>
-                  <a:srgbClr val="0F172A"/>
-                </a:solidFill>
-                <a:latin typeface="Noto Sans Thai Looped"/>
-              </a:rPr>
-              <a:t>Pitfall ที่ต้องรู้: loop variable (ก่อน Go </a:t>
-            </a:r>
-            <a:r>
-              <a:rPr sz="3000" b="1" i="0">
-                <a:solidFill>
-                  <a:srgbClr val="0F172A"/>
-                </a:solidFill>
-                <a:latin typeface="Ubuntu"/>
-              </a:rPr>
-              <a:t>1.22</a:t>
-            </a:r>
-            <a:r>
-              <a:rPr sz="3000" b="1" i="0">
-                <a:solidFill>
-                  <a:srgbClr val="0F172A"/>
-                </a:solidFill>
-                <a:latin typeface="Noto Sans Thai Looped"/>
-              </a:rPr>
-              <a:t>)</a:t>
-            </a:r>
-          </a:p>
-        </p:txBody>
-      </p:sp>
-      <p:sp>
-        <p:nvSpPr>
-          <p:cNvPr id="3" name="Rounded Rectangle 2"/>
-          <p:cNvSpPr/>
-          <p:nvPr/>
-        </p:nvSpPr>
-        <p:spPr>
-          <a:xfrm>
-            <a:off x="10104120" y="384048"/>
-            <a:ext cx="1600200" cy="502920"/>
+            <a:off x="548640" y="5989320"/>
+            <a:ext cx="11109960" cy="566928"/>
           </a:xfrm>
           <a:prstGeom prst="roundRect">
             <a:avLst/>
           </a:prstGeom>
           <a:solidFill>
-            <a:srgbClr val="0D9488"/>
+            <a:srgbClr val="CCFBF1"/>
           </a:solidFill>
           <a:ln>
             <a:noFill/>
           </a:ln>
+          <a:effectLst/>
         </p:spPr>
         <p:style>
           <a:lnRef idx="1">
@@ -11085,29 +11711,120 @@
           </a:fontRef>
         </p:style>
         <p:txBody>
-          <a:bodyPr rtlCol="0" anchor="ctr" wrap="none"/>
-          <a:lstStyle/>
-          <a:p>
-            <a:pPr algn="ctr">
-              <a:spcAft>
-                <a:spcPts val="0"/>
-              </a:spcAft>
-            </a:pPr>
-            <a:r>
-              <a:rPr sz="1400" b="1" i="0">
-                <a:solidFill>
-                  <a:srgbClr val="FFFFFF"/>
+          <a:bodyPr rtlCol="0" anchor="ctr" tIns="54864" bIns="36576" wrap="square"/>
+          <a:lstStyle/>
+          <a:p>
+            <a:pPr algn="l">
+              <a:spcAft>
+                <a:spcPts val="0"/>
+              </a:spcAft>
+            </a:pPr>
+            <a:r>
+              <a:rPr sz="1500" b="1" i="0">
+                <a:solidFill>
+                  <a:srgbClr val="0F766E"/>
+                </a:solidFill>
+                <a:latin typeface="Noto Sans Thai Looped"/>
+              </a:rPr>
+              <a:t>จำไว้: อยากรู้ว่าโค้ดส่วนไหน 'ควรแยก' — ดูว่าการเทสต์มันต้อง mock อะไร ยิ่งเยอะ ยิ่งแปลว่า action ปนอยู่</a:t>
+            </a:r>
+          </a:p>
+        </p:txBody>
+      </p:sp>
+    </p:spTree>
+  </p:cSld>
+  <p:clrMapOvr>
+    <a:masterClrMapping/>
+  </p:clrMapOvr>
+</p:sld>
+</file>
+
+<file path=ppt/slides/slide8.xml><?xml version="1.0" encoding="utf-8"?>
+<p:sld xmlns:a="http://schemas.openxmlformats.org/drawingml/2006/main" xmlns:p="http://schemas.openxmlformats.org/presentationml/2006/main" xmlns:r="http://schemas.openxmlformats.org/officeDocument/2006/relationships">
+  <p:cSld>
+    <p:spTree>
+      <p:nvGrpSpPr>
+        <p:cNvPr id="1" name=""/>
+        <p:cNvGrpSpPr/>
+        <p:nvPr/>
+      </p:nvGrpSpPr>
+      <p:grpSpPr/>
+      <p:sp>
+        <p:nvSpPr>
+          <p:cNvPr id="2" name="TextBox 1"/>
+          <p:cNvSpPr txBox="1"/>
+          <p:nvPr/>
+        </p:nvSpPr>
+        <p:spPr>
+          <a:xfrm>
+            <a:off x="502920" y="292608"/>
+            <a:ext cx="11155680" cy="914400"/>
+          </a:xfrm>
+          <a:prstGeom prst="rect">
+            <a:avLst/>
+          </a:prstGeom>
+          <a:noFill/>
+        </p:spPr>
+        <p:txBody>
+          <a:bodyPr wrap="square">
+            <a:spAutoFit/>
+          </a:bodyPr>
+          <a:lstStyle/>
+          <a:p>
+            <a:pPr algn="l">
+              <a:spcAft>
+                <a:spcPts val="200"/>
+              </a:spcAft>
+            </a:pPr>
+            <a:r>
+              <a:rPr sz="3000" b="1" i="0">
+                <a:solidFill>
+                  <a:srgbClr val="0F172A"/>
+                </a:solidFill>
+                <a:latin typeface="Noto Sans Thai Looped"/>
+              </a:rPr>
+              <a:t>เครื่องมือ </a:t>
+            </a:r>
+            <a:r>
+              <a:rPr sz="3000" b="1" i="0">
+                <a:solidFill>
+                  <a:srgbClr val="0F172A"/>
                 </a:solidFill>
                 <a:latin typeface="Ubuntu"/>
               </a:rPr>
-              <a:t>0:40–1:05</a:t>
-            </a:r>
-          </a:p>
-        </p:txBody>
-      </p:sp>
-      <p:sp>
-        <p:nvSpPr>
-          <p:cNvPr id="4" name="Rectangle 3"/>
+              <a:t>1:</a:t>
+            </a:r>
+            <a:r>
+              <a:rPr sz="3000" b="1" i="0">
+                <a:solidFill>
+                  <a:srgbClr val="0F172A"/>
+                </a:solidFill>
+                <a:latin typeface="Noto Sans Thai Looped"/>
+              </a:rPr>
+              <a:t> ฟังก์ชันเป็นค่า (Higher-order Functions + Closures)</a:t>
+            </a:r>
+          </a:p>
+          <a:p>
+            <a:pPr algn="l">
+              <a:spcAft>
+                <a:spcPts val="600"/>
+              </a:spcAft>
+            </a:pPr>
+            <a:r>
+              <a:rPr sz="1500" b="0" i="0">
+                <a:solidFill>
+                  <a:srgbClr val="64748B"/>
+                </a:solidFill>
+                <a:latin typeface="Noto Sans Thai Looped"/>
+              </a:rPr>
+              <a:t>Go ส่งฟังก์ชันเป็น argument / คืนฟังก์ชันได้เต็มรูปแบบ — std lib ใช้เยอะแล้ว: sort.Slice, http.HandleFunc</a:t>
+            </a:r>
+          </a:p>
+        </p:txBody>
+      </p:sp>
+      <p:sp>
+        <p:nvSpPr>
+          <p:cNvPr id="3" name="Rectangle 2"/>
           <p:cNvSpPr/>
           <p:nvPr/>
         </p:nvSpPr>
@@ -11150,7 +11867,454 @@
       </p:sp>
       <p:sp>
         <p:nvSpPr>
+          <p:cNvPr id="4" name="Rounded Rectangle 3"/>
+          <p:cNvSpPr/>
+          <p:nvPr/>
+        </p:nvSpPr>
+        <p:spPr>
+          <a:xfrm>
+            <a:off x="548640" y="1874519"/>
+            <a:ext cx="11109960" cy="3657600"/>
+          </a:xfrm>
+          <a:prstGeom prst="roundRect">
+            <a:avLst/>
+          </a:prstGeom>
+          <a:solidFill>
+            <a:srgbClr val="1E1E2E"/>
+          </a:solidFill>
+          <a:ln>
+            <a:noFill/>
+          </a:ln>
+          <a:effectLst/>
+        </p:spPr>
+        <p:style>
+          <a:lnRef idx="1">
+            <a:schemeClr val="accent1"/>
+          </a:lnRef>
+          <a:fillRef idx="3">
+            <a:schemeClr val="accent1"/>
+          </a:fillRef>
+          <a:effectRef idx="2">
+            <a:schemeClr val="accent1"/>
+          </a:effectRef>
+          <a:fontRef idx="minor">
+            <a:schemeClr val="lt1"/>
+          </a:fontRef>
+        </p:style>
+        <p:txBody>
+          <a:bodyPr rtlCol="0" anchor="t" wrap="none" lIns="164592" rIns="109728" tIns="109728"/>
+          <a:lstStyle/>
+          <a:p>
+            <a:pPr algn="l">
+              <a:spcAft>
+                <a:spcPts val="0"/>
+              </a:spcAft>
+            </a:pPr>
+            <a:r>
+              <a:rPr sz="1400" i="1">
+                <a:solidFill>
+                  <a:srgbClr val="94A3B8"/>
+                </a:solidFill>
+                <a:latin typeface="DejaVu Sans Mono"/>
+              </a:rPr>
+              <a:t>// ฟังก์ชันคืนฟังก์ชันได้ — "เก็บครึ่งการคำนวณ" ไว้ก่อน</a:t>
+            </a:r>
+          </a:p>
+          <a:p>
+            <a:pPr algn="l">
+              <a:spcAft>
+                <a:spcPts val="0"/>
+              </a:spcAft>
+            </a:pPr>
+            <a:r>
+              <a:rPr sz="1400" i="0">
+                <a:solidFill>
+                  <a:srgbClr val="E2E8F0"/>
+                </a:solidFill>
+                <a:latin typeface="DejaVu Sans Mono"/>
+              </a:rPr>
+              <a:t>func Adder(a int) func(int) int {</a:t>
+            </a:r>
+          </a:p>
+          <a:p>
+            <a:pPr algn="l">
+              <a:spcAft>
+                <a:spcPts val="0"/>
+              </a:spcAft>
+            </a:pPr>
+            <a:r>
+              <a:rPr sz="1400" i="0">
+                <a:solidFill>
+                  <a:srgbClr val="E2E8F0"/>
+                </a:solidFill>
+                <a:latin typeface="DejaVu Sans Mono"/>
+              </a:rPr>
+              <a:t>    return func(b int) int { return a + b }</a:t>
+            </a:r>
+          </a:p>
+          <a:p>
+            <a:pPr algn="l">
+              <a:spcAft>
+                <a:spcPts val="0"/>
+              </a:spcAft>
+            </a:pPr>
+            <a:r>
+              <a:rPr sz="1400" i="0">
+                <a:solidFill>
+                  <a:srgbClr val="E2E8F0"/>
+                </a:solidFill>
+                <a:latin typeface="DejaVu Sans Mono"/>
+              </a:rPr>
+              <a:t>}</a:t>
+            </a:r>
+          </a:p>
+          <a:p>
+            <a:pPr algn="l">
+              <a:spcAft>
+                <a:spcPts val="0"/>
+              </a:spcAft>
+            </a:pPr>
+          </a:p>
+          <a:p>
+            <a:pPr algn="l">
+              <a:spcAft>
+                <a:spcPts val="0"/>
+              </a:spcAft>
+            </a:pPr>
+            <a:r>
+              <a:rPr sz="1400" i="0">
+                <a:solidFill>
+                  <a:srgbClr val="E2E8F0"/>
+                </a:solidFill>
+                <a:latin typeface="DejaVu Sans Mono"/>
+              </a:rPr>
+              <a:t>add10 := Adder(10)</a:t>
+            </a:r>
+          </a:p>
+          <a:p>
+            <a:pPr algn="l">
+              <a:spcAft>
+                <a:spcPts val="0"/>
+              </a:spcAft>
+            </a:pPr>
+            <a:r>
+              <a:rPr sz="1400" i="0">
+                <a:solidFill>
+                  <a:srgbClr val="E2E8F0"/>
+                </a:solidFill>
+                <a:latin typeface="DejaVu Sans Mono"/>
+              </a:rPr>
+              <a:t>add10(5) </a:t>
+            </a:r>
+            <a:r>
+              <a:rPr sz="1400" i="1">
+                <a:solidFill>
+                  <a:srgbClr val="94A3B8"/>
+                </a:solidFill>
+                <a:latin typeface="DejaVu Sans Mono"/>
+              </a:rPr>
+              <a:t>// == 15</a:t>
+            </a:r>
+          </a:p>
+          <a:p>
+            <a:pPr algn="l">
+              <a:spcAft>
+                <a:spcPts val="0"/>
+              </a:spcAft>
+            </a:pPr>
+          </a:p>
+          <a:p>
+            <a:pPr algn="l">
+              <a:spcAft>
+                <a:spcPts val="0"/>
+              </a:spcAft>
+            </a:pPr>
+            <a:r>
+              <a:rPr sz="1400" i="1">
+                <a:solidFill>
+                  <a:srgbClr val="94A3B8"/>
+                </a:solidFill>
+                <a:latin typeface="DejaVu Sans Mono"/>
+              </a:rPr>
+              <a:t>// generic: curry ฟังก์ชัน 2 พารามิเตอร์</a:t>
+            </a:r>
+          </a:p>
+          <a:p>
+            <a:pPr algn="l">
+              <a:spcAft>
+                <a:spcPts val="0"/>
+              </a:spcAft>
+            </a:pPr>
+            <a:r>
+              <a:rPr sz="1400" i="0">
+                <a:solidFill>
+                  <a:srgbClr val="E2E8F0"/>
+                </a:solidFill>
+                <a:latin typeface="DejaVu Sans Mono"/>
+              </a:rPr>
+              <a:t>func Curry2[A, B, R any](f func(A, B) R) func(A) func(B) R {</a:t>
+            </a:r>
+          </a:p>
+          <a:p>
+            <a:pPr algn="l">
+              <a:spcAft>
+                <a:spcPts val="0"/>
+              </a:spcAft>
+            </a:pPr>
+            <a:r>
+              <a:rPr sz="1400" i="0">
+                <a:solidFill>
+                  <a:srgbClr val="E2E8F0"/>
+                </a:solidFill>
+                <a:latin typeface="DejaVu Sans Mono"/>
+              </a:rPr>
+              <a:t>    return func(a A) func(B) R {</a:t>
+            </a:r>
+          </a:p>
+          <a:p>
+            <a:pPr algn="l">
+              <a:spcAft>
+                <a:spcPts val="0"/>
+              </a:spcAft>
+            </a:pPr>
+            <a:r>
+              <a:rPr sz="1400" i="0">
+                <a:solidFill>
+                  <a:srgbClr val="E2E8F0"/>
+                </a:solidFill>
+                <a:latin typeface="DejaVu Sans Mono"/>
+              </a:rPr>
+              <a:t>        return func(b B) R { return f(a, b) }</a:t>
+            </a:r>
+          </a:p>
+          <a:p>
+            <a:pPr algn="l">
+              <a:spcAft>
+                <a:spcPts val="0"/>
+              </a:spcAft>
+            </a:pPr>
+            <a:r>
+              <a:rPr sz="1400" i="0">
+                <a:solidFill>
+                  <a:srgbClr val="E2E8F0"/>
+                </a:solidFill>
+                <a:latin typeface="DejaVu Sans Mono"/>
+              </a:rPr>
+              <a:t>    }</a:t>
+            </a:r>
+          </a:p>
+          <a:p>
+            <a:pPr algn="l">
+              <a:spcAft>
+                <a:spcPts val="0"/>
+              </a:spcAft>
+            </a:pPr>
+            <a:r>
+              <a:rPr sz="1400" i="0">
+                <a:solidFill>
+                  <a:srgbClr val="E2E8F0"/>
+                </a:solidFill>
+                <a:latin typeface="DejaVu Sans Mono"/>
+              </a:rPr>
+              <a:t>}</a:t>
+            </a:r>
+          </a:p>
+        </p:txBody>
+      </p:sp>
+      <p:sp>
+        <p:nvSpPr>
           <p:cNvPr id="5" name="Rounded Rectangle 4"/>
+          <p:cNvSpPr/>
+          <p:nvPr/>
+        </p:nvSpPr>
+        <p:spPr>
+          <a:xfrm>
+            <a:off x="548640" y="5989320"/>
+            <a:ext cx="11109960" cy="566928"/>
+          </a:xfrm>
+          <a:prstGeom prst="roundRect">
+            <a:avLst/>
+          </a:prstGeom>
+          <a:solidFill>
+            <a:srgbClr val="CCFBF1"/>
+          </a:solidFill>
+          <a:ln>
+            <a:noFill/>
+          </a:ln>
+          <a:effectLst/>
+        </p:spPr>
+        <p:style>
+          <a:lnRef idx="1">
+            <a:schemeClr val="accent1"/>
+          </a:lnRef>
+          <a:fillRef idx="3">
+            <a:schemeClr val="accent1"/>
+          </a:fillRef>
+          <a:effectRef idx="2">
+            <a:schemeClr val="accent1"/>
+          </a:effectRef>
+          <a:fontRef idx="minor">
+            <a:schemeClr val="lt1"/>
+          </a:fontRef>
+        </p:style>
+        <p:txBody>
+          <a:bodyPr rtlCol="0" anchor="ctr" tIns="54864" bIns="36576" wrap="square"/>
+          <a:lstStyle/>
+          <a:p>
+            <a:pPr algn="l">
+              <a:spcAft>
+                <a:spcPts val="0"/>
+              </a:spcAft>
+            </a:pPr>
+            <a:r>
+              <a:rPr sz="1500" b="1" i="0">
+                <a:solidFill>
+                  <a:srgbClr val="0F766E"/>
+                </a:solidFill>
+                <a:latin typeface="Noto Sans Thai Looped"/>
+              </a:rPr>
+              <a:t>จำไว้: closure จำบริบทตอนถูกสร้าง → นี่คือวิธี Go ทำ partial application (verbose กว่าภาษา ML ชัดเจน — และนี่คือเหตุผลที่ Go ไม่มี pipe operator)</a:t>
+            </a:r>
+          </a:p>
+        </p:txBody>
+      </p:sp>
+    </p:spTree>
+  </p:cSld>
+  <p:clrMapOvr>
+    <a:masterClrMapping/>
+  </p:clrMapOvr>
+</p:sld>
+</file>
+
+<file path=ppt/slides/slide9.xml><?xml version="1.0" encoding="utf-8"?>
+<p:sld xmlns:a="http://schemas.openxmlformats.org/drawingml/2006/main" xmlns:p="http://schemas.openxmlformats.org/presentationml/2006/main" xmlns:r="http://schemas.openxmlformats.org/officeDocument/2006/relationships">
+  <p:cSld>
+    <p:spTree>
+      <p:nvGrpSpPr>
+        <p:cNvPr id="1" name=""/>
+        <p:cNvGrpSpPr/>
+        <p:nvPr/>
+      </p:nvGrpSpPr>
+      <p:grpSpPr/>
+      <p:sp>
+        <p:nvSpPr>
+          <p:cNvPr id="2" name="TextBox 1"/>
+          <p:cNvSpPr txBox="1"/>
+          <p:nvPr/>
+        </p:nvSpPr>
+        <p:spPr>
+          <a:xfrm>
+            <a:off x="502920" y="292608"/>
+            <a:ext cx="11155680" cy="914400"/>
+          </a:xfrm>
+          <a:prstGeom prst="rect">
+            <a:avLst/>
+          </a:prstGeom>
+          <a:noFill/>
+        </p:spPr>
+        <p:txBody>
+          <a:bodyPr wrap="square">
+            <a:spAutoFit/>
+          </a:bodyPr>
+          <a:lstStyle/>
+          <a:p>
+            <a:pPr algn="l">
+              <a:spcAft>
+                <a:spcPts val="200"/>
+              </a:spcAft>
+            </a:pPr>
+            <a:r>
+              <a:rPr sz="3000" b="1" i="0">
+                <a:solidFill>
+                  <a:srgbClr val="0F172A"/>
+                </a:solidFill>
+                <a:latin typeface="Noto Sans Thai Looped"/>
+              </a:rPr>
+              <a:t>กับดักของ closure: loop variable</a:t>
+            </a:r>
+          </a:p>
+          <a:p>
+            <a:pPr algn="l">
+              <a:spcAft>
+                <a:spcPts val="600"/>
+              </a:spcAft>
+            </a:pPr>
+            <a:r>
+              <a:rPr sz="1500" b="0" i="0">
+                <a:solidFill>
+                  <a:srgbClr val="64748B"/>
+                </a:solidFill>
+                <a:latin typeface="Noto Sans Thai Looped"/>
+              </a:rPr>
+              <a:t>closure จับ 'ตัวแปร' ไม่ใช่ 'ค่า' — เว้นแต่ Go </a:t>
+            </a:r>
+            <a:r>
+              <a:rPr sz="1500" b="0" i="0">
+                <a:solidFill>
+                  <a:srgbClr val="64748B"/>
+                </a:solidFill>
+                <a:latin typeface="Ubuntu"/>
+              </a:rPr>
+              <a:t>1.22</a:t>
+            </a:r>
+            <a:r>
+              <a:rPr sz="1500" b="0" i="0">
+                <a:solidFill>
+                  <a:srgbClr val="64748B"/>
+                </a:solidFill>
+                <a:latin typeface="Noto Sans Thai Looped"/>
+              </a:rPr>
+              <a:t> เป็นต้นไป</a:t>
+            </a:r>
+          </a:p>
+        </p:txBody>
+      </p:sp>
+      <p:sp>
+        <p:nvSpPr>
+          <p:cNvPr id="3" name="Rectangle 2"/>
+          <p:cNvSpPr/>
+          <p:nvPr/>
+        </p:nvSpPr>
+        <p:spPr>
+          <a:xfrm>
+            <a:off x="502920" y="1207008"/>
+            <a:ext cx="11201400" cy="27940"/>
+          </a:xfrm>
+          <a:prstGeom prst="rect">
+            <a:avLst/>
+          </a:prstGeom>
+          <a:solidFill>
+            <a:srgbClr val="0D9488"/>
+          </a:solidFill>
+          <a:ln>
+            <a:noFill/>
+          </a:ln>
+        </p:spPr>
+        <p:style>
+          <a:lnRef idx="1">
+            <a:schemeClr val="accent1"/>
+          </a:lnRef>
+          <a:fillRef idx="3">
+            <a:schemeClr val="accent1"/>
+          </a:fillRef>
+          <a:effectRef idx="2">
+            <a:schemeClr val="accent1"/>
+          </a:effectRef>
+          <a:fontRef idx="minor">
+            <a:schemeClr val="lt1"/>
+          </a:fontRef>
+        </p:style>
+        <p:txBody>
+          <a:bodyPr rtlCol="0" anchor="ctr"/>
+          <a:lstStyle/>
+          <a:p>
+            <a:pPr algn="ctr"/>
+          </a:p>
+        </p:txBody>
+      </p:sp>
+      <p:sp>
+        <p:nvSpPr>
+          <p:cNvPr id="4" name="Rounded Rectangle 3"/>
           <p:cNvSpPr/>
           <p:nvPr/>
         </p:nvSpPr>
@@ -11241,6 +12405,13 @@
                 <a:spcPts val="0"/>
               </a:spcAft>
             </a:pPr>
+          </a:p>
+          <a:p>
+            <a:pPr algn="l">
+              <a:spcAft>
+                <a:spcPts val="0"/>
+              </a:spcAft>
+            </a:pPr>
             <a:r>
               <a:rPr sz="1400" i="1">
                 <a:solidFill>
@@ -11248,7 +12419,7 @@
                 </a:solidFill>
                 <a:latin typeface="DejaVu Sans Mono"/>
               </a:rPr>
-              <a:t>// Go 1.22+: พิมพ์ 0..2 ไม่ซ้้า (loop var แยกต่อรอบ)</a:t>
+              <a:t>// Go 1.22+: พิมพ์ 0..2 ไม่ซ้้า</a:t>
             </a:r>
           </a:p>
           <a:p>
@@ -11264,7 +12435,7 @@
                 </a:solidFill>
                 <a:latin typeface="DejaVu Sans Mono"/>
               </a:rPr>
-              <a:t>// Go 1.21-:  ส่วนใหญ่พิมพ์ 3 3 3 (ตัวแปรตัวเดียวถูกจับร่วม)</a:t>
+              <a:t>//         (loop var แยกของตัวเองทุกรอบ)</a:t>
             </a:r>
           </a:p>
           <a:p>
@@ -11280,7 +12451,7 @@
                 </a:solidFill>
                 <a:latin typeface="DejaVu Sans Mono"/>
               </a:rPr>
-              <a:t>//</a:t>
+              <a:t>// Go 1.21 ลงไป: ส่วนใหญ่พิมพ์ 3 3 3</a:t>
             </a:r>
           </a:p>
           <a:p>
@@ -11296,7 +12467,30 @@
                 </a:solidFill>
                 <a:latin typeface="DejaVu Sans Mono"/>
               </a:rPr>
-              <a:t>// วิธีเดิมก่อน 1.22:</a:t>
+              <a:t>//         (ทุก closure จับ "ตัวแปรตัวเดียวกัน")</a:t>
+            </a:r>
+          </a:p>
+          <a:p>
+            <a:pPr algn="l">
+              <a:spcAft>
+                <a:spcPts val="0"/>
+              </a:spcAft>
+            </a:pPr>
+          </a:p>
+          <a:p>
+            <a:pPr algn="l">
+              <a:spcAft>
+                <a:spcPts val="0"/>
+              </a:spcAft>
+            </a:pPr>
+            <a:r>
+              <a:rPr sz="1400" i="1">
+                <a:solidFill>
+                  <a:srgbClr val="94A3B8"/>
+                </a:solidFill>
+                <a:latin typeface="DejaVu Sans Mono"/>
+              </a:rPr>
+              <a:t>// โค้ดเก่าจึงมีรอยแก้แบบนี้ทิ้งไว้:</a:t>
             </a:r>
           </a:p>
           <a:p>
@@ -11337,7 +12531,7 @@
                 </a:solidFill>
                 <a:latin typeface="DejaVu Sans Mono"/>
               </a:rPr>
-              <a:t>// สำเนาต่อรอบ</a:t>
+              <a:t>// ทำสำเนาต่อรอบ</a:t>
             </a:r>
           </a:p>
           <a:p>
@@ -11376,337 +12570,20 @@
       </p:sp>
       <p:sp>
         <p:nvSpPr>
-          <p:cNvPr id="6" name="TextBox 5"/>
-          <p:cNvSpPr txBox="1"/>
+          <p:cNvPr id="5" name="Rounded Rectangle 4"/>
+          <p:cNvSpPr/>
           <p:nvPr/>
         </p:nvSpPr>
         <p:spPr>
           <a:xfrm>
-            <a:off x="548640" y="5715000"/>
-            <a:ext cx="11064240" cy="4937760"/>
-          </a:xfrm>
-          <a:prstGeom prst="rect">
-            <a:avLst/>
-          </a:prstGeom>
-          <a:noFill/>
-        </p:spPr>
-        <p:txBody>
-          <a:bodyPr wrap="square">
-            <a:spAutoFit/>
-          </a:bodyPr>
-          <a:lstStyle/>
-          <a:p>
-            <a:pPr algn="l">
-              <a:spcAft>
-                <a:spcPts val="800"/>
-              </a:spcAft>
-            </a:pPr>
-            <a:r>
-              <a:rPr sz="1500" b="0" i="0">
-                <a:solidFill>
-                  <a:srgbClr val="0F172A"/>
-                </a:solidFill>
-                <a:latin typeface="Noto Sans Thai Looped"/>
-              </a:rPr>
-              <a:t>• จุดสอน: closure จับตัวแปรเดียวกัน ไม่ใช่สำเนา — ยกเว้น Go </a:t>
-            </a:r>
-            <a:r>
-              <a:rPr sz="1500" b="0" i="0">
-                <a:solidFill>
-                  <a:srgbClr val="0F172A"/>
-                </a:solidFill>
-                <a:latin typeface="Ubuntu"/>
-              </a:rPr>
-              <a:t>1.22</a:t>
-            </a:r>
-            <a:r>
-              <a:rPr sz="1500" b="0" i="0">
-                <a:solidFill>
-                  <a:srgbClr val="0F172A"/>
-                </a:solidFill>
-                <a:latin typeface="Noto Sans Thai Looped"/>
-              </a:rPr>
-              <a:t>+ ที่ loop var แยกต่อรอบแล้ว</a:t>
-            </a:r>
-          </a:p>
-          <a:p>
-            <a:pPr algn="l">
-              <a:spcAft>
-                <a:spcPts val="800"/>
-              </a:spcAft>
-            </a:pPr>
-            <a:r>
-              <a:rPr sz="1500" b="0" i="0">
-                <a:solidFill>
-                  <a:srgbClr val="0F172A"/>
-                </a:solidFill>
-                <a:latin typeface="Noto Sans Thai Looped"/>
-              </a:rPr>
-              <a:t>• โค้ดเก่าในทีม (ก่อน </a:t>
-            </a:r>
-            <a:r>
-              <a:rPr sz="1500" b="0" i="0">
-                <a:solidFill>
-                  <a:srgbClr val="0F172A"/>
-                </a:solidFill>
-                <a:latin typeface="Ubuntu"/>
-              </a:rPr>
-              <a:t>1.22</a:t>
-            </a:r>
-            <a:r>
-              <a:rPr sz="1500" b="0" i="0">
-                <a:solidFill>
-                  <a:srgbClr val="0F172A"/>
-                </a:solidFill>
-                <a:latin typeface="Noto Sans Thai Looped"/>
-              </a:rPr>
-              <a:t>) ยังมีรอยแก้ i := i ทิ้งไว้ให้เห็นได้</a:t>
-            </a:r>
-          </a:p>
-        </p:txBody>
-      </p:sp>
-    </p:spTree>
-  </p:cSld>
-  <p:clrMapOvr>
-    <a:masterClrMapping/>
-  </p:clrMapOvr>
-</p:sld>
-</file>
-
-<file path=ppt/slides/slide8.xml><?xml version="1.0" encoding="utf-8"?>
-<p:sld xmlns:a="http://schemas.openxmlformats.org/drawingml/2006/main" xmlns:p="http://schemas.openxmlformats.org/presentationml/2006/main" xmlns:r="http://schemas.openxmlformats.org/officeDocument/2006/relationships">
-  <p:cSld>
-    <p:spTree>
-      <p:nvGrpSpPr>
-        <p:cNvPr id="1" name=""/>
-        <p:cNvGrpSpPr/>
-        <p:nvPr/>
-      </p:nvGrpSpPr>
-      <p:grpSpPr/>
-      <p:sp>
-        <p:nvSpPr>
-          <p:cNvPr id="2" name="TextBox 1"/>
-          <p:cNvSpPr txBox="1"/>
-          <p:nvPr/>
-        </p:nvSpPr>
-        <p:spPr>
-          <a:xfrm>
-            <a:off x="502920" y="292608"/>
-            <a:ext cx="8778240" cy="914400"/>
-          </a:xfrm>
-          <a:prstGeom prst="rect">
-            <a:avLst/>
-          </a:prstGeom>
-          <a:noFill/>
-        </p:spPr>
-        <p:txBody>
-          <a:bodyPr wrap="square">
-            <a:spAutoFit/>
-          </a:bodyPr>
-          <a:lstStyle/>
-          <a:p>
-            <a:pPr algn="l">
-              <a:spcAft>
-                <a:spcPts val="200"/>
-              </a:spcAft>
-            </a:pPr>
-            <a:r>
-              <a:rPr sz="3000" b="1" i="0">
-                <a:solidFill>
-                  <a:srgbClr val="0F172A"/>
-                </a:solidFill>
-                <a:latin typeface="Noto Sans Thai Looped"/>
-              </a:rPr>
-              <a:t>เครื่องมือของ Go (</a:t>
-            </a:r>
-            <a:r>
-              <a:rPr sz="3000" b="1" i="0">
-                <a:solidFill>
-                  <a:srgbClr val="0F172A"/>
-                </a:solidFill>
-                <a:latin typeface="Ubuntu"/>
-              </a:rPr>
-              <a:t>2</a:t>
-            </a:r>
-            <a:r>
-              <a:rPr sz="3000" b="1" i="0">
-                <a:solidFill>
-                  <a:srgbClr val="0F172A"/>
-                </a:solidFill>
-                <a:latin typeface="Noto Sans Thai Looped"/>
-              </a:rPr>
-              <a:t>): Generics — Map / Filter / Reduce</a:t>
-            </a:r>
-          </a:p>
-          <a:p>
-            <a:pPr algn="l">
-              <a:spcAft>
-                <a:spcPts val="600"/>
-              </a:spcAft>
-            </a:pPr>
-            <a:r>
-              <a:rPr sz="1400" b="0" i="0">
-                <a:solidFill>
-                  <a:srgbClr val="64748B"/>
-                </a:solidFill>
-                <a:latin typeface="Noto Sans Thai Looped"/>
-              </a:rPr>
-              <a:t>Go </a:t>
-            </a:r>
-            <a:r>
-              <a:rPr sz="1400" b="0" i="0">
-                <a:solidFill>
-                  <a:srgbClr val="64748B"/>
-                </a:solidFill>
-                <a:latin typeface="Ubuntu"/>
-              </a:rPr>
-              <a:t>1.18</a:t>
-            </a:r>
-            <a:r>
-              <a:rPr sz="1400" b="0" i="0">
-                <a:solidFill>
-                  <a:srgbClr val="64748B"/>
-                </a:solidFill>
-                <a:latin typeface="Noto Sans Thai Looped"/>
-              </a:rPr>
-              <a:t>+ · โค้ดเต็ม + TDD ใน go-fp/</a:t>
-            </a:r>
-            <a:r>
-              <a:rPr sz="1400" b="0" i="0">
-                <a:solidFill>
-                  <a:srgbClr val="64748B"/>
-                </a:solidFill>
-                <a:latin typeface="Ubuntu"/>
-              </a:rPr>
-              <a:t>03-</a:t>
-            </a:r>
-            <a:r>
-              <a:rPr sz="1400" b="0" i="0">
-                <a:solidFill>
-                  <a:srgbClr val="64748B"/>
-                </a:solidFill>
-                <a:latin typeface="Noto Sans Thai Looped"/>
-              </a:rPr>
-              <a:t>fp-toolkit</a:t>
-            </a:r>
-          </a:p>
-        </p:txBody>
-      </p:sp>
-      <p:sp>
-        <p:nvSpPr>
-          <p:cNvPr id="3" name="Rounded Rectangle 2"/>
-          <p:cNvSpPr/>
-          <p:nvPr/>
-        </p:nvSpPr>
-        <p:spPr>
-          <a:xfrm>
-            <a:off x="10104120" y="384048"/>
-            <a:ext cx="1600200" cy="502920"/>
+            <a:off x="548640" y="5989320"/>
+            <a:ext cx="11109960" cy="566928"/>
           </a:xfrm>
           <a:prstGeom prst="roundRect">
             <a:avLst/>
           </a:prstGeom>
           <a:solidFill>
-            <a:srgbClr val="0D9488"/>
-          </a:solidFill>
-          <a:ln>
-            <a:noFill/>
-          </a:ln>
-        </p:spPr>
-        <p:style>
-          <a:lnRef idx="1">
-            <a:schemeClr val="accent1"/>
-          </a:lnRef>
-          <a:fillRef idx="3">
-            <a:schemeClr val="accent1"/>
-          </a:fillRef>
-          <a:effectRef idx="2">
-            <a:schemeClr val="accent1"/>
-          </a:effectRef>
-          <a:fontRef idx="minor">
-            <a:schemeClr val="lt1"/>
-          </a:fontRef>
-        </p:style>
-        <p:txBody>
-          <a:bodyPr rtlCol="0" anchor="ctr" wrap="none"/>
-          <a:lstStyle/>
-          <a:p>
-            <a:pPr algn="ctr">
-              <a:spcAft>
-                <a:spcPts val="0"/>
-              </a:spcAft>
-            </a:pPr>
-            <a:r>
-              <a:rPr sz="1400" b="1" i="0">
-                <a:solidFill>
-                  <a:srgbClr val="FFFFFF"/>
-                </a:solidFill>
-                <a:latin typeface="Ubuntu"/>
-              </a:rPr>
-              <a:t>0:40–1:05</a:t>
-            </a:r>
-          </a:p>
-        </p:txBody>
-      </p:sp>
-      <p:sp>
-        <p:nvSpPr>
-          <p:cNvPr id="4" name="Rectangle 3"/>
-          <p:cNvSpPr/>
-          <p:nvPr/>
-        </p:nvSpPr>
-        <p:spPr>
-          <a:xfrm>
-            <a:off x="502920" y="1207008"/>
-            <a:ext cx="11201400" cy="27940"/>
-          </a:xfrm>
-          <a:prstGeom prst="rect">
-            <a:avLst/>
-          </a:prstGeom>
-          <a:solidFill>
-            <a:srgbClr val="0D9488"/>
-          </a:solidFill>
-          <a:ln>
-            <a:noFill/>
-          </a:ln>
-        </p:spPr>
-        <p:style>
-          <a:lnRef idx="1">
-            <a:schemeClr val="accent1"/>
-          </a:lnRef>
-          <a:fillRef idx="3">
-            <a:schemeClr val="accent1"/>
-          </a:fillRef>
-          <a:effectRef idx="2">
-            <a:schemeClr val="accent1"/>
-          </a:effectRef>
-          <a:fontRef idx="minor">
-            <a:schemeClr val="lt1"/>
-          </a:fontRef>
-        </p:style>
-        <p:txBody>
-          <a:bodyPr rtlCol="0" anchor="ctr"/>
-          <a:lstStyle/>
-          <a:p>
-            <a:pPr algn="ctr"/>
-          </a:p>
-        </p:txBody>
-      </p:sp>
-      <p:sp>
-        <p:nvSpPr>
-          <p:cNvPr id="5" name="Rounded Rectangle 4"/>
-          <p:cNvSpPr/>
-          <p:nvPr/>
-        </p:nvSpPr>
-        <p:spPr>
-          <a:xfrm>
-            <a:off x="548640" y="1874519"/>
-            <a:ext cx="11109960" cy="3383280"/>
-          </a:xfrm>
-          <a:prstGeom prst="roundRect">
-            <a:avLst/>
-          </a:prstGeom>
-          <a:solidFill>
-            <a:srgbClr val="1E1E2E"/>
+            <a:srgbClr val="CCFBF1"/>
           </a:solidFill>
           <a:ln>
             <a:noFill/>
@@ -11728,802 +12605,40 @@
           </a:fontRef>
         </p:style>
         <p:txBody>
-          <a:bodyPr rtlCol="0" anchor="t" wrap="none" lIns="164592" rIns="109728" tIns="109728"/>
-          <a:lstStyle/>
-          <a:p>
-            <a:pPr algn="l">
-              <a:spcAft>
-                <a:spcPts val="0"/>
-              </a:spcAft>
-            </a:pPr>
-            <a:r>
-              <a:rPr sz="1400" i="0">
-                <a:solidFill>
-                  <a:srgbClr val="E2E8F0"/>
-                </a:solidFill>
-                <a:latin typeface="DejaVu Sans Mono"/>
-              </a:rPr>
-              <a:t>func Map[T, R any](in []T, f func(T) R) []R {</a:t>
-            </a:r>
-          </a:p>
-          <a:p>
-            <a:pPr algn="l">
-              <a:spcAft>
-                <a:spcPts val="0"/>
-              </a:spcAft>
-            </a:pPr>
-            <a:r>
-              <a:rPr sz="1400" i="0">
-                <a:solidFill>
-                  <a:srgbClr val="E2E8F0"/>
-                </a:solidFill>
-                <a:latin typeface="DejaVu Sans Mono"/>
-              </a:rPr>
-              <a:t>    out := make([]R, 0, len(in))</a:t>
-            </a:r>
-          </a:p>
-          <a:p>
-            <a:pPr algn="l">
-              <a:spcAft>
-                <a:spcPts val="0"/>
-              </a:spcAft>
-            </a:pPr>
-            <a:r>
-              <a:rPr sz="1400" i="0">
-                <a:solidFill>
-                  <a:srgbClr val="E2E8F0"/>
-                </a:solidFill>
-                <a:latin typeface="DejaVu Sans Mono"/>
-              </a:rPr>
-              <a:t>    for _, v := range in { out = append(out, f(v)) }</a:t>
-            </a:r>
-          </a:p>
-          <a:p>
-            <a:pPr algn="l">
-              <a:spcAft>
-                <a:spcPts val="0"/>
-              </a:spcAft>
-            </a:pPr>
-            <a:r>
-              <a:rPr sz="1400" i="0">
-                <a:solidFill>
-                  <a:srgbClr val="E2E8F0"/>
-                </a:solidFill>
-                <a:latin typeface="DejaVu Sans Mono"/>
-              </a:rPr>
-              <a:t>    return out</a:t>
-            </a:r>
-          </a:p>
-          <a:p>
-            <a:pPr algn="l">
-              <a:spcAft>
-                <a:spcPts val="0"/>
-              </a:spcAft>
-            </a:pPr>
-            <a:r>
-              <a:rPr sz="1400" i="0">
-                <a:solidFill>
-                  <a:srgbClr val="E2E8F0"/>
-                </a:solidFill>
-                <a:latin typeface="DejaVu Sans Mono"/>
-              </a:rPr>
-              <a:t>}</a:t>
-            </a:r>
-          </a:p>
-          <a:p>
-            <a:pPr algn="l">
-              <a:spcAft>
-                <a:spcPts val="0"/>
-              </a:spcAft>
-            </a:pPr>
-          </a:p>
-          <a:p>
-            <a:pPr algn="l">
-              <a:spcAft>
-                <a:spcPts val="0"/>
-              </a:spcAft>
-            </a:pPr>
-            <a:r>
-              <a:rPr sz="1400" i="0">
-                <a:solidFill>
-                  <a:srgbClr val="E2E8F0"/>
-                </a:solidFill>
-                <a:latin typeface="DejaVu Sans Mono"/>
-              </a:rPr>
-              <a:t>func Filter[T any](in []T, keep func(T) bool) []T { ... }</a:t>
-            </a:r>
-          </a:p>
-          <a:p>
-            <a:pPr algn="l">
-              <a:spcAft>
-                <a:spcPts val="0"/>
-              </a:spcAft>
-            </a:pPr>
-          </a:p>
-          <a:p>
-            <a:pPr algn="l">
-              <a:spcAft>
-                <a:spcPts val="0"/>
-              </a:spcAft>
-            </a:pPr>
-            <a:r>
-              <a:rPr sz="1400" i="1">
-                <a:solidFill>
-                  <a:srgbClr val="94A3B8"/>
-                </a:solidFill>
-                <a:latin typeface="DejaVu Sans Mono"/>
-              </a:rPr>
-              <a:t>// accumulator ต่าง type กับสมาชิกได้ — จุดที่คนถามแน่</a:t>
-            </a:r>
-          </a:p>
-          <a:p>
-            <a:pPr algn="l">
-              <a:spcAft>
-                <a:spcPts val="0"/>
-              </a:spcAft>
-            </a:pPr>
-            <a:r>
-              <a:rPr sz="1400" i="0">
-                <a:solidFill>
-                  <a:srgbClr val="E2E8F0"/>
-                </a:solidFill>
-                <a:latin typeface="DejaVu Sans Mono"/>
-              </a:rPr>
-              <a:t>func Reduce[T, R any](in []T, init R,</a:t>
-            </a:r>
-          </a:p>
-          <a:p>
-            <a:pPr algn="l">
-              <a:spcAft>
-                <a:spcPts val="0"/>
-              </a:spcAft>
-            </a:pPr>
-            <a:r>
-              <a:rPr sz="1400" i="0">
-                <a:solidFill>
-                  <a:srgbClr val="E2E8F0"/>
-                </a:solidFill>
-                <a:latin typeface="DejaVu Sans Mono"/>
-              </a:rPr>
-              <a:t>    combine func(R, T) R) R { ... }</a:t>
-            </a:r>
-          </a:p>
-          <a:p>
-            <a:pPr algn="l">
-              <a:spcAft>
-                <a:spcPts val="0"/>
-              </a:spcAft>
-            </a:pPr>
-          </a:p>
-          <a:p>
-            <a:pPr algn="l">
-              <a:spcAft>
-                <a:spcPts val="0"/>
-              </a:spcAft>
-            </a:pPr>
-            <a:r>
-              <a:rPr sz="1400" i="0">
-                <a:solidFill>
-                  <a:srgbClr val="E2E8F0"/>
-                </a:solidFill>
-                <a:latin typeface="DejaVu Sans Mono"/>
-              </a:rPr>
-              <a:t>total := Reduce(items, 0, func(acc int, it Item) int {</a:t>
-            </a:r>
-          </a:p>
-          <a:p>
-            <a:pPr algn="l">
-              <a:spcAft>
-                <a:spcPts val="0"/>
-              </a:spcAft>
-            </a:pPr>
-            <a:r>
-              <a:rPr sz="1400" i="0">
-                <a:solidFill>
-                  <a:srgbClr val="E2E8F0"/>
-                </a:solidFill>
-                <a:latin typeface="DejaVu Sans Mono"/>
-              </a:rPr>
-              <a:t>    return acc + it.Price*it.Quantity</a:t>
-            </a:r>
-          </a:p>
-          <a:p>
-            <a:pPr algn="l">
-              <a:spcAft>
-                <a:spcPts val="0"/>
-              </a:spcAft>
-            </a:pPr>
-            <a:r>
-              <a:rPr sz="1400" i="0">
-                <a:solidFill>
-                  <a:srgbClr val="E2E8F0"/>
-                </a:solidFill>
-                <a:latin typeface="DejaVu Sans Mono"/>
-              </a:rPr>
-              <a:t>})</a:t>
-            </a:r>
-          </a:p>
-        </p:txBody>
-      </p:sp>
-      <p:sp>
-        <p:nvSpPr>
-          <p:cNvPr id="6" name="TextBox 5"/>
-          <p:cNvSpPr txBox="1"/>
-          <p:nvPr/>
-        </p:nvSpPr>
-        <p:spPr>
-          <a:xfrm>
-            <a:off x="548640" y="5440680"/>
-            <a:ext cx="11064240" cy="4937760"/>
-          </a:xfrm>
-          <a:prstGeom prst="rect">
-            <a:avLst/>
-          </a:prstGeom>
-          <a:noFill/>
-        </p:spPr>
-        <p:txBody>
-          <a:bodyPr wrap="square">
-            <a:spAutoFit/>
-          </a:bodyPr>
-          <a:lstStyle/>
-          <a:p>
-            <a:pPr algn="l">
-              <a:spcAft>
-                <a:spcPts val="800"/>
-              </a:spcAft>
-            </a:pPr>
-            <a:r>
-              <a:rPr sz="1500" b="0" i="0">
-                <a:solidFill>
-                  <a:srgbClr val="0F172A"/>
+          <a:bodyPr rtlCol="0" anchor="ctr" tIns="54864" bIns="36576" wrap="square"/>
+          <a:lstStyle/>
+          <a:p>
+            <a:pPr algn="l">
+              <a:spcAft>
+                <a:spcPts val="0"/>
+              </a:spcAft>
+            </a:pPr>
+            <a:r>
+              <a:rPr sz="1500" b="1" i="0">
+                <a:solidFill>
+                  <a:srgbClr val="0F766E"/>
                 </a:solidFill>
                 <a:latin typeface="Noto Sans Thai Looped"/>
               </a:rPr>
-              <a:t>• Go ไม่มี built-in map/filter — เขียนเองได้ใน </a:t>
-            </a:r>
-            <a:r>
-              <a:rPr sz="1500" b="0" i="0">
-                <a:solidFill>
-                  <a:srgbClr val="0F172A"/>
+              <a:t>จำไว้: โค้ดเก่าก่อน </a:t>
+            </a:r>
+            <a:r>
+              <a:rPr sz="1500" b="1" i="0">
+                <a:solidFill>
+                  <a:srgbClr val="0F766E"/>
                 </a:solidFill>
                 <a:latin typeface="Ubuntu"/>
               </a:rPr>
-              <a:t>5</a:t>
-            </a:r>
-            <a:r>
-              <a:rPr sz="1500" b="0" i="0">
-                <a:solidFill>
-                  <a:srgbClr val="0F172A"/>
+              <a:t>1.22</a:t>
+            </a:r>
+            <a:r>
+              <a:rPr sz="1500" b="1" i="0">
+                <a:solidFill>
+                  <a:srgbClr val="0F766E"/>
                 </a:solidFill>
                 <a:latin typeface="Noto Sans Thai Looped"/>
               </a:rPr>
-              <a:t> บรรทัด แต่ Go community นิยม for loop ตรง ๆ: โค้ดชุดนี้คือเครื่องมือ 'เรียนรู้' ไม่ใช่แนวปฏิบัติ</a:t>
-            </a:r>
-          </a:p>
-          <a:p>
-            <a:pPr algn="l">
-              <a:spcAft>
-                <a:spcPts val="800"/>
-              </a:spcAft>
-            </a:pPr>
-            <a:r>
-              <a:rPr sz="1500" b="0" i="0">
-                <a:solidFill>
-                  <a:srgbClr val="0F172A"/>
-                </a:solidFill>
-                <a:latin typeface="Noto Sans Thai Looped"/>
-              </a:rPr>
-              <a:t>• Reduce ที่ accumulator ต่าง type กับ element คือจุดที่ generics ช่วยจริง (Reduce[Item, int])</a:t>
-            </a:r>
-          </a:p>
-        </p:txBody>
-      </p:sp>
-    </p:spTree>
-  </p:cSld>
-  <p:clrMapOvr>
-    <a:masterClrMapping/>
-  </p:clrMapOvr>
-</p:sld>
-</file>
-
-<file path=ppt/slides/slide9.xml><?xml version="1.0" encoding="utf-8"?>
-<p:sld xmlns:a="http://schemas.openxmlformats.org/drawingml/2006/main" xmlns:p="http://schemas.openxmlformats.org/presentationml/2006/main" xmlns:r="http://schemas.openxmlformats.org/officeDocument/2006/relationships">
-  <p:cSld>
-    <p:spTree>
-      <p:nvGrpSpPr>
-        <p:cNvPr id="1" name=""/>
-        <p:cNvGrpSpPr/>
-        <p:nvPr/>
-      </p:nvGrpSpPr>
-      <p:grpSpPr/>
-      <p:sp>
-        <p:nvSpPr>
-          <p:cNvPr id="2" name="TextBox 1"/>
-          <p:cNvSpPr txBox="1"/>
-          <p:nvPr/>
-        </p:nvSpPr>
-        <p:spPr>
-          <a:xfrm>
-            <a:off x="502920" y="292608"/>
-            <a:ext cx="8778240" cy="914400"/>
-          </a:xfrm>
-          <a:prstGeom prst="rect">
-            <a:avLst/>
-          </a:prstGeom>
-          <a:noFill/>
-        </p:spPr>
-        <p:txBody>
-          <a:bodyPr wrap="square">
-            <a:spAutoFit/>
-          </a:bodyPr>
-          <a:lstStyle/>
-          <a:p>
-            <a:pPr algn="l">
-              <a:spcAft>
-                <a:spcPts val="200"/>
-              </a:spcAft>
-            </a:pPr>
-            <a:r>
-              <a:rPr sz="3000" b="1" i="0">
-                <a:solidFill>
-                  <a:srgbClr val="0F172A"/>
-                </a:solidFill>
-                <a:latin typeface="Noto Sans Thai Looped"/>
-              </a:rPr>
-              <a:t>FP ในโค้ดจริง: Functional Options</a:t>
-            </a:r>
-          </a:p>
-          <a:p>
-            <a:pPr algn="l">
-              <a:spcAft>
-                <a:spcPts val="600"/>
-              </a:spcAft>
-            </a:pPr>
-            <a:r>
-              <a:rPr sz="1400" b="0" i="0">
-                <a:solidFill>
-                  <a:srgbClr val="64748B"/>
-                </a:solidFill>
-                <a:latin typeface="Noto Sans Thai Looped"/>
-              </a:rPr>
-              <a:t>closure + higher-order function ที่คุณใช้อยู่แล้วโดยไม่รู้ตัว</a:t>
-            </a:r>
-          </a:p>
-        </p:txBody>
-      </p:sp>
-      <p:sp>
-        <p:nvSpPr>
-          <p:cNvPr id="3" name="Rounded Rectangle 2"/>
-          <p:cNvSpPr/>
-          <p:nvPr/>
-        </p:nvSpPr>
-        <p:spPr>
-          <a:xfrm>
-            <a:off x="10104120" y="384048"/>
-            <a:ext cx="1600200" cy="502920"/>
-          </a:xfrm>
-          <a:prstGeom prst="roundRect">
-            <a:avLst/>
-          </a:prstGeom>
-          <a:solidFill>
-            <a:srgbClr val="0D9488"/>
-          </a:solidFill>
-          <a:ln>
-            <a:noFill/>
-          </a:ln>
-        </p:spPr>
-        <p:style>
-          <a:lnRef idx="1">
-            <a:schemeClr val="accent1"/>
-          </a:lnRef>
-          <a:fillRef idx="3">
-            <a:schemeClr val="accent1"/>
-          </a:fillRef>
-          <a:effectRef idx="2">
-            <a:schemeClr val="accent1"/>
-          </a:effectRef>
-          <a:fontRef idx="minor">
-            <a:schemeClr val="lt1"/>
-          </a:fontRef>
-        </p:style>
-        <p:txBody>
-          <a:bodyPr rtlCol="0" anchor="ctr" wrap="none"/>
-          <a:lstStyle/>
-          <a:p>
-            <a:pPr algn="ctr">
-              <a:spcAft>
-                <a:spcPts val="0"/>
-              </a:spcAft>
-            </a:pPr>
-            <a:r>
-              <a:rPr sz="1400" b="1" i="0">
-                <a:solidFill>
-                  <a:srgbClr val="FFFFFF"/>
-                </a:solidFill>
-                <a:latin typeface="Ubuntu"/>
-              </a:rPr>
-              <a:t>1:05–1:25</a:t>
-            </a:r>
-          </a:p>
-        </p:txBody>
-      </p:sp>
-      <p:sp>
-        <p:nvSpPr>
-          <p:cNvPr id="4" name="Rectangle 3"/>
-          <p:cNvSpPr/>
-          <p:nvPr/>
-        </p:nvSpPr>
-        <p:spPr>
-          <a:xfrm>
-            <a:off x="502920" y="1207008"/>
-            <a:ext cx="11201400" cy="27940"/>
-          </a:xfrm>
-          <a:prstGeom prst="rect">
-            <a:avLst/>
-          </a:prstGeom>
-          <a:solidFill>
-            <a:srgbClr val="0D9488"/>
-          </a:solidFill>
-          <a:ln>
-            <a:noFill/>
-          </a:ln>
-        </p:spPr>
-        <p:style>
-          <a:lnRef idx="1">
-            <a:schemeClr val="accent1"/>
-          </a:lnRef>
-          <a:fillRef idx="3">
-            <a:schemeClr val="accent1"/>
-          </a:fillRef>
-          <a:effectRef idx="2">
-            <a:schemeClr val="accent1"/>
-          </a:effectRef>
-          <a:fontRef idx="minor">
-            <a:schemeClr val="lt1"/>
-          </a:fontRef>
-        </p:style>
-        <p:txBody>
-          <a:bodyPr rtlCol="0" anchor="ctr"/>
-          <a:lstStyle/>
-          <a:p>
-            <a:pPr algn="ctr"/>
-          </a:p>
-        </p:txBody>
-      </p:sp>
-      <p:sp>
-        <p:nvSpPr>
-          <p:cNvPr id="5" name="Rounded Rectangle 4"/>
-          <p:cNvSpPr/>
-          <p:nvPr/>
-        </p:nvSpPr>
-        <p:spPr>
-          <a:xfrm>
-            <a:off x="548640" y="1874519"/>
-            <a:ext cx="11109960" cy="3383280"/>
-          </a:xfrm>
-          <a:prstGeom prst="roundRect">
-            <a:avLst/>
-          </a:prstGeom>
-          <a:solidFill>
-            <a:srgbClr val="1E1E2E"/>
-          </a:solidFill>
-          <a:ln>
-            <a:noFill/>
-          </a:ln>
-          <a:effectLst/>
-        </p:spPr>
-        <p:style>
-          <a:lnRef idx="1">
-            <a:schemeClr val="accent1"/>
-          </a:lnRef>
-          <a:fillRef idx="3">
-            <a:schemeClr val="accent1"/>
-          </a:fillRef>
-          <a:effectRef idx="2">
-            <a:schemeClr val="accent1"/>
-          </a:effectRef>
-          <a:fontRef idx="minor">
-            <a:schemeClr val="lt1"/>
-          </a:fontRef>
-        </p:style>
-        <p:txBody>
-          <a:bodyPr rtlCol="0" anchor="t" wrap="none" lIns="164592" rIns="109728" tIns="109728"/>
-          <a:lstStyle/>
-          <a:p>
-            <a:pPr algn="l">
-              <a:spcAft>
-                <a:spcPts val="0"/>
-              </a:spcAft>
-            </a:pPr>
-            <a:r>
-              <a:rPr sz="1400" i="0">
-                <a:solidFill>
-                  <a:srgbClr val="E2E8F0"/>
-                </a:solidFill>
-                <a:latin typeface="DejaVu Sans Mono"/>
-              </a:rPr>
-              <a:t>type Option func(*Server)</a:t>
-            </a:r>
-          </a:p>
-          <a:p>
-            <a:pPr algn="l">
-              <a:spcAft>
-                <a:spcPts val="0"/>
-              </a:spcAft>
-            </a:pPr>
-          </a:p>
-          <a:p>
-            <a:pPr algn="l">
-              <a:spcAft>
-                <a:spcPts val="0"/>
-              </a:spcAft>
-            </a:pPr>
-            <a:r>
-              <a:rPr sz="1400" i="0">
-                <a:solidFill>
-                  <a:srgbClr val="E2E8F0"/>
-                </a:solidFill>
-                <a:latin typeface="DejaVu Sans Mono"/>
-              </a:rPr>
-              <a:t>func WithPort(p int) Option {</a:t>
-            </a:r>
-          </a:p>
-          <a:p>
-            <a:pPr algn="l">
-              <a:spcAft>
-                <a:spcPts val="0"/>
-              </a:spcAft>
-            </a:pPr>
-            <a:r>
-              <a:rPr sz="1400" i="0">
-                <a:solidFill>
-                  <a:srgbClr val="E2E8F0"/>
-                </a:solidFill>
-                <a:latin typeface="DejaVu Sans Mono"/>
-              </a:rPr>
-              <a:t>    return func(s *Server) { s.port = p }</a:t>
-            </a:r>
-          </a:p>
-          <a:p>
-            <a:pPr algn="l">
-              <a:spcAft>
-                <a:spcPts val="0"/>
-              </a:spcAft>
-            </a:pPr>
-            <a:r>
-              <a:rPr sz="1400" i="0">
-                <a:solidFill>
-                  <a:srgbClr val="E2E8F0"/>
-                </a:solidFill>
-                <a:latin typeface="DejaVu Sans Mono"/>
-              </a:rPr>
-              <a:t>}</a:t>
-            </a:r>
-          </a:p>
-          <a:p>
-            <a:pPr algn="l">
-              <a:spcAft>
-                <a:spcPts val="0"/>
-              </a:spcAft>
-            </a:pPr>
-          </a:p>
-          <a:p>
-            <a:pPr algn="l">
-              <a:spcAft>
-                <a:spcPts val="0"/>
-              </a:spcAft>
-            </a:pPr>
-            <a:r>
-              <a:rPr sz="1400" i="0">
-                <a:solidFill>
-                  <a:srgbClr val="E2E8F0"/>
-                </a:solidFill>
-                <a:latin typeface="DejaVu Sans Mono"/>
-              </a:rPr>
-              <a:t>func New(host string, opts ...Option) *Server {</a:t>
-            </a:r>
-          </a:p>
-          <a:p>
-            <a:pPr algn="l">
-              <a:spcAft>
-                <a:spcPts val="0"/>
-              </a:spcAft>
-            </a:pPr>
-            <a:r>
-              <a:rPr sz="1400" i="0">
-                <a:solidFill>
-                  <a:srgbClr val="E2E8F0"/>
-                </a:solidFill>
-                <a:latin typeface="DejaVu Sans Mono"/>
-              </a:rPr>
-              <a:t>    s := &amp;Server{host: host, port: 8080} </a:t>
-            </a:r>
-            <a:r>
-              <a:rPr sz="1400" i="1">
-                <a:solidFill>
-                  <a:srgbClr val="94A3B8"/>
-                </a:solidFill>
-                <a:latin typeface="DejaVu Sans Mono"/>
-              </a:rPr>
-              <a:t>// default ก่อน</a:t>
-            </a:r>
-          </a:p>
-          <a:p>
-            <a:pPr algn="l">
-              <a:spcAft>
-                <a:spcPts val="0"/>
-              </a:spcAft>
-            </a:pPr>
-            <a:r>
-              <a:rPr sz="1400" i="0">
-                <a:solidFill>
-                  <a:srgbClr val="E2E8F0"/>
-                </a:solidFill>
-                <a:latin typeface="DejaVu Sans Mono"/>
-              </a:rPr>
-              <a:t>    for _, o := range opts { o(s) }      </a:t>
-            </a:r>
-            <a:r>
-              <a:rPr sz="1400" i="1">
-                <a:solidFill>
-                  <a:srgbClr val="94A3B8"/>
-                </a:solidFill>
-                <a:latin typeface="DejaVu Sans Mono"/>
-              </a:rPr>
-              <a:t>// แล้ว override</a:t>
-            </a:r>
-          </a:p>
-          <a:p>
-            <a:pPr algn="l">
-              <a:spcAft>
-                <a:spcPts val="0"/>
-              </a:spcAft>
-            </a:pPr>
-            <a:r>
-              <a:rPr sz="1400" i="0">
-                <a:solidFill>
-                  <a:srgbClr val="E2E8F0"/>
-                </a:solidFill>
-                <a:latin typeface="DejaVu Sans Mono"/>
-              </a:rPr>
-              <a:t>    return s</a:t>
-            </a:r>
-          </a:p>
-          <a:p>
-            <a:pPr algn="l">
-              <a:spcAft>
-                <a:spcPts val="0"/>
-              </a:spcAft>
-            </a:pPr>
-            <a:r>
-              <a:rPr sz="1400" i="0">
-                <a:solidFill>
-                  <a:srgbClr val="E2E8F0"/>
-                </a:solidFill>
-                <a:latin typeface="DejaVu Sans Mono"/>
-              </a:rPr>
-              <a:t>}</a:t>
-            </a:r>
-          </a:p>
-          <a:p>
-            <a:pPr algn="l">
-              <a:spcAft>
-                <a:spcPts val="0"/>
-              </a:spcAft>
-            </a:pPr>
-          </a:p>
-          <a:p>
-            <a:pPr algn="l">
-              <a:spcAft>
-                <a:spcPts val="0"/>
-              </a:spcAft>
-            </a:pPr>
-            <a:r>
-              <a:rPr sz="1400" i="0">
-                <a:solidFill>
-                  <a:srgbClr val="E2E8F0"/>
-                </a:solidFill>
-                <a:latin typeface="DejaVu Sans Mono"/>
-              </a:rPr>
-              <a:t>srv := New("localhost", WithPort(9090))</a:t>
-            </a:r>
-          </a:p>
-          <a:p>
-            <a:pPr algn="l">
-              <a:spcAft>
-                <a:spcPts val="0"/>
-              </a:spcAft>
-            </a:pPr>
-            <a:r>
-              <a:rPr sz="1400" i="1">
-                <a:solidFill>
-                  <a:srgbClr val="94A3B8"/>
-                </a:solidFill>
-                <a:latin typeface="DejaVu Sans Mono"/>
-              </a:rPr>
-              <a:t>// grpc-go, zap, aws-sdk-go-v2 ล้วนใช้ pattern นี้</a:t>
-            </a:r>
-          </a:p>
-        </p:txBody>
-      </p:sp>
-      <p:sp>
-        <p:nvSpPr>
-          <p:cNvPr id="6" name="TextBox 5"/>
-          <p:cNvSpPr txBox="1"/>
-          <p:nvPr/>
-        </p:nvSpPr>
-        <p:spPr>
-          <a:xfrm>
-            <a:off x="548640" y="5440680"/>
-            <a:ext cx="11064240" cy="4937760"/>
-          </a:xfrm>
-          <a:prstGeom prst="rect">
-            <a:avLst/>
-          </a:prstGeom>
-          <a:noFill/>
-        </p:spPr>
-        <p:txBody>
-          <a:bodyPr wrap="square">
-            <a:spAutoFit/>
-          </a:bodyPr>
-          <a:lstStyle/>
-          <a:p>
-            <a:pPr algn="l">
-              <a:spcAft>
-                <a:spcPts val="800"/>
-              </a:spcAft>
-            </a:pPr>
-            <a:r>
-              <a:rPr sz="1500" b="0" i="0">
-                <a:solidFill>
-                  <a:srgbClr val="0F172A"/>
-                </a:solidFill>
-                <a:latin typeface="Noto Sans Thai Looped"/>
-              </a:rPr>
-              <a:t>• อ่านได้ว่า: WithPort(</a:t>
-            </a:r>
-            <a:r>
-              <a:rPr sz="1500" b="0" i="0">
-                <a:solidFill>
-                  <a:srgbClr val="0F172A"/>
-                </a:solidFill>
-                <a:latin typeface="Ubuntu"/>
-              </a:rPr>
-              <a:t>9090</a:t>
-            </a:r>
-            <a:r>
-              <a:rPr sz="1500" b="0" i="0">
-                <a:solidFill>
-                  <a:srgbClr val="0F172A"/>
-                </a:solidFill>
-                <a:latin typeface="Noto Sans Thai Looped"/>
-              </a:rPr>
-              <a:t>) คือ 'calculation ที่ผลิต action เล็ก ๆ' เอาไว้ยิงใส่ constructor ตอนหลัง</a:t>
-            </a:r>
-          </a:p>
-          <a:p>
-            <a:pPr algn="l">
-              <a:spcAft>
-                <a:spcPts val="800"/>
-              </a:spcAft>
-            </a:pPr>
-            <a:r>
-              <a:rPr sz="1500" b="1" i="0">
-                <a:solidFill>
-                  <a:srgbClr val="0F172A"/>
-                </a:solidFill>
-                <a:latin typeface="Noto Sans Thai Looped"/>
-              </a:rPr>
-              <a:t>• เห็นใน production จริง: grpc-go, uber-go/zap, aws-sdk-go-v</a:t>
-            </a:r>
-            <a:r>
-              <a:rPr sz="1500" b="1" i="0">
-                <a:solidFill>
-                  <a:srgbClr val="0F172A"/>
-                </a:solidFill>
-                <a:latin typeface="Ubuntu"/>
-              </a:rPr>
-              <a:t>2</a:t>
+              <a:t> ยังมีรอยแก้ i := i ทิ้งไว้ — อ่านเจอแล้วอย่าลบทิ้งโดยไม่รู้ว่ามันกันอะไร</a:t>
             </a:r>
           </a:p>
         </p:txBody>

--- a/slides/fp-in-go-workshop.pptx
+++ b/slides/fp-in-go-workshop.pptx
@@ -21,7 +21,6 @@
     <p:sldId id="269" r:id="rId21"/>
     <p:sldId id="270" r:id="rId22"/>
     <p:sldId id="271" r:id="rId23"/>
-    <p:sldId id="272" r:id="rId24"/>
   </p:sldIdLst>
   <p:sldSz cx="12191695" cy="6858000" type="screen4x3"/>
   <p:notesSz cx="6858000" cy="9144000"/>
@@ -728,7 +727,7 @@
           <a:lstStyle/>
           <a:p>
             <a:r>
-              <a:t>[1:10] ถ้าเวลาเหลือน้อยกว่า 15 นาที ณ จุดนี้ ตัดหน้านี้ทั้งหน้าได้ (พูดประโยคเดียว: 'middleware คือการเอาฟังก์ชันมาคู่กัน ลำดับมีความหมาย') แล้วกระโดดไป workshop — ไม่กระทบเรื่องเล่า</a:t>
+              <a:t>[1:10] ถ้าเวลาเหลือน้อย ตัดหน้านี้ทั้งหน้าได้ (พูดประโยคเดียว: 'middleware คือการเอาฟังก์ชันมาคู่กัน ลำดับมีความหมาย') แล้วกระโดดไปของหวาน — ไม่กระทบเรื่องเล่า</a:t>
             </a:r>
           </a:p>
         </p:txBody>
@@ -798,7 +797,7 @@
           <a:lstStyle/>
           <a:p>
             <a:r>
-              <a:t>[1:25] เดินดูรอบห้อง จุดพลาดบ่อย: (1) ลืมรักษาลำดับคูปองเดิม (2) return slice ใหม่แต่ mutate element ข้างใน — ถามกลับว่า pure จริงไหม (3) แอบเอาการหา coupon ใส่ action อีกที ผู้เรียนเปิด EXERCISE.md ตามได้</a:t>
+              <a:t>[1:25] โชว์อย่างเดียว ไม่ลงลึก: yield คืน false = ผู้อ่านสั่งหยุด ทำให้ infinite sequence ปลอดภัย แถมขำ: int ยัง overflow ถ้าดันอ่านไกล — ของจริงไม่มีอะไร infinite หน้านี้ตัดได้ถ้าเวลาโดนตัด แต่เป็นของที่คนจำได้นาน พยายามรักษาไว้</a:t>
             </a:r>
           </a:p>
         </p:txBody>
@@ -868,7 +867,7 @@
           <a:lstStyle/>
           <a:p>
             <a:r>
-              <a:t>[1:43] เฉลยสั้น ๆ จุดเน้น: action บาง = แค่ 'จุดที่โลกเปลี่ยน' ไม่มีความรู้ธุรกิจเลย ใน solution ตั้งใจไม่เขียนเทสต์ให้ action เพื่อโชว์ขอบเขต</a:t>
+              <a:t>[1:40] ปิดเนื้อหาด้วยกรอบเดียว: 3 คำถามนี้คือสิ่งที่อยากให้จำกลับบ้าน — การบ้านคือโอกาสฝึกใช้มันหน้าเดียว</a:t>
             </a:r>
           </a:p>
         </p:txBody>
@@ -938,7 +937,7 @@
           <a:lstStyle/>
           <a:p>
             <a:r>
-              <a:t>[1:45] โชว์อย่างเดียว ไม่ลงลึก: yield คืน false = ผู้อ่านสั่งหยุด ทำให้ infinite sequence ปลอดภัย แถมขำ: int ยัง overflow ถ้าดันอ่านไกล — ของจริงไม่มีอะไร infinite หน้านี้ตัดได้ถ้าเวลาโดนตัด แต่เป็นของที่คนจำได้นาน พยายามรักษาไว้</a:t>
+              <a:t>[1:48] มอบการบ้าน: ใช้เวลา ~20 นาที ใบ้จุดพลาดบ่อยไว้ด้วย — (1) ลืมรักษาลำดับคูปองเดิม (2) return slice ใหม่แต่ mutate element ข้างใน (ยังไม่ pure) (3) แอบเอาการหา coupon กลับเข้าไปใน action ครั้งหน้าเปิดเฉลยพร้อมกัน</a:t>
             </a:r>
           </a:p>
         </p:txBody>
@@ -1008,76 +1007,6 @@
           <a:lstStyle/>
           <a:p>
             <a:r>
-              <a:t>[1:52] ปิดด้วย call to action: สัปดาห์หน้าหยิบ handler ใน service ตัวเองมา 1 ตัว แยก ACD แล้วดึง calculation ออกมา 1 ชิ้น — 15 นาทีก็คุ้ม</a:t>
-            </a:r>
-          </a:p>
-        </p:txBody>
-      </p:sp>
-      <p:sp>
-        <p:nvSpPr>
-          <p:cNvPr id="4" name="Slide Number Placeholder 3"/>
-          <p:cNvSpPr>
-            <a:spLocks noGrp="1"/>
-          </p:cNvSpPr>
-          <p:nvPr>
-            <p:ph type="sldNum" idx="5" sz="quarter"/>
-          </p:nvPr>
-        </p:nvSpPr>
-        <p:spPr/>
-      </p:sp>
-    </p:spTree>
-  </p:cSld>
-  <p:clrMapOvr>
-    <a:masterClrMapping/>
-  </p:clrMapOvr>
-</p:notes>
-</file>
-
-<file path=ppt/notesSlides/notesSlide17.xml><?xml version="1.0" encoding="utf-8"?>
-<p:notes xmlns:a="http://schemas.openxmlformats.org/drawingml/2006/main" xmlns:p="http://schemas.openxmlformats.org/presentationml/2006/main" xmlns:r="http://schemas.openxmlformats.org/officeDocument/2006/relationships">
-  <p:cSld>
-    <p:spTree>
-      <p:nvGrpSpPr>
-        <p:cNvPr id="1" name=""/>
-        <p:cNvGrpSpPr/>
-        <p:nvPr/>
-      </p:nvGrpSpPr>
-      <p:grpSpPr>
-        <a:xfrm>
-          <a:off x="0" y="0"/>
-          <a:ext cx="0" cy="0"/>
-          <a:chOff x="0" y="0"/>
-          <a:chExt cx="0" cy="0"/>
-        </a:xfrm>
-      </p:grpSpPr>
-      <p:sp>
-        <p:nvSpPr>
-          <p:cNvPr id="2" name="Slide Image Placeholder 1"/>
-          <p:cNvSpPr>
-            <a:spLocks noGrp="1"/>
-          </p:cNvSpPr>
-          <p:nvPr>
-            <p:ph type="sldImg" idx="2"/>
-          </p:nvPr>
-        </p:nvSpPr>
-        <p:spPr/>
-      </p:sp>
-      <p:sp>
-        <p:nvSpPr>
-          <p:cNvPr id="3" name="Notes Placeholder 2"/>
-          <p:cNvSpPr>
-            <a:spLocks noGrp="1"/>
-          </p:cNvSpPr>
-          <p:nvPr>
-            <p:ph type="body" idx="3" sz="quarter"/>
-          </p:nvPr>
-        </p:nvSpPr>
-        <p:spPr/>
-        <p:txBody>
-          <a:bodyPr/>
-          <a:lstStyle/>
-          <a:p>
-            <a:r>
               <a:t>เผื่อ Q&amp;A: (1) ทำไม Go ไม่มี pipe operator → verbose by design + (value, error) ทำ chain ยาก (2) copy-on-write แพงไหม → benchmark ใน go-fp/08: struct เล็กต่างกัน ~0.05 ns/op (3) goroutine/channel เข้ากรอบไหน → channel คือ data, การส่ง/รับคือ action (4) ใครถาม monad → วันนี้ไม่จำเป็น แนะนำหนังสือต่อ</a:t>
             </a:r>
           </a:p>
@@ -1148,7 +1077,7 @@
           <a:lstStyle/>
           <a:p>
             <a:r>
-              <a:t>[0:02] ย้ำสัญญา: ออกจากห้องไปด้วยทักษะ ไม่ใช่ความรู้ลอย ๆ — เล่า flow วันนี้สั้น ๆ: ครึ่งแรกดูโค้ด ครึ่งหลังลงมือทำ (เวลาเริ่มเบี้ยว: middleware เป็นตัวตัดก่อน)</a:t>
+              <a:t>[0:02] ย้ำสัญญา: ออกจากห้องไปด้วยทักษะ ไม่ใช่ความรู้ลอย ๆ — เล่า flow วันนี้สั้น ๆ: ดูโค้ด เขียนโค้ด แล้วมีการบ้านไปต่อที่บ้าน (เวลาเริ่มเบี้ยว: middleware เป็นตัวตัดก่อน)</a:t>
             </a:r>
           </a:p>
         </p:txBody>
@@ -6359,1255 +6288,6 @@
                 </a:solidFill>
                 <a:latin typeface="Noto Sans Thai Looped"/>
               </a:rPr>
-              <a:t>Workshop: แยกคูปองออกจากการส่งอีเมล</a:t>
-            </a:r>
-          </a:p>
-          <a:p>
-            <a:pPr algn="l">
-              <a:spcAft>
-                <a:spcPts val="600"/>
-              </a:spcAft>
-            </a:pPr>
-            <a:r>
-              <a:rPr sz="1500" b="0" i="0">
-                <a:solidFill>
-                  <a:srgbClr val="64748B"/>
-                </a:solidFill>
-                <a:latin typeface="Noto Sans Thai Looped"/>
-              </a:rPr>
-              <a:t>โจทย์จาก Grokking Simplicity บท </a:t>
-            </a:r>
-            <a:r>
-              <a:rPr sz="1500" b="0" i="0">
-                <a:solidFill>
-                  <a:srgbClr val="64748B"/>
-                </a:solidFill>
-                <a:latin typeface="Ubuntu"/>
-              </a:rPr>
-              <a:t>3–5</a:t>
-            </a:r>
-            <a:r>
-              <a:rPr sz="1500" b="0" i="0">
-                <a:solidFill>
-                  <a:srgbClr val="64748B"/>
-                </a:solidFill>
-                <a:latin typeface="Noto Sans Thai Looped"/>
-              </a:rPr>
-              <a:t> พอร์ตเป็น Go — repo: go-fp/</a:t>
-            </a:r>
-            <a:r>
-              <a:rPr sz="1500" b="0" i="0">
-                <a:solidFill>
-                  <a:srgbClr val="64748B"/>
-                </a:solidFill>
-                <a:latin typeface="Ubuntu"/>
-              </a:rPr>
-              <a:t>07-</a:t>
-            </a:r>
-            <a:r>
-              <a:rPr sz="1500" b="0" i="0">
-                <a:solidFill>
-                  <a:srgbClr val="64748B"/>
-                </a:solidFill>
-                <a:latin typeface="Noto Sans Thai Looped"/>
-              </a:rPr>
-              <a:t>coupon-email-exercise</a:t>
-            </a:r>
-          </a:p>
-        </p:txBody>
-      </p:sp>
-      <p:sp>
-        <p:nvSpPr>
-          <p:cNvPr id="3" name="Rectangle 2"/>
-          <p:cNvSpPr/>
-          <p:nvPr/>
-        </p:nvSpPr>
-        <p:spPr>
-          <a:xfrm>
-            <a:off x="502920" y="1207008"/>
-            <a:ext cx="11201400" cy="27940"/>
-          </a:xfrm>
-          <a:prstGeom prst="rect">
-            <a:avLst/>
-          </a:prstGeom>
-          <a:solidFill>
-            <a:srgbClr val="0D9488"/>
-          </a:solidFill>
-          <a:ln>
-            <a:noFill/>
-          </a:ln>
-        </p:spPr>
-        <p:style>
-          <a:lnRef idx="1">
-            <a:schemeClr val="accent1"/>
-          </a:lnRef>
-          <a:fillRef idx="3">
-            <a:schemeClr val="accent1"/>
-          </a:fillRef>
-          <a:effectRef idx="2">
-            <a:schemeClr val="accent1"/>
-          </a:effectRef>
-          <a:fontRef idx="minor">
-            <a:schemeClr val="lt1"/>
-          </a:fontRef>
-        </p:style>
-        <p:txBody>
-          <a:bodyPr rtlCol="0" anchor="ctr"/>
-          <a:lstStyle/>
-          <a:p>
-            <a:pPr algn="ctr"/>
-          </a:p>
-        </p:txBody>
-      </p:sp>
-      <p:sp>
-        <p:nvSpPr>
-          <p:cNvPr id="4" name="Rounded Rectangle 3"/>
-          <p:cNvSpPr/>
-          <p:nvPr/>
-        </p:nvSpPr>
-        <p:spPr>
-          <a:xfrm>
-            <a:off x="548640" y="1874519"/>
-            <a:ext cx="6035040" cy="4114800"/>
-          </a:xfrm>
-          <a:prstGeom prst="roundRect">
-            <a:avLst/>
-          </a:prstGeom>
-          <a:solidFill>
-            <a:srgbClr val="1E1E2E"/>
-          </a:solidFill>
-          <a:ln>
-            <a:noFill/>
-          </a:ln>
-          <a:effectLst/>
-        </p:spPr>
-        <p:style>
-          <a:lnRef idx="1">
-            <a:schemeClr val="accent1"/>
-          </a:lnRef>
-          <a:fillRef idx="3">
-            <a:schemeClr val="accent1"/>
-          </a:fillRef>
-          <a:effectRef idx="2">
-            <a:schemeClr val="accent1"/>
-          </a:effectRef>
-          <a:fontRef idx="minor">
-            <a:schemeClr val="lt1"/>
-          </a:fontRef>
-        </p:style>
-        <p:txBody>
-          <a:bodyPr rtlCol="0" anchor="t" wrap="none" lIns="164592" rIns="109728" tIns="109728"/>
-          <a:lstStyle/>
-          <a:p>
-            <a:pPr algn="l">
-              <a:spcAft>
-                <a:spcPts val="0"/>
-              </a:spcAft>
-            </a:pPr>
-            <a:r>
-              <a:rPr sz="1200" i="1">
-                <a:solidFill>
-                  <a:srgbClr val="94A3B8"/>
-                </a:solidFill>
-                <a:latin typeface="DejaVu Sans Mono"/>
-              </a:rPr>
-              <a:t>// ทุกอย่างอยู่ในฟังก์ชันเดียว — มองแล้วเจออะไรบ้าง?</a:t>
-            </a:r>
-          </a:p>
-          <a:p>
-            <a:pPr algn="l">
-              <a:spcAft>
-                <a:spcPts val="0"/>
-              </a:spcAft>
-            </a:pPr>
-            <a:r>
-              <a:rPr sz="1200" i="0">
-                <a:solidFill>
-                  <a:srgbClr val="E2E8F0"/>
-                </a:solidFill>
-                <a:latin typeface="DejaVu Sans Mono"/>
-              </a:rPr>
-              <a:t>func EmailCoupons(cart Cart, coupons []Coupon,</a:t>
-            </a:r>
-          </a:p>
-          <a:p>
-            <a:pPr algn="l">
-              <a:spcAft>
-                <a:spcPts val="0"/>
-              </a:spcAft>
-            </a:pPr>
-            <a:r>
-              <a:rPr sz="1200" i="0">
-                <a:solidFill>
-                  <a:srgbClr val="E2E8F0"/>
-                </a:solidFill>
-                <a:latin typeface="DejaVu Sans Mono"/>
-              </a:rPr>
-              <a:t>    out io.Writer) error {</a:t>
-            </a:r>
-          </a:p>
-          <a:p>
-            <a:pPr algn="l">
-              <a:spcAft>
-                <a:spcPts val="0"/>
-              </a:spcAft>
-            </a:pPr>
-            <a:r>
-              <a:rPr sz="1200" i="0">
-                <a:solidFill>
-                  <a:srgbClr val="E2E8F0"/>
-                </a:solidFill>
-                <a:latin typeface="DejaVu Sans Mono"/>
-              </a:rPr>
-              <a:t>    fmt.Printf("finding coupons for %s\n", cart.Email)</a:t>
-            </a:r>
-          </a:p>
-          <a:p>
-            <a:pPr algn="l">
-              <a:spcAft>
-                <a:spcPts val="0"/>
-              </a:spcAft>
-            </a:pPr>
-            <a:r>
-              <a:rPr sz="1200" i="0">
-                <a:solidFill>
-                  <a:srgbClr val="E2E8F0"/>
-                </a:solidFill>
-                <a:latin typeface="DejaVu Sans Mono"/>
-              </a:rPr>
-              <a:t>    var codes []string</a:t>
-            </a:r>
-          </a:p>
-          <a:p>
-            <a:pPr algn="l">
-              <a:spcAft>
-                <a:spcPts val="0"/>
-              </a:spcAft>
-            </a:pPr>
-            <a:r>
-              <a:rPr sz="1200" i="0">
-                <a:solidFill>
-                  <a:srgbClr val="E2E8F0"/>
-                </a:solidFill>
-                <a:latin typeface="DejaVu Sans Mono"/>
-              </a:rPr>
-              <a:t>    for _, c := range coupons {</a:t>
-            </a:r>
-          </a:p>
-          <a:p>
-            <a:pPr algn="l">
-              <a:spcAft>
-                <a:spcPts val="0"/>
-              </a:spcAft>
-            </a:pPr>
-            <a:r>
-              <a:rPr sz="1200" i="0">
-                <a:solidFill>
-                  <a:srgbClr val="E2E8F0"/>
-                </a:solidFill>
-                <a:latin typeface="DejaVu Sans Mono"/>
-              </a:rPr>
-              <a:t>        if cart.Total &gt;= c.MinimumTotal &amp;&amp;</a:t>
-            </a:r>
-          </a:p>
-          <a:p>
-            <a:pPr algn="l">
-              <a:spcAft>
-                <a:spcPts val="0"/>
-              </a:spcAft>
-            </a:pPr>
-            <a:r>
-              <a:rPr sz="1200" i="0">
-                <a:solidFill>
-                  <a:srgbClr val="E2E8F0"/>
-                </a:solidFill>
-                <a:latin typeface="DejaVu Sans Mono"/>
-              </a:rPr>
-              <a:t>            (c.Category == "" || c.Category == cart.Category) {</a:t>
-            </a:r>
-          </a:p>
-          <a:p>
-            <a:pPr algn="l">
-              <a:spcAft>
-                <a:spcPts val="0"/>
-              </a:spcAft>
-            </a:pPr>
-            <a:r>
-              <a:rPr sz="1200" i="0">
-                <a:solidFill>
-                  <a:srgbClr val="E2E8F0"/>
-                </a:solidFill>
-                <a:latin typeface="DejaVu Sans Mono"/>
-              </a:rPr>
-              <a:t>            codes = append(codes, c.Code)</a:t>
-            </a:r>
-          </a:p>
-          <a:p>
-            <a:pPr algn="l">
-              <a:spcAft>
-                <a:spcPts val="0"/>
-              </a:spcAft>
-            </a:pPr>
-            <a:r>
-              <a:rPr sz="1200" i="0">
-                <a:solidFill>
-                  <a:srgbClr val="E2E8F0"/>
-                </a:solidFill>
-                <a:latin typeface="DejaVu Sans Mono"/>
-              </a:rPr>
-              <a:t>        }</a:t>
-            </a:r>
-          </a:p>
-          <a:p>
-            <a:pPr algn="l">
-              <a:spcAft>
-                <a:spcPts val="0"/>
-              </a:spcAft>
-            </a:pPr>
-            <a:r>
-              <a:rPr sz="1200" i="0">
-                <a:solidFill>
-                  <a:srgbClr val="E2E8F0"/>
-                </a:solidFill>
-                <a:latin typeface="DejaVu Sans Mono"/>
-              </a:rPr>
-              <a:t>    }</a:t>
-            </a:r>
-          </a:p>
-          <a:p>
-            <a:pPr algn="l">
-              <a:spcAft>
-                <a:spcPts val="0"/>
-              </a:spcAft>
-            </a:pPr>
-            <a:r>
-              <a:rPr sz="1200" i="0">
-                <a:solidFill>
-                  <a:srgbClr val="E2E8F0"/>
-                </a:solidFill>
-                <a:latin typeface="DejaVu Sans Mono"/>
-              </a:rPr>
-              <a:t>    _, err := fmt.Fprintf(out,</a:t>
-            </a:r>
-          </a:p>
-          <a:p>
-            <a:pPr algn="l">
-              <a:spcAft>
-                <a:spcPts val="0"/>
-              </a:spcAft>
-            </a:pPr>
-            <a:r>
-              <a:rPr sz="1200" i="0">
-                <a:solidFill>
-                  <a:srgbClr val="E2E8F0"/>
-                </a:solidFill>
-                <a:latin typeface="DejaVu Sans Mono"/>
-              </a:rPr>
-              <a:t>        "To: %s\nCoupons: %v\n", cart.Email, codes)</a:t>
-            </a:r>
-          </a:p>
-          <a:p>
-            <a:pPr algn="l">
-              <a:spcAft>
-                <a:spcPts val="0"/>
-              </a:spcAft>
-            </a:pPr>
-            <a:r>
-              <a:rPr sz="1200" i="0">
-                <a:solidFill>
-                  <a:srgbClr val="E2E8F0"/>
-                </a:solidFill>
-                <a:latin typeface="DejaVu Sans Mono"/>
-              </a:rPr>
-              <a:t>    return err</a:t>
-            </a:r>
-          </a:p>
-          <a:p>
-            <a:pPr algn="l">
-              <a:spcAft>
-                <a:spcPts val="0"/>
-              </a:spcAft>
-            </a:pPr>
-            <a:r>
-              <a:rPr sz="1200" i="0">
-                <a:solidFill>
-                  <a:srgbClr val="E2E8F0"/>
-                </a:solidFill>
-                <a:latin typeface="DejaVu Sans Mono"/>
-              </a:rPr>
-              <a:t>}</a:t>
-            </a:r>
-          </a:p>
-        </p:txBody>
-      </p:sp>
-      <p:sp>
-        <p:nvSpPr>
-          <p:cNvPr id="5" name="Rounded Rectangle 4"/>
-          <p:cNvSpPr/>
-          <p:nvPr/>
-        </p:nvSpPr>
-        <p:spPr>
-          <a:xfrm>
-            <a:off x="548640" y="1563623"/>
-            <a:ext cx="2176272" cy="274320"/>
-          </a:xfrm>
-          <a:prstGeom prst="roundRect">
-            <a:avLst/>
-          </a:prstGeom>
-          <a:solidFill>
-            <a:srgbClr val="DC2626"/>
-          </a:solidFill>
-          <a:ln>
-            <a:noFill/>
-          </a:ln>
-          <a:effectLst/>
-        </p:spPr>
-        <p:style>
-          <a:lnRef idx="1">
-            <a:schemeClr val="accent1"/>
-          </a:lnRef>
-          <a:fillRef idx="3">
-            <a:schemeClr val="accent1"/>
-          </a:fillRef>
-          <a:effectRef idx="2">
-            <a:schemeClr val="accent1"/>
-          </a:effectRef>
-          <a:fontRef idx="minor">
-            <a:schemeClr val="lt1"/>
-          </a:fontRef>
-        </p:style>
-        <p:txBody>
-          <a:bodyPr rtlCol="0" anchor="ctr" tIns="0" bIns="0"/>
-          <a:lstStyle/>
-          <a:p>
-            <a:pPr algn="l">
-              <a:spcAft>
-                <a:spcPts val="0"/>
-              </a:spcAft>
-            </a:pPr>
-            <a:r>
-              <a:rPr sz="1200" b="1" i="0">
-                <a:solidFill>
-                  <a:srgbClr val="FFFFFF"/>
-                </a:solidFill>
-                <a:latin typeface="Noto Sans Thai Looped"/>
-              </a:rPr>
-              <a:t>starter/coupons.go</a:t>
-            </a:r>
-          </a:p>
-        </p:txBody>
-      </p:sp>
-      <p:sp>
-        <p:nvSpPr>
-          <p:cNvPr id="6" name="TextBox 5"/>
-          <p:cNvSpPr txBox="1"/>
-          <p:nvPr/>
-        </p:nvSpPr>
-        <p:spPr>
-          <a:xfrm>
-            <a:off x="6858000" y="1920240"/>
-            <a:ext cx="4846320" cy="4114800"/>
-          </a:xfrm>
-          <a:prstGeom prst="rect">
-            <a:avLst/>
-          </a:prstGeom>
-          <a:noFill/>
-        </p:spPr>
-        <p:txBody>
-          <a:bodyPr wrap="square">
-            <a:spAutoFit/>
-          </a:bodyPr>
-          <a:lstStyle/>
-          <a:p>
-            <a:pPr algn="l">
-              <a:spcAft>
-                <a:spcPts val="600"/>
-              </a:spcAft>
-            </a:pPr>
-            <a:r>
-              <a:rPr sz="1800" b="1" i="0">
-                <a:solidFill>
-                  <a:srgbClr val="0D9488"/>
-                </a:solidFill>
-                <a:latin typeface="Noto Sans Thai Looped"/>
-              </a:rPr>
-              <a:t>โจทย์ของคุณ</a:t>
-            </a:r>
-          </a:p>
-          <a:p>
-            <a:pPr algn="l">
-              <a:spcAft>
-                <a:spcPts val="800"/>
-              </a:spcAft>
-            </a:pPr>
-            <a:r>
-              <a:rPr sz="1500" b="0" i="0">
-                <a:solidFill>
-                  <a:srgbClr val="0F172A"/>
-                </a:solidFill>
-                <a:latin typeface="Ubuntu"/>
-              </a:rPr>
-              <a:t>1.</a:t>
-            </a:r>
-            <a:r>
-              <a:rPr sz="1500" b="0" i="0">
-                <a:solidFill>
-                  <a:srgbClr val="0F172A"/>
-                </a:solidFill>
-                <a:latin typeface="Noto Sans Thai Looped"/>
-              </a:rPr>
-              <a:t> แยก A/C/D ให้ครบ (</a:t>
-            </a:r>
-            <a:r>
-              <a:rPr sz="1500" b="0" i="0">
-                <a:solidFill>
-                  <a:srgbClr val="0F172A"/>
-                </a:solidFill>
-                <a:latin typeface="Ubuntu"/>
-              </a:rPr>
-              <a:t>3</a:t>
-            </a:r>
-            <a:r>
-              <a:rPr sz="1500" b="0" i="0">
-                <a:solidFill>
-                  <a:srgbClr val="0F172A"/>
-                </a:solidFill>
-                <a:latin typeface="Noto Sans Thai Looped"/>
-              </a:rPr>
-              <a:t> น.)</a:t>
-            </a:r>
-          </a:p>
-          <a:p>
-            <a:pPr algn="l">
-              <a:spcAft>
-                <a:spcPts val="800"/>
-              </a:spcAft>
-            </a:pPr>
-            <a:r>
-              <a:rPr sz="1500" b="0" i="0">
-                <a:solidFill>
-                  <a:srgbClr val="0F172A"/>
-                </a:solidFill>
-                <a:latin typeface="Ubuntu"/>
-              </a:rPr>
-              <a:t>2.</a:t>
-            </a:r>
-            <a:r>
-              <a:rPr sz="1500" b="0" i="0">
-                <a:solidFill>
-                  <a:srgbClr val="0F172A"/>
-                </a:solidFill>
-                <a:latin typeface="Noto Sans Thai Looped"/>
-              </a:rPr>
-              <a:t> ดึง FindApplicableCoupons ออกมา — เขียน table-driven test ก่อน implementation (</a:t>
-            </a:r>
-            <a:r>
-              <a:rPr sz="1500" b="0" i="0">
-                <a:solidFill>
-                  <a:srgbClr val="0F172A"/>
-                </a:solidFill>
-                <a:latin typeface="Ubuntu"/>
-              </a:rPr>
-              <a:t>10</a:t>
-            </a:r>
-            <a:r>
-              <a:rPr sz="1500" b="0" i="0">
-                <a:solidFill>
-                  <a:srgbClr val="0F172A"/>
-                </a:solidFill>
-                <a:latin typeface="Noto Sans Thai Looped"/>
-              </a:rPr>
-              <a:t> น.)</a:t>
-            </a:r>
-          </a:p>
-          <a:p>
-            <a:pPr algn="l">
-              <a:spcAft>
-                <a:spcPts val="800"/>
-              </a:spcAft>
-            </a:pPr>
-            <a:r>
-              <a:rPr sz="1500" b="0" i="0">
-                <a:solidFill>
-                  <a:srgbClr val="0F172A"/>
-                </a:solidFill>
-                <a:latin typeface="Ubuntu"/>
-              </a:rPr>
-              <a:t>3.</a:t>
-            </a:r>
-            <a:r>
-              <a:rPr sz="1500" b="0" i="0">
-                <a:solidFill>
-                  <a:srgbClr val="0F172A"/>
-                </a:solidFill>
-                <a:latin typeface="Noto Sans Thai Looped"/>
-              </a:rPr>
-              <a:t> เหลือ SendCouponEmail เป็น action บาง ๆ (</a:t>
-            </a:r>
-            <a:r>
-              <a:rPr sz="1500" b="0" i="0">
-                <a:solidFill>
-                  <a:srgbClr val="0F172A"/>
-                </a:solidFill>
-                <a:latin typeface="Ubuntu"/>
-              </a:rPr>
-              <a:t>5</a:t>
-            </a:r>
-            <a:r>
-              <a:rPr sz="1500" b="0" i="0">
-                <a:solidFill>
-                  <a:srgbClr val="0F172A"/>
-                </a:solidFill>
-                <a:latin typeface="Noto Sans Thai Looped"/>
-              </a:rPr>
-              <a:t> น.)</a:t>
-            </a:r>
-          </a:p>
-          <a:p>
-            <a:pPr algn="l">
-              <a:spcAft>
-                <a:spcPts val="800"/>
-              </a:spcAft>
-            </a:pPr>
-            <a:r>
-              <a:rPr sz="1500" b="0" i="0">
-                <a:solidFill>
-                  <a:srgbClr val="0F172A"/>
-                </a:solidFill>
-                <a:latin typeface="Ubuntu"/>
-              </a:rPr>
-              <a:t>4.</a:t>
-            </a:r>
-            <a:r>
-              <a:rPr sz="1500" b="0" i="0">
-                <a:solidFill>
-                  <a:srgbClr val="0F172A"/>
-                </a:solidFill>
-                <a:latin typeface="Noto Sans Thai Looped"/>
-              </a:rPr>
-              <a:t> เทียบกับ solution/ (</a:t>
-            </a:r>
-            <a:r>
-              <a:rPr sz="1500" b="0" i="0">
-                <a:solidFill>
-                  <a:srgbClr val="0F172A"/>
-                </a:solidFill>
-                <a:latin typeface="Ubuntu"/>
-              </a:rPr>
-              <a:t>2</a:t>
-            </a:r>
-            <a:r>
-              <a:rPr sz="1500" b="0" i="0">
-                <a:solidFill>
-                  <a:srgbClr val="0F172A"/>
-                </a:solidFill>
-                <a:latin typeface="Noto Sans Thai Looped"/>
-              </a:rPr>
-              <a:t> น.)</a:t>
-            </a:r>
-          </a:p>
-          <a:p>
-            <a:pPr algn="l">
-              <a:spcAft>
-                <a:spcPts val="600"/>
-              </a:spcAft>
-            </a:pPr>
-            <a:r>
-              <a:rPr sz="1300" b="0" i="1">
-                <a:solidFill>
-                  <a:srgbClr val="64748B"/>
-                </a:solidFill>
-                <a:latin typeface="Noto Sans Thai Looped"/>
-              </a:rPr>
-              <a:t>กติกาโจทย์: เงินเป็นบาทเต็มไม่ติดลบ · coupon ไม่มีหมวด = ใช้ได้ทุกหมวด · รักษาลำดับเดิม</a:t>
-            </a:r>
-          </a:p>
-        </p:txBody>
-      </p:sp>
-    </p:spTree>
-  </p:cSld>
-  <p:clrMapOvr>
-    <a:masterClrMapping/>
-  </p:clrMapOvr>
-</p:sld>
-</file>
-
-<file path=ppt/slides/slide14.xml><?xml version="1.0" encoding="utf-8"?>
-<p:sld xmlns:a="http://schemas.openxmlformats.org/drawingml/2006/main" xmlns:p="http://schemas.openxmlformats.org/presentationml/2006/main" xmlns:r="http://schemas.openxmlformats.org/officeDocument/2006/relationships">
-  <p:cSld>
-    <p:spTree>
-      <p:nvGrpSpPr>
-        <p:cNvPr id="1" name=""/>
-        <p:cNvGrpSpPr/>
-        <p:nvPr/>
-      </p:nvGrpSpPr>
-      <p:grpSpPr/>
-      <p:sp>
-        <p:nvSpPr>
-          <p:cNvPr id="2" name="TextBox 1"/>
-          <p:cNvSpPr txBox="1"/>
-          <p:nvPr/>
-        </p:nvSpPr>
-        <p:spPr>
-          <a:xfrm>
-            <a:off x="502920" y="292608"/>
-            <a:ext cx="11155680" cy="914400"/>
-          </a:xfrm>
-          <a:prstGeom prst="rect">
-            <a:avLst/>
-          </a:prstGeom>
-          <a:noFill/>
-        </p:spPr>
-        <p:txBody>
-          <a:bodyPr wrap="square">
-            <a:spAutoFit/>
-          </a:bodyPr>
-          <a:lstStyle/>
-          <a:p>
-            <a:pPr algn="l">
-              <a:spcAft>
-                <a:spcPts val="200"/>
-              </a:spcAft>
-            </a:pPr>
-            <a:r>
-              <a:rPr sz="3000" b="1" i="0">
-                <a:solidFill>
-                  <a:srgbClr val="0F172A"/>
-                </a:solidFill>
-                <a:latin typeface="Noto Sans Thai Looped"/>
-              </a:rPr>
-              <a:t>เฉลย: calculation ที่ pure เต็มตัว + action ที่บางที่สุด</a:t>
-            </a:r>
-          </a:p>
-        </p:txBody>
-      </p:sp>
-      <p:sp>
-        <p:nvSpPr>
-          <p:cNvPr id="3" name="Rectangle 2"/>
-          <p:cNvSpPr/>
-          <p:nvPr/>
-        </p:nvSpPr>
-        <p:spPr>
-          <a:xfrm>
-            <a:off x="502920" y="1207008"/>
-            <a:ext cx="11201400" cy="27940"/>
-          </a:xfrm>
-          <a:prstGeom prst="rect">
-            <a:avLst/>
-          </a:prstGeom>
-          <a:solidFill>
-            <a:srgbClr val="0D9488"/>
-          </a:solidFill>
-          <a:ln>
-            <a:noFill/>
-          </a:ln>
-        </p:spPr>
-        <p:style>
-          <a:lnRef idx="1">
-            <a:schemeClr val="accent1"/>
-          </a:lnRef>
-          <a:fillRef idx="3">
-            <a:schemeClr val="accent1"/>
-          </a:fillRef>
-          <a:effectRef idx="2">
-            <a:schemeClr val="accent1"/>
-          </a:effectRef>
-          <a:fontRef idx="minor">
-            <a:schemeClr val="lt1"/>
-          </a:fontRef>
-        </p:style>
-        <p:txBody>
-          <a:bodyPr rtlCol="0" anchor="ctr"/>
-          <a:lstStyle/>
-          <a:p>
-            <a:pPr algn="ctr"/>
-          </a:p>
-        </p:txBody>
-      </p:sp>
-      <p:sp>
-        <p:nvSpPr>
-          <p:cNvPr id="4" name="Rounded Rectangle 3"/>
-          <p:cNvSpPr/>
-          <p:nvPr/>
-        </p:nvSpPr>
-        <p:spPr>
-          <a:xfrm>
-            <a:off x="548640" y="1691640"/>
-            <a:ext cx="7132320" cy="4023360"/>
-          </a:xfrm>
-          <a:prstGeom prst="roundRect">
-            <a:avLst/>
-          </a:prstGeom>
-          <a:solidFill>
-            <a:srgbClr val="1E1E2E"/>
-          </a:solidFill>
-          <a:ln>
-            <a:noFill/>
-          </a:ln>
-          <a:effectLst/>
-        </p:spPr>
-        <p:style>
-          <a:lnRef idx="1">
-            <a:schemeClr val="accent1"/>
-          </a:lnRef>
-          <a:fillRef idx="3">
-            <a:schemeClr val="accent1"/>
-          </a:fillRef>
-          <a:effectRef idx="2">
-            <a:schemeClr val="accent1"/>
-          </a:effectRef>
-          <a:fontRef idx="minor">
-            <a:schemeClr val="lt1"/>
-          </a:fontRef>
-        </p:style>
-        <p:txBody>
-          <a:bodyPr rtlCol="0" anchor="t" wrap="none" lIns="164592" rIns="109728" tIns="109728"/>
-          <a:lstStyle/>
-          <a:p>
-            <a:pPr algn="l">
-              <a:spcAft>
-                <a:spcPts val="0"/>
-              </a:spcAft>
-            </a:pPr>
-            <a:r>
-              <a:rPr sz="1300" i="1">
-                <a:solidFill>
-                  <a:srgbClr val="94A3B8"/>
-                </a:solidFill>
-                <a:latin typeface="DejaVu Sans Mono"/>
-              </a:rPr>
-              <a:t>// Calculation — pure: input เดิม ได้คูปองชุดเดิมเสมอ</a:t>
-            </a:r>
-          </a:p>
-          <a:p>
-            <a:pPr algn="l">
-              <a:spcAft>
-                <a:spcPts val="0"/>
-              </a:spcAft>
-            </a:pPr>
-            <a:r>
-              <a:rPr sz="1300" i="0">
-                <a:solidFill>
-                  <a:srgbClr val="E2E8F0"/>
-                </a:solidFill>
-                <a:latin typeface="DejaVu Sans Mono"/>
-              </a:rPr>
-              <a:t>func FindApplicableCoupons(cart Cart,</a:t>
-            </a:r>
-          </a:p>
-          <a:p>
-            <a:pPr algn="l">
-              <a:spcAft>
-                <a:spcPts val="0"/>
-              </a:spcAft>
-            </a:pPr>
-            <a:r>
-              <a:rPr sz="1300" i="0">
-                <a:solidFill>
-                  <a:srgbClr val="E2E8F0"/>
-                </a:solidFill>
-                <a:latin typeface="DejaVu Sans Mono"/>
-              </a:rPr>
-              <a:t>    coupons []Coupon) []Coupon {</a:t>
-            </a:r>
-          </a:p>
-          <a:p>
-            <a:pPr algn="l">
-              <a:spcAft>
-                <a:spcPts val="0"/>
-              </a:spcAft>
-            </a:pPr>
-            <a:r>
-              <a:rPr sz="1300" i="0">
-                <a:solidFill>
-                  <a:srgbClr val="E2E8F0"/>
-                </a:solidFill>
-                <a:latin typeface="DejaVu Sans Mono"/>
-              </a:rPr>
-              <a:t>    result := make([]Coupon, 0)</a:t>
-            </a:r>
-          </a:p>
-          <a:p>
-            <a:pPr algn="l">
-              <a:spcAft>
-                <a:spcPts val="0"/>
-              </a:spcAft>
-            </a:pPr>
-            <a:r>
-              <a:rPr sz="1300" i="0">
-                <a:solidFill>
-                  <a:srgbClr val="E2E8F0"/>
-                </a:solidFill>
-                <a:latin typeface="DejaVu Sans Mono"/>
-              </a:rPr>
-              <a:t>    for _, c := range coupons {</a:t>
-            </a:r>
-          </a:p>
-          <a:p>
-            <a:pPr algn="l">
-              <a:spcAft>
-                <a:spcPts val="0"/>
-              </a:spcAft>
-            </a:pPr>
-            <a:r>
-              <a:rPr sz="1300" i="0">
-                <a:solidFill>
-                  <a:srgbClr val="E2E8F0"/>
-                </a:solidFill>
-                <a:latin typeface="DejaVu Sans Mono"/>
-              </a:rPr>
-              <a:t>        if cart.Total &gt;= c.MinimumTotal &amp;&amp;</a:t>
-            </a:r>
-          </a:p>
-          <a:p>
-            <a:pPr algn="l">
-              <a:spcAft>
-                <a:spcPts val="0"/>
-              </a:spcAft>
-            </a:pPr>
-            <a:r>
-              <a:rPr sz="1300" i="0">
-                <a:solidFill>
-                  <a:srgbClr val="E2E8F0"/>
-                </a:solidFill>
-                <a:latin typeface="DejaVu Sans Mono"/>
-              </a:rPr>
-              <a:t>            (c.Category == "" || c.Category == cart.Category) {</a:t>
-            </a:r>
-          </a:p>
-          <a:p>
-            <a:pPr algn="l">
-              <a:spcAft>
-                <a:spcPts val="0"/>
-              </a:spcAft>
-            </a:pPr>
-            <a:r>
-              <a:rPr sz="1300" i="0">
-                <a:solidFill>
-                  <a:srgbClr val="E2E8F0"/>
-                </a:solidFill>
-                <a:latin typeface="DejaVu Sans Mono"/>
-              </a:rPr>
-              <a:t>            result = append(result, c)</a:t>
-            </a:r>
-          </a:p>
-          <a:p>
-            <a:pPr algn="l">
-              <a:spcAft>
-                <a:spcPts val="0"/>
-              </a:spcAft>
-            </a:pPr>
-            <a:r>
-              <a:rPr sz="1300" i="0">
-                <a:solidFill>
-                  <a:srgbClr val="E2E8F0"/>
-                </a:solidFill>
-                <a:latin typeface="DejaVu Sans Mono"/>
-              </a:rPr>
-              <a:t>        }</a:t>
-            </a:r>
-          </a:p>
-          <a:p>
-            <a:pPr algn="l">
-              <a:spcAft>
-                <a:spcPts val="0"/>
-              </a:spcAft>
-            </a:pPr>
-            <a:r>
-              <a:rPr sz="1300" i="0">
-                <a:solidFill>
-                  <a:srgbClr val="E2E8F0"/>
-                </a:solidFill>
-                <a:latin typeface="DejaVu Sans Mono"/>
-              </a:rPr>
-              <a:t>    }</a:t>
-            </a:r>
-          </a:p>
-          <a:p>
-            <a:pPr algn="l">
-              <a:spcAft>
-                <a:spcPts val="0"/>
-              </a:spcAft>
-            </a:pPr>
-            <a:r>
-              <a:rPr sz="1300" i="0">
-                <a:solidFill>
-                  <a:srgbClr val="E2E8F0"/>
-                </a:solidFill>
-                <a:latin typeface="DejaVu Sans Mono"/>
-              </a:rPr>
-              <a:t>    return result</a:t>
-            </a:r>
-          </a:p>
-          <a:p>
-            <a:pPr algn="l">
-              <a:spcAft>
-                <a:spcPts val="0"/>
-              </a:spcAft>
-            </a:pPr>
-            <a:r>
-              <a:rPr sz="1300" i="0">
-                <a:solidFill>
-                  <a:srgbClr val="E2E8F0"/>
-                </a:solidFill>
-                <a:latin typeface="DejaVu Sans Mono"/>
-              </a:rPr>
-              <a:t>}</a:t>
-            </a:r>
-          </a:p>
-          <a:p>
-            <a:pPr algn="l">
-              <a:spcAft>
-                <a:spcPts val="0"/>
-              </a:spcAft>
-            </a:pPr>
-          </a:p>
-          <a:p>
-            <a:pPr algn="l">
-              <a:spcAft>
-                <a:spcPts val="0"/>
-              </a:spcAft>
-            </a:pPr>
-            <a:r>
-              <a:rPr sz="1300" i="1">
-                <a:solidFill>
-                  <a:srgbClr val="94A3B8"/>
-                </a:solidFill>
-                <a:latin typeface="DejaVu Sans Mono"/>
-              </a:rPr>
-              <a:t>// Action — เหลือแค่ "จุดที่โลกเปลี่ยน"</a:t>
-            </a:r>
-          </a:p>
-          <a:p>
-            <a:pPr algn="l">
-              <a:spcAft>
-                <a:spcPts val="0"/>
-              </a:spcAft>
-            </a:pPr>
-            <a:r>
-              <a:rPr sz="1300" i="0">
-                <a:solidFill>
-                  <a:srgbClr val="E2E8F0"/>
-                </a:solidFill>
-                <a:latin typeface="DejaVu Sans Mono"/>
-              </a:rPr>
-              <a:t>func SendCouponEmail(out io.Writer, email string,</a:t>
-            </a:r>
-          </a:p>
-          <a:p>
-            <a:pPr algn="l">
-              <a:spcAft>
-                <a:spcPts val="0"/>
-              </a:spcAft>
-            </a:pPr>
-            <a:r>
-              <a:rPr sz="1300" i="0">
-                <a:solidFill>
-                  <a:srgbClr val="E2E8F0"/>
-                </a:solidFill>
-                <a:latin typeface="DejaVu Sans Mono"/>
-              </a:rPr>
-              <a:t>    coupons []Coupon) error { ... }</a:t>
-            </a:r>
-          </a:p>
-        </p:txBody>
-      </p:sp>
-      <p:sp>
-        <p:nvSpPr>
-          <p:cNvPr id="5" name="Rounded Rectangle 4"/>
-          <p:cNvSpPr/>
-          <p:nvPr/>
-        </p:nvSpPr>
-        <p:spPr>
-          <a:xfrm>
-            <a:off x="548640" y="1380744"/>
-            <a:ext cx="1271016" cy="274320"/>
-          </a:xfrm>
-          <a:prstGeom prst="roundRect">
-            <a:avLst/>
-          </a:prstGeom>
-          <a:solidFill>
-            <a:srgbClr val="16A34A"/>
-          </a:solidFill>
-          <a:ln>
-            <a:noFill/>
-          </a:ln>
-          <a:effectLst/>
-        </p:spPr>
-        <p:style>
-          <a:lnRef idx="1">
-            <a:schemeClr val="accent1"/>
-          </a:lnRef>
-          <a:fillRef idx="3">
-            <a:schemeClr val="accent1"/>
-          </a:fillRef>
-          <a:effectRef idx="2">
-            <a:schemeClr val="accent1"/>
-          </a:effectRef>
-          <a:fontRef idx="minor">
-            <a:schemeClr val="lt1"/>
-          </a:fontRef>
-        </p:style>
-        <p:txBody>
-          <a:bodyPr rtlCol="0" anchor="ctr" tIns="0" bIns="0"/>
-          <a:lstStyle/>
-          <a:p>
-            <a:pPr algn="l">
-              <a:spcAft>
-                <a:spcPts val="0"/>
-              </a:spcAft>
-            </a:pPr>
-            <a:r>
-              <a:rPr sz="1200" b="1" i="0">
-                <a:solidFill>
-                  <a:srgbClr val="FFFFFF"/>
-                </a:solidFill>
-                <a:latin typeface="Noto Sans Thai Looped"/>
-              </a:rPr>
-              <a:t>solution/</a:t>
-            </a:r>
-          </a:p>
-        </p:txBody>
-      </p:sp>
-      <p:sp>
-        <p:nvSpPr>
-          <p:cNvPr id="6" name="TextBox 5"/>
-          <p:cNvSpPr txBox="1"/>
-          <p:nvPr/>
-        </p:nvSpPr>
-        <p:spPr>
-          <a:xfrm>
-            <a:off x="8001000" y="1828800"/>
-            <a:ext cx="3657600" cy="3840480"/>
-          </a:xfrm>
-          <a:prstGeom prst="rect">
-            <a:avLst/>
-          </a:prstGeom>
-          <a:noFill/>
-        </p:spPr>
-        <p:txBody>
-          <a:bodyPr wrap="square">
-            <a:spAutoFit/>
-          </a:bodyPr>
-          <a:lstStyle/>
-          <a:p>
-            <a:pPr algn="l">
-              <a:spcAft>
-                <a:spcPts val="800"/>
-              </a:spcAft>
-            </a:pPr>
-            <a:r>
-              <a:rPr sz="1800" b="1" i="0">
-                <a:solidFill>
-                  <a:srgbClr val="0D9488"/>
-                </a:solidFill>
-                <a:latin typeface="Noto Sans Thai Looped"/>
-              </a:rPr>
-              <a:t>สังเกต</a:t>
-            </a:r>
-          </a:p>
-          <a:p>
-            <a:pPr algn="l">
-              <a:spcAft>
-                <a:spcPts val="1000"/>
-              </a:spcAft>
-            </a:pPr>
-            <a:r>
-              <a:rPr sz="1500" b="0" i="0">
-                <a:solidFill>
-                  <a:srgbClr val="0F172A"/>
-                </a:solidFill>
-                <a:latin typeface="Noto Sans Thai Looped"/>
-              </a:rPr>
-              <a:t>• กติกาธุรกิจทั้งหมดอยู่ใน calculation เดียว เทสต์ได้โดยไม่แตะ I/O</a:t>
-            </a:r>
-          </a:p>
-          <a:p>
-            <a:pPr algn="l">
-              <a:spcAft>
-                <a:spcPts val="1000"/>
-              </a:spcAft>
-            </a:pPr>
-            <a:r>
-              <a:rPr sz="1500" b="0" i="0">
-                <a:solidFill>
-                  <a:srgbClr val="0F172A"/>
-                </a:solidFill>
-                <a:latin typeface="Noto Sans Thai Looped"/>
-              </a:rPr>
-              <a:t>• SendCouponEmail รู้จักแค่การ 'ส่ง' — ไม่รู้ว่าคูปองมายังไง</a:t>
-            </a:r>
-          </a:p>
-          <a:p>
-            <a:pPr algn="l">
-              <a:spcAft>
-                <a:spcPts val="1000"/>
-              </a:spcAft>
-            </a:pPr>
-            <a:r>
-              <a:rPr sz="1500" b="0" i="0">
-                <a:solidFill>
-                  <a:srgbClr val="0F172A"/>
-                </a:solidFill>
-                <a:latin typeface="Noto Sans Thai Looped"/>
-              </a:rPr>
-              <a:t>• ลำดับการเรียก (หาก่อน → ส่งทีหลัง) เป็นของผู้เรียก ไม่ใช่ของฟังก์ชัน</a:t>
-            </a:r>
-          </a:p>
-        </p:txBody>
-      </p:sp>
-    </p:spTree>
-  </p:cSld>
-  <p:clrMapOvr>
-    <a:masterClrMapping/>
-  </p:clrMapOvr>
-</p:sld>
-</file>
-
-<file path=ppt/slides/slide15.xml><?xml version="1.0" encoding="utf-8"?>
-<p:sld xmlns:a="http://schemas.openxmlformats.org/drawingml/2006/main" xmlns:p="http://schemas.openxmlformats.org/presentationml/2006/main" xmlns:r="http://schemas.openxmlformats.org/officeDocument/2006/relationships">
-  <p:cSld>
-    <p:spTree>
-      <p:nvGrpSpPr>
-        <p:cNvPr id="1" name=""/>
-        <p:cNvGrpSpPr/>
-        <p:nvPr/>
-      </p:nvGrpSpPr>
-      <p:grpSpPr/>
-      <p:sp>
-        <p:nvSpPr>
-          <p:cNvPr id="2" name="TextBox 1"/>
-          <p:cNvSpPr txBox="1"/>
-          <p:nvPr/>
-        </p:nvSpPr>
-        <p:spPr>
-          <a:xfrm>
-            <a:off x="502920" y="292608"/>
-            <a:ext cx="11155680" cy="914400"/>
-          </a:xfrm>
-          <a:prstGeom prst="rect">
-            <a:avLst/>
-          </a:prstGeom>
-          <a:noFill/>
-        </p:spPr>
-        <p:txBody>
-          <a:bodyPr wrap="square">
-            <a:spAutoFit/>
-          </a:bodyPr>
-          <a:lstStyle/>
-          <a:p>
-            <a:pPr algn="l">
-              <a:spcAft>
-                <a:spcPts val="200"/>
-              </a:spcAft>
-            </a:pPr>
-            <a:r>
-              <a:rPr sz="3000" b="1" i="0">
-                <a:solidFill>
-                  <a:srgbClr val="0F172A"/>
-                </a:solidFill>
-                <a:latin typeface="Noto Sans Thai Looped"/>
-              </a:rPr>
               <a:t>ของหวาน: Lazy Sequence ด้วย iter.Seq (Go </a:t>
             </a:r>
             <a:r>
@@ -8122,7 +6802,7 @@
 </p:sld>
 </file>
 
-<file path=ppt/slides/slide16.xml><?xml version="1.0" encoding="utf-8"?>
+<file path=ppt/slides/slide14.xml><?xml version="1.0" encoding="utf-8"?>
 <p:sld xmlns:a="http://schemas.openxmlformats.org/drawingml/2006/main" xmlns:p="http://schemas.openxmlformats.org/presentationml/2006/main" xmlns:r="http://schemas.openxmlformats.org/officeDocument/2006/relationships">
   <p:cSld>
     <p:spTree>
@@ -8663,7 +7343,7 @@
 </p:sld>
 </file>
 
-<file path=ppt/slides/slide17.xml><?xml version="1.0" encoding="utf-8"?>
+<file path=ppt/slides/slide15.xml><?xml version="1.0" encoding="utf-8"?>
 <p:sld xmlns:a="http://schemas.openxmlformats.org/drawingml/2006/main" xmlns:p="http://schemas.openxmlformats.org/presentationml/2006/main" xmlns:r="http://schemas.openxmlformats.org/officeDocument/2006/relationships">
   <p:cSld>
     <p:spTree>
@@ -8707,7 +7387,59 @@
                 </a:solidFill>
                 <a:latin typeface="Noto Sans Thai Looped"/>
               </a:rPr>
-              <a:t>อ่านต่อ</a:t>
+              <a:t>การบ้าน: แยกคูปองออกจากการส่งอีเมล</a:t>
+            </a:r>
+          </a:p>
+          <a:p>
+            <a:pPr algn="l">
+              <a:spcAft>
+                <a:spcPts val="600"/>
+              </a:spcAft>
+            </a:pPr>
+            <a:r>
+              <a:rPr sz="1500" b="0" i="0">
+                <a:solidFill>
+                  <a:srgbClr val="64748B"/>
+                </a:solidFill>
+                <a:latin typeface="Noto Sans Thai Looped"/>
+              </a:rPr>
+              <a:t>โจทย์จาก Grokking Simplicity บท </a:t>
+            </a:r>
+            <a:r>
+              <a:rPr sz="1500" b="0" i="0">
+                <a:solidFill>
+                  <a:srgbClr val="64748B"/>
+                </a:solidFill>
+                <a:latin typeface="Ubuntu"/>
+              </a:rPr>
+              <a:t>3–5</a:t>
+            </a:r>
+            <a:r>
+              <a:rPr sz="1500" b="0" i="0">
+                <a:solidFill>
+                  <a:srgbClr val="64748B"/>
+                </a:solidFill>
+                <a:latin typeface="Noto Sans Thai Looped"/>
+              </a:rPr>
+              <a:t> พอร์ตเป็น Go — repo: go-fp/</a:t>
+            </a:r>
+            <a:r>
+              <a:rPr sz="1500" b="0" i="0">
+                <a:solidFill>
+                  <a:srgbClr val="64748B"/>
+                </a:solidFill>
+                <a:latin typeface="Ubuntu"/>
+              </a:rPr>
+              <a:t>07-</a:t>
+            </a:r>
+            <a:r>
+              <a:rPr sz="1500" b="0" i="0">
+                <a:solidFill>
+                  <a:srgbClr val="64748B"/>
+                </a:solidFill>
+                <a:latin typeface="Noto Sans Thai Looped"/>
+              </a:rPr>
+              <a:t>coupon-email-exercise (มี EXERCISE.md ประกอบ)</a:t>
             </a:r>
           </a:p>
         </p:txBody>
@@ -8757,14 +7489,352 @@
       </p:sp>
       <p:sp>
         <p:nvSpPr>
-          <p:cNvPr id="4" name="TextBox 3"/>
+          <p:cNvPr id="4" name="Rounded Rectangle 3"/>
+          <p:cNvSpPr/>
+          <p:nvPr/>
+        </p:nvSpPr>
+        <p:spPr>
+          <a:xfrm>
+            <a:off x="548640" y="1874519"/>
+            <a:ext cx="6035040" cy="4114800"/>
+          </a:xfrm>
+          <a:prstGeom prst="roundRect">
+            <a:avLst/>
+          </a:prstGeom>
+          <a:solidFill>
+            <a:srgbClr val="1E1E2E"/>
+          </a:solidFill>
+          <a:ln>
+            <a:noFill/>
+          </a:ln>
+          <a:effectLst/>
+        </p:spPr>
+        <p:style>
+          <a:lnRef idx="1">
+            <a:schemeClr val="accent1"/>
+          </a:lnRef>
+          <a:fillRef idx="3">
+            <a:schemeClr val="accent1"/>
+          </a:fillRef>
+          <a:effectRef idx="2">
+            <a:schemeClr val="accent1"/>
+          </a:effectRef>
+          <a:fontRef idx="minor">
+            <a:schemeClr val="lt1"/>
+          </a:fontRef>
+        </p:style>
+        <p:txBody>
+          <a:bodyPr rtlCol="0" anchor="t" wrap="none" lIns="164592" rIns="109728" tIns="109728"/>
+          <a:lstStyle/>
+          <a:p>
+            <a:pPr algn="l">
+              <a:spcAft>
+                <a:spcPts val="0"/>
+              </a:spcAft>
+            </a:pPr>
+            <a:r>
+              <a:rPr sz="1200" i="1">
+                <a:solidFill>
+                  <a:srgbClr val="94A3B8"/>
+                </a:solidFill>
+                <a:latin typeface="DejaVu Sans Mono"/>
+              </a:rPr>
+              <a:t>// ทุกอย่างอยู่ในฟังก์ชันเดียว — มองแล้วเจออะไรบ้าง?</a:t>
+            </a:r>
+          </a:p>
+          <a:p>
+            <a:pPr algn="l">
+              <a:spcAft>
+                <a:spcPts val="0"/>
+              </a:spcAft>
+            </a:pPr>
+            <a:r>
+              <a:rPr sz="1200" i="0">
+                <a:solidFill>
+                  <a:srgbClr val="E2E8F0"/>
+                </a:solidFill>
+                <a:latin typeface="DejaVu Sans Mono"/>
+              </a:rPr>
+              <a:t>func EmailCoupons(cart Cart, coupons []Coupon,</a:t>
+            </a:r>
+          </a:p>
+          <a:p>
+            <a:pPr algn="l">
+              <a:spcAft>
+                <a:spcPts val="0"/>
+              </a:spcAft>
+            </a:pPr>
+            <a:r>
+              <a:rPr sz="1200" i="0">
+                <a:solidFill>
+                  <a:srgbClr val="E2E8F0"/>
+                </a:solidFill>
+                <a:latin typeface="DejaVu Sans Mono"/>
+              </a:rPr>
+              <a:t>    out io.Writer) error {</a:t>
+            </a:r>
+          </a:p>
+          <a:p>
+            <a:pPr algn="l">
+              <a:spcAft>
+                <a:spcPts val="0"/>
+              </a:spcAft>
+            </a:pPr>
+            <a:r>
+              <a:rPr sz="1200" i="0">
+                <a:solidFill>
+                  <a:srgbClr val="E2E8F0"/>
+                </a:solidFill>
+                <a:latin typeface="DejaVu Sans Mono"/>
+              </a:rPr>
+              <a:t>    fmt.Printf("finding coupons for %s\n", cart.Email)</a:t>
+            </a:r>
+          </a:p>
+          <a:p>
+            <a:pPr algn="l">
+              <a:spcAft>
+                <a:spcPts val="0"/>
+              </a:spcAft>
+            </a:pPr>
+            <a:r>
+              <a:rPr sz="1200" i="0">
+                <a:solidFill>
+                  <a:srgbClr val="E2E8F0"/>
+                </a:solidFill>
+                <a:latin typeface="DejaVu Sans Mono"/>
+              </a:rPr>
+              <a:t>    var codes []string</a:t>
+            </a:r>
+          </a:p>
+          <a:p>
+            <a:pPr algn="l">
+              <a:spcAft>
+                <a:spcPts val="0"/>
+              </a:spcAft>
+            </a:pPr>
+            <a:r>
+              <a:rPr sz="1200" i="0">
+                <a:solidFill>
+                  <a:srgbClr val="E2E8F0"/>
+                </a:solidFill>
+                <a:latin typeface="DejaVu Sans Mono"/>
+              </a:rPr>
+              <a:t>    for _, c := range coupons {</a:t>
+            </a:r>
+          </a:p>
+          <a:p>
+            <a:pPr algn="l">
+              <a:spcAft>
+                <a:spcPts val="0"/>
+              </a:spcAft>
+            </a:pPr>
+            <a:r>
+              <a:rPr sz="1200" i="0">
+                <a:solidFill>
+                  <a:srgbClr val="E2E8F0"/>
+                </a:solidFill>
+                <a:latin typeface="DejaVu Sans Mono"/>
+              </a:rPr>
+              <a:t>        if cart.Total &gt;= c.MinimumTotal &amp;&amp;</a:t>
+            </a:r>
+          </a:p>
+          <a:p>
+            <a:pPr algn="l">
+              <a:spcAft>
+                <a:spcPts val="0"/>
+              </a:spcAft>
+            </a:pPr>
+            <a:r>
+              <a:rPr sz="1200" i="0">
+                <a:solidFill>
+                  <a:srgbClr val="E2E8F0"/>
+                </a:solidFill>
+                <a:latin typeface="DejaVu Sans Mono"/>
+              </a:rPr>
+              <a:t>            (c.Category == "" || c.Category == cart.Category) {</a:t>
+            </a:r>
+          </a:p>
+          <a:p>
+            <a:pPr algn="l">
+              <a:spcAft>
+                <a:spcPts val="0"/>
+              </a:spcAft>
+            </a:pPr>
+            <a:r>
+              <a:rPr sz="1200" i="0">
+                <a:solidFill>
+                  <a:srgbClr val="E2E8F0"/>
+                </a:solidFill>
+                <a:latin typeface="DejaVu Sans Mono"/>
+              </a:rPr>
+              <a:t>            codes = append(codes, c.Code)</a:t>
+            </a:r>
+          </a:p>
+          <a:p>
+            <a:pPr algn="l">
+              <a:spcAft>
+                <a:spcPts val="0"/>
+              </a:spcAft>
+            </a:pPr>
+            <a:r>
+              <a:rPr sz="1200" i="0">
+                <a:solidFill>
+                  <a:srgbClr val="E2E8F0"/>
+                </a:solidFill>
+                <a:latin typeface="DejaVu Sans Mono"/>
+              </a:rPr>
+              <a:t>        }</a:t>
+            </a:r>
+          </a:p>
+          <a:p>
+            <a:pPr algn="l">
+              <a:spcAft>
+                <a:spcPts val="0"/>
+              </a:spcAft>
+            </a:pPr>
+            <a:r>
+              <a:rPr sz="1200" i="0">
+                <a:solidFill>
+                  <a:srgbClr val="E2E8F0"/>
+                </a:solidFill>
+                <a:latin typeface="DejaVu Sans Mono"/>
+              </a:rPr>
+              <a:t>    }</a:t>
+            </a:r>
+          </a:p>
+          <a:p>
+            <a:pPr algn="l">
+              <a:spcAft>
+                <a:spcPts val="0"/>
+              </a:spcAft>
+            </a:pPr>
+            <a:r>
+              <a:rPr sz="1200" i="0">
+                <a:solidFill>
+                  <a:srgbClr val="E2E8F0"/>
+                </a:solidFill>
+                <a:latin typeface="DejaVu Sans Mono"/>
+              </a:rPr>
+              <a:t>    _, err := fmt.Fprintf(out,</a:t>
+            </a:r>
+          </a:p>
+          <a:p>
+            <a:pPr algn="l">
+              <a:spcAft>
+                <a:spcPts val="0"/>
+              </a:spcAft>
+            </a:pPr>
+            <a:r>
+              <a:rPr sz="1200" i="0">
+                <a:solidFill>
+                  <a:srgbClr val="E2E8F0"/>
+                </a:solidFill>
+                <a:latin typeface="DejaVu Sans Mono"/>
+              </a:rPr>
+              <a:t>        "To: %s\nCoupons: %v\n", cart.Email, codes)</a:t>
+            </a:r>
+          </a:p>
+          <a:p>
+            <a:pPr algn="l">
+              <a:spcAft>
+                <a:spcPts val="0"/>
+              </a:spcAft>
+            </a:pPr>
+            <a:r>
+              <a:rPr sz="1200" i="0">
+                <a:solidFill>
+                  <a:srgbClr val="E2E8F0"/>
+                </a:solidFill>
+                <a:latin typeface="DejaVu Sans Mono"/>
+              </a:rPr>
+              <a:t>    return err</a:t>
+            </a:r>
+          </a:p>
+          <a:p>
+            <a:pPr algn="l">
+              <a:spcAft>
+                <a:spcPts val="0"/>
+              </a:spcAft>
+            </a:pPr>
+            <a:r>
+              <a:rPr sz="1200" i="0">
+                <a:solidFill>
+                  <a:srgbClr val="E2E8F0"/>
+                </a:solidFill>
+                <a:latin typeface="DejaVu Sans Mono"/>
+              </a:rPr>
+              <a:t>}</a:t>
+            </a:r>
+          </a:p>
+        </p:txBody>
+      </p:sp>
+      <p:sp>
+        <p:nvSpPr>
+          <p:cNvPr id="5" name="Rounded Rectangle 4"/>
+          <p:cNvSpPr/>
+          <p:nvPr/>
+        </p:nvSpPr>
+        <p:spPr>
+          <a:xfrm>
+            <a:off x="548640" y="1563623"/>
+            <a:ext cx="3483864" cy="274320"/>
+          </a:xfrm>
+          <a:prstGeom prst="roundRect">
+            <a:avLst/>
+          </a:prstGeom>
+          <a:solidFill>
+            <a:srgbClr val="DC2626"/>
+          </a:solidFill>
+          <a:ln>
+            <a:noFill/>
+          </a:ln>
+          <a:effectLst/>
+        </p:spPr>
+        <p:style>
+          <a:lnRef idx="1">
+            <a:schemeClr val="accent1"/>
+          </a:lnRef>
+          <a:fillRef idx="3">
+            <a:schemeClr val="accent1"/>
+          </a:fillRef>
+          <a:effectRef idx="2">
+            <a:schemeClr val="accent1"/>
+          </a:effectRef>
+          <a:fontRef idx="minor">
+            <a:schemeClr val="lt1"/>
+          </a:fontRef>
+        </p:style>
+        <p:txBody>
+          <a:bodyPr rtlCol="0" anchor="ctr" tIns="0" bIns="0"/>
+          <a:lstStyle/>
+          <a:p>
+            <a:pPr algn="l">
+              <a:spcAft>
+                <a:spcPts val="0"/>
+              </a:spcAft>
+            </a:pPr>
+            <a:r>
+              <a:rPr sz="1200" b="1" i="0">
+                <a:solidFill>
+                  <a:srgbClr val="FFFFFF"/>
+                </a:solidFill>
+                <a:latin typeface="Noto Sans Thai Looped"/>
+              </a:rPr>
+              <a:t>starter/coupons.go — จุดตั้งต้น</a:t>
+            </a:r>
+          </a:p>
+        </p:txBody>
+      </p:sp>
+      <p:sp>
+        <p:nvSpPr>
+          <p:cNvPr id="6" name="TextBox 5"/>
           <p:cNvSpPr txBox="1"/>
           <p:nvPr/>
         </p:nvSpPr>
         <p:spPr>
           <a:xfrm>
-            <a:off x="548640" y="1645920"/>
-            <a:ext cx="11064240" cy="4937760"/>
+            <a:off x="6858000" y="1920240"/>
+            <a:ext cx="4846320" cy="4114800"/>
           </a:xfrm>
           <a:prstGeom prst="rect">
             <a:avLst/>
@@ -8779,228 +7849,190 @@
           <a:p>
             <a:pPr algn="l">
               <a:spcAft>
+                <a:spcPts val="600"/>
+              </a:spcAft>
+            </a:pPr>
+            <a:r>
+              <a:rPr sz="1800" b="1" i="0">
+                <a:solidFill>
+                  <a:srgbClr val="0D9488"/>
+                </a:solidFill>
+                <a:latin typeface="Noto Sans Thai Looped"/>
+              </a:rPr>
+              <a:t>โจทย์ของคุณ</a:t>
+            </a:r>
+          </a:p>
+          <a:p>
+            <a:pPr algn="l">
+              <a:spcAft>
                 <a:spcPts val="800"/>
               </a:spcAft>
             </a:pPr>
             <a:r>
-              <a:rPr sz="1700" b="0" i="0">
+              <a:rPr sz="1500" b="0" i="0">
                 <a:solidFill>
                   <a:srgbClr val="0F172A"/>
                 </a:solidFill>
+                <a:latin typeface="Ubuntu"/>
+              </a:rPr>
+              <a:t>1.</a:t>
+            </a:r>
+            <a:r>
+              <a:rPr sz="1500" b="0" i="0">
+                <a:solidFill>
+                  <a:srgbClr val="0F172A"/>
+                </a:solidFill>
                 <a:latin typeface="Noto Sans Thai Looped"/>
               </a:rPr>
-              <a:t>• Grokking Simplicity — Eric Normand (Manning </a:t>
-            </a:r>
-            <a:r>
-              <a:rPr sz="1700" b="0" i="0">
+              <a:t> แยก Actions / Calculations / Data ให้ครบ</a:t>
+            </a:r>
+          </a:p>
+          <a:p>
+            <a:pPr algn="l">
+              <a:spcAft>
+                <a:spcPts val="800"/>
+              </a:spcAft>
+            </a:pPr>
+            <a:r>
+              <a:rPr sz="1500" b="0" i="0">
                 <a:solidFill>
                   <a:srgbClr val="0F172A"/>
                 </a:solidFill>
                 <a:latin typeface="Ubuntu"/>
               </a:rPr>
-              <a:t>2021</a:t>
-            </a:r>
-            <a:r>
-              <a:rPr sz="1700" b="0" i="0">
+              <a:t>2.</a:t>
+            </a:r>
+            <a:r>
+              <a:rPr sz="1500" b="0" i="0">
                 <a:solidFill>
                   <a:srgbClr val="0F172A"/>
                 </a:solidFill>
                 <a:latin typeface="Noto Sans Thai Looped"/>
               </a:rPr>
-              <a:t>) · โฟกัส ch.</a:t>
-            </a:r>
-            <a:r>
-              <a:rPr sz="1700" b="0" i="0">
+              <a:t> ดึง FindApplicableCoupons ออกมา — เขียน table-driven test ก่อน implementation</a:t>
+            </a:r>
+          </a:p>
+          <a:p>
+            <a:pPr algn="l">
+              <a:spcAft>
+                <a:spcPts val="800"/>
+              </a:spcAft>
+            </a:pPr>
+            <a:r>
+              <a:rPr sz="1500" b="0" i="0">
                 <a:solidFill>
                   <a:srgbClr val="0F172A"/>
                 </a:solidFill>
                 <a:latin typeface="Ubuntu"/>
               </a:rPr>
-              <a:t>3–5</a:t>
-            </a:r>
-            <a:r>
-              <a:rPr sz="1700" b="0" i="0">
+              <a:t>3.</a:t>
+            </a:r>
+            <a:r>
+              <a:rPr sz="1500" b="0" i="0">
                 <a:solidFill>
                   <a:srgbClr val="0F172A"/>
                 </a:solidFill>
                 <a:latin typeface="Noto Sans Thai Looped"/>
               </a:rPr>
-              <a:t> (ACD), ch.</a:t>
-            </a:r>
-            <a:r>
-              <a:rPr sz="1700" b="0" i="0">
+              <a:t> เหลือ SendCouponEmail เป็น action บาง ๆ</a:t>
+            </a:r>
+          </a:p>
+          <a:p>
+            <a:pPr algn="l">
+              <a:spcAft>
+                <a:spcPts val="800"/>
+              </a:spcAft>
+            </a:pPr>
+            <a:r>
+              <a:rPr sz="1500" b="0" i="0">
                 <a:solidFill>
                   <a:srgbClr val="0F172A"/>
                 </a:solidFill>
                 <a:latin typeface="Ubuntu"/>
               </a:rPr>
-              <a:t>6–7</a:t>
-            </a:r>
-            <a:r>
-              <a:rPr sz="1700" b="0" i="0">
+              <a:t>4.</a:t>
+            </a:r>
+            <a:r>
+              <a:rPr sz="1500" b="0" i="0">
                 <a:solidFill>
                   <a:srgbClr val="0F172A"/>
                 </a:solidFill>
                 <a:latin typeface="Noto Sans Thai Looped"/>
               </a:rPr>
-              <a:t> (immutability), ch.</a:t>
-            </a:r>
-            <a:r>
-              <a:rPr sz="1700" b="0" i="0">
-                <a:solidFill>
-                  <a:srgbClr val="0F172A"/>
-                </a:solidFill>
-                <a:latin typeface="Ubuntu"/>
-              </a:rPr>
-              <a:t>10–14</a:t>
-            </a:r>
-            <a:r>
-              <a:rPr sz="1700" b="0" i="0">
-                <a:solidFill>
-                  <a:srgbClr val="0F172A"/>
+              <a:t> ทำเสร็จค่อยเปิดดู solution/ ใน repo</a:t>
+            </a:r>
+          </a:p>
+          <a:p>
+            <a:pPr algn="l">
+              <a:spcAft>
+                <a:spcPts val="600"/>
+              </a:spcAft>
+            </a:pPr>
+            <a:r>
+              <a:rPr sz="1300" b="0" i="1">
+                <a:solidFill>
+                  <a:srgbClr val="64748B"/>
                 </a:solidFill>
                 <a:latin typeface="Noto Sans Thai Looped"/>
               </a:rPr>
-              <a:t> (first-class functions)</a:t>
-            </a:r>
-          </a:p>
-          <a:p>
-            <a:pPr algn="l">
-              <a:spcAft>
-                <a:spcPts val="800"/>
-              </a:spcAft>
-            </a:pPr>
-            <a:r>
-              <a:rPr sz="1700" b="0" i="0">
-                <a:solidFill>
-                  <a:srgbClr val="0F172A"/>
-                </a:solidFill>
-                <a:latin typeface="Noto Sans Thai Looped"/>
-              </a:rPr>
-              <a:t>• Functional Programming in Go — Dylan Meeus (Packt </a:t>
-            </a:r>
-            <a:r>
-              <a:rPr sz="1700" b="0" i="0">
-                <a:solidFill>
-                  <a:srgbClr val="0F172A"/>
-                </a:solidFill>
-                <a:latin typeface="Ubuntu"/>
-              </a:rPr>
-              <a:t>2023</a:t>
-            </a:r>
-            <a:r>
-              <a:rPr sz="1700" b="0" i="0">
-                <a:solidFill>
-                  <a:srgbClr val="0F172A"/>
-                </a:solidFill>
-                <a:latin typeface="Noto Sans Thai Looped"/>
-              </a:rPr>
-              <a:t>)</a:t>
-            </a:r>
-          </a:p>
-          <a:p>
-            <a:pPr algn="l">
-              <a:spcAft>
-                <a:spcPts val="800"/>
-              </a:spcAft>
-            </a:pPr>
-            <a:r>
-              <a:rPr sz="1700" b="0" i="0">
-                <a:solidFill>
-                  <a:srgbClr val="0F172A"/>
-                </a:solidFill>
-                <a:latin typeface="Noto Sans Thai Looped"/>
-              </a:rPr>
-              <a:t>• Go blog: Range Over Function Types (Go </a:t>
-            </a:r>
-            <a:r>
-              <a:rPr sz="1700" b="0" i="0">
-                <a:solidFill>
-                  <a:srgbClr val="0F172A"/>
-                </a:solidFill>
-                <a:latin typeface="Ubuntu"/>
-              </a:rPr>
-              <a:t>1.23</a:t>
-            </a:r>
-            <a:r>
-              <a:rPr sz="1700" b="0" i="0">
-                <a:solidFill>
-                  <a:srgbClr val="0F172A"/>
-                </a:solidFill>
-                <a:latin typeface="Noto Sans Thai Looped"/>
-              </a:rPr>
-              <a:t>) — go.dev/blog/range-functions</a:t>
-            </a:r>
-          </a:p>
-          <a:p>
-            <a:pPr algn="l">
-              <a:spcAft>
-                <a:spcPts val="800"/>
-              </a:spcAft>
-            </a:pPr>
-            <a:r>
-              <a:rPr sz="1700" b="0" i="0">
-                <a:solidFill>
-                  <a:srgbClr val="0F172A"/>
-                </a:solidFill>
-                <a:latin typeface="Noto Sans Thai Looped"/>
-              </a:rPr>
-              <a:t>• Codewalk: First-Class Functions in Go — go.dev/doc/codewalk/functions</a:t>
-            </a:r>
-          </a:p>
-          <a:p>
-            <a:pPr algn="l">
-              <a:spcAft>
-                <a:spcPts val="800"/>
-              </a:spcAft>
-            </a:pPr>
-            <a:r>
-              <a:rPr sz="1700" b="1" i="0">
-                <a:solidFill>
-                  <a:srgbClr val="0F172A"/>
-                </a:solidFill>
-                <a:latin typeface="Noto Sans Thai Looped"/>
-              </a:rPr>
-              <a:t>• โค้ดทั้งหมดในวันนี้ (พร้อมเทสต์): ~/src/go-fp — go test ./... ผ่านทุก package</a:t>
-            </a:r>
-          </a:p>
-        </p:txBody>
-      </p:sp>
-      <p:sp>
-        <p:nvSpPr>
-          <p:cNvPr id="5" name="TextBox 4"/>
-          <p:cNvSpPr txBox="1"/>
+              <a:t>กติกาโจทย์: เงินเป็นบาทเต็มไม่ติดลบ · coupon ไม่มีหมวด = ใช้ได้ทุกหมวด · รักษาลำดับเดิม</a:t>
+            </a:r>
+          </a:p>
+        </p:txBody>
+      </p:sp>
+      <p:sp>
+        <p:nvSpPr>
+          <p:cNvPr id="7" name="Rounded Rectangle 6"/>
+          <p:cNvSpPr/>
           <p:nvPr/>
         </p:nvSpPr>
         <p:spPr>
           <a:xfrm>
-            <a:off x="548640" y="5760720"/>
-            <a:ext cx="11064240" cy="640080"/>
+            <a:off x="548640" y="5989320"/>
+            <a:ext cx="11109960" cy="566928"/>
           </a:xfrm>
-          <a:prstGeom prst="rect">
+          <a:prstGeom prst="roundRect">
             <a:avLst/>
           </a:prstGeom>
-          <a:noFill/>
+          <a:solidFill>
+            <a:srgbClr val="CCFBF1"/>
+          </a:solidFill>
+          <a:ln>
+            <a:noFill/>
+          </a:ln>
+          <a:effectLst/>
         </p:spPr>
-        <p:txBody>
-          <a:bodyPr wrap="square">
-            <a:spAutoFit/>
-          </a:bodyPr>
-          <a:lstStyle/>
-          <a:p>
-            <a:pPr algn="l">
-              <a:spcAft>
-                <a:spcPts val="600"/>
-              </a:spcAft>
-            </a:pPr>
-            <a:r>
-              <a:rPr sz="2000" b="1" i="0">
-                <a:solidFill>
-                  <a:srgbClr val="0D9488"/>
+        <p:style>
+          <a:lnRef idx="1">
+            <a:schemeClr val="accent1"/>
+          </a:lnRef>
+          <a:fillRef idx="3">
+            <a:schemeClr val="accent1"/>
+          </a:fillRef>
+          <a:effectRef idx="2">
+            <a:schemeClr val="accent1"/>
+          </a:effectRef>
+          <a:fontRef idx="minor">
+            <a:schemeClr val="lt1"/>
+          </a:fontRef>
+        </p:style>
+        <p:txBody>
+          <a:bodyPr rtlCol="0" anchor="ctr" tIns="54864" bIns="36576" wrap="square"/>
+          <a:lstStyle/>
+          <a:p>
+            <a:pPr algn="l">
+              <a:spcAft>
+                <a:spcPts val="0"/>
+              </a:spcAft>
+            </a:pPr>
+            <a:r>
+              <a:rPr sz="1500" b="1" i="0">
+                <a:solidFill>
+                  <a:srgbClr val="0F766E"/>
                 </a:solidFill>
                 <a:latin typeface="Noto Sans Thai Looped"/>
               </a:rPr>
-              <a:t>ขอบคุณครับ 🙏 — คำถามได้ตลอด</a:t>
+              <a:t>จำไว้: เป้าหมาย: กติกาธุรกิจทั้งหมดอยู่ใน calculation ที่เทสต์ได้ โดยไม่ต้องแตะ I/O</a:t>
             </a:r>
           </a:p>
         </p:txBody>
@@ -9013,7 +8045,7 @@
 </p:sld>
 </file>
 
-<file path=ppt/slides/slide2.xml><?xml version="1.0" encoding="utf-8"?>
+<file path=ppt/slides/slide16.xml><?xml version="1.0" encoding="utf-8"?>
 <p:sld xmlns:a="http://schemas.openxmlformats.org/drawingml/2006/main" xmlns:p="http://schemas.openxmlformats.org/presentationml/2006/main" xmlns:r="http://schemas.openxmlformats.org/officeDocument/2006/relationships">
   <p:cSld>
     <p:spTree>
@@ -9057,41 +8089,7 @@
                 </a:solidFill>
                 <a:latin typeface="Noto Sans Thai Looped"/>
               </a:rPr>
-              <a:t>จบ </a:t>
-            </a:r>
-            <a:r>
-              <a:rPr sz="3000" b="1" i="0">
-                <a:solidFill>
-                  <a:srgbClr val="0F172A"/>
-                </a:solidFill>
-                <a:latin typeface="Ubuntu"/>
-              </a:rPr>
-              <a:t>2</a:t>
-            </a:r>
-            <a:r>
-              <a:rPr sz="3000" b="1" i="0">
-                <a:solidFill>
-                  <a:srgbClr val="0F172A"/>
-                </a:solidFill>
-                <a:latin typeface="Noto Sans Thai Looped"/>
-              </a:rPr>
-              <a:t> ชั่วโมงนี้ คุณจะได้</a:t>
-            </a:r>
-          </a:p>
-          <a:p>
-            <a:pPr algn="l">
-              <a:spcAft>
-                <a:spcPts val="600"/>
-              </a:spcAft>
-            </a:pPr>
-            <a:r>
-              <a:rPr sz="1500" b="0" i="0">
-                <a:solidFill>
-                  <a:srgbClr val="64748B"/>
-                </a:solidFill>
-                <a:latin typeface="Noto Sans Thai Looped"/>
-              </a:rPr>
-              <a:t>เรียงจาก 'มองเป็น' → 'เขียนเป็น' → 'ใช้เป็น'</a:t>
+              <a:t>อ่านต่อ</a:t>
             </a:r>
           </a:p>
         </p:txBody>
@@ -9147,6 +8145,390 @@
         </p:nvSpPr>
         <p:spPr>
           <a:xfrm>
+            <a:off x="548640" y="1645920"/>
+            <a:ext cx="11064240" cy="4937760"/>
+          </a:xfrm>
+          <a:prstGeom prst="rect">
+            <a:avLst/>
+          </a:prstGeom>
+          <a:noFill/>
+        </p:spPr>
+        <p:txBody>
+          <a:bodyPr wrap="square">
+            <a:spAutoFit/>
+          </a:bodyPr>
+          <a:lstStyle/>
+          <a:p>
+            <a:pPr algn="l">
+              <a:spcAft>
+                <a:spcPts val="800"/>
+              </a:spcAft>
+            </a:pPr>
+            <a:r>
+              <a:rPr sz="1700" b="0" i="0">
+                <a:solidFill>
+                  <a:srgbClr val="0F172A"/>
+                </a:solidFill>
+                <a:latin typeface="Noto Sans Thai Looped"/>
+              </a:rPr>
+              <a:t>• Grokking Simplicity — Eric Normand (Manning </a:t>
+            </a:r>
+            <a:r>
+              <a:rPr sz="1700" b="0" i="0">
+                <a:solidFill>
+                  <a:srgbClr val="0F172A"/>
+                </a:solidFill>
+                <a:latin typeface="Ubuntu"/>
+              </a:rPr>
+              <a:t>2021</a:t>
+            </a:r>
+            <a:r>
+              <a:rPr sz="1700" b="0" i="0">
+                <a:solidFill>
+                  <a:srgbClr val="0F172A"/>
+                </a:solidFill>
+                <a:latin typeface="Noto Sans Thai Looped"/>
+              </a:rPr>
+              <a:t>) · โฟกัส ch.</a:t>
+            </a:r>
+            <a:r>
+              <a:rPr sz="1700" b="0" i="0">
+                <a:solidFill>
+                  <a:srgbClr val="0F172A"/>
+                </a:solidFill>
+                <a:latin typeface="Ubuntu"/>
+              </a:rPr>
+              <a:t>3–5</a:t>
+            </a:r>
+            <a:r>
+              <a:rPr sz="1700" b="0" i="0">
+                <a:solidFill>
+                  <a:srgbClr val="0F172A"/>
+                </a:solidFill>
+                <a:latin typeface="Noto Sans Thai Looped"/>
+              </a:rPr>
+              <a:t> (ACD), ch.</a:t>
+            </a:r>
+            <a:r>
+              <a:rPr sz="1700" b="0" i="0">
+                <a:solidFill>
+                  <a:srgbClr val="0F172A"/>
+                </a:solidFill>
+                <a:latin typeface="Ubuntu"/>
+              </a:rPr>
+              <a:t>6–7</a:t>
+            </a:r>
+            <a:r>
+              <a:rPr sz="1700" b="0" i="0">
+                <a:solidFill>
+                  <a:srgbClr val="0F172A"/>
+                </a:solidFill>
+                <a:latin typeface="Noto Sans Thai Looped"/>
+              </a:rPr>
+              <a:t> (immutability), ch.</a:t>
+            </a:r>
+            <a:r>
+              <a:rPr sz="1700" b="0" i="0">
+                <a:solidFill>
+                  <a:srgbClr val="0F172A"/>
+                </a:solidFill>
+                <a:latin typeface="Ubuntu"/>
+              </a:rPr>
+              <a:t>10–14</a:t>
+            </a:r>
+            <a:r>
+              <a:rPr sz="1700" b="0" i="0">
+                <a:solidFill>
+                  <a:srgbClr val="0F172A"/>
+                </a:solidFill>
+                <a:latin typeface="Noto Sans Thai Looped"/>
+              </a:rPr>
+              <a:t> (first-class functions)</a:t>
+            </a:r>
+          </a:p>
+          <a:p>
+            <a:pPr algn="l">
+              <a:spcAft>
+                <a:spcPts val="800"/>
+              </a:spcAft>
+            </a:pPr>
+            <a:r>
+              <a:rPr sz="1700" b="0" i="0">
+                <a:solidFill>
+                  <a:srgbClr val="0F172A"/>
+                </a:solidFill>
+                <a:latin typeface="Noto Sans Thai Looped"/>
+              </a:rPr>
+              <a:t>• Functional Programming in Go — Dylan Meeus (Packt </a:t>
+            </a:r>
+            <a:r>
+              <a:rPr sz="1700" b="0" i="0">
+                <a:solidFill>
+                  <a:srgbClr val="0F172A"/>
+                </a:solidFill>
+                <a:latin typeface="Ubuntu"/>
+              </a:rPr>
+              <a:t>2023</a:t>
+            </a:r>
+            <a:r>
+              <a:rPr sz="1700" b="0" i="0">
+                <a:solidFill>
+                  <a:srgbClr val="0F172A"/>
+                </a:solidFill>
+                <a:latin typeface="Noto Sans Thai Looped"/>
+              </a:rPr>
+              <a:t>)</a:t>
+            </a:r>
+          </a:p>
+          <a:p>
+            <a:pPr algn="l">
+              <a:spcAft>
+                <a:spcPts val="800"/>
+              </a:spcAft>
+            </a:pPr>
+            <a:r>
+              <a:rPr sz="1700" b="0" i="0">
+                <a:solidFill>
+                  <a:srgbClr val="0F172A"/>
+                </a:solidFill>
+                <a:latin typeface="Noto Sans Thai Looped"/>
+              </a:rPr>
+              <a:t>• Go blog: Range Over Function Types (Go </a:t>
+            </a:r>
+            <a:r>
+              <a:rPr sz="1700" b="0" i="0">
+                <a:solidFill>
+                  <a:srgbClr val="0F172A"/>
+                </a:solidFill>
+                <a:latin typeface="Ubuntu"/>
+              </a:rPr>
+              <a:t>1.23</a:t>
+            </a:r>
+            <a:r>
+              <a:rPr sz="1700" b="0" i="0">
+                <a:solidFill>
+                  <a:srgbClr val="0F172A"/>
+                </a:solidFill>
+                <a:latin typeface="Noto Sans Thai Looped"/>
+              </a:rPr>
+              <a:t>) — go.dev/blog/range-functions</a:t>
+            </a:r>
+          </a:p>
+          <a:p>
+            <a:pPr algn="l">
+              <a:spcAft>
+                <a:spcPts val="800"/>
+              </a:spcAft>
+            </a:pPr>
+            <a:r>
+              <a:rPr sz="1700" b="0" i="0">
+                <a:solidFill>
+                  <a:srgbClr val="0F172A"/>
+                </a:solidFill>
+                <a:latin typeface="Noto Sans Thai Looped"/>
+              </a:rPr>
+              <a:t>• Codewalk: First-Class Functions in Go — go.dev/doc/codewalk/functions</a:t>
+            </a:r>
+          </a:p>
+          <a:p>
+            <a:pPr algn="l">
+              <a:spcAft>
+                <a:spcPts val="800"/>
+              </a:spcAft>
+            </a:pPr>
+            <a:r>
+              <a:rPr sz="1700" b="1" i="0">
+                <a:solidFill>
+                  <a:srgbClr val="0F172A"/>
+                </a:solidFill>
+                <a:latin typeface="Noto Sans Thai Looped"/>
+              </a:rPr>
+              <a:t>• โค้ดทั้งหมดในวันนี้ (พร้อมเทสต์): ~/src/go-fp — go test ./... ผ่านทุก package</a:t>
+            </a:r>
+          </a:p>
+        </p:txBody>
+      </p:sp>
+      <p:sp>
+        <p:nvSpPr>
+          <p:cNvPr id="5" name="TextBox 4"/>
+          <p:cNvSpPr txBox="1"/>
+          <p:nvPr/>
+        </p:nvSpPr>
+        <p:spPr>
+          <a:xfrm>
+            <a:off x="548640" y="5760720"/>
+            <a:ext cx="11064240" cy="640080"/>
+          </a:xfrm>
+          <a:prstGeom prst="rect">
+            <a:avLst/>
+          </a:prstGeom>
+          <a:noFill/>
+        </p:spPr>
+        <p:txBody>
+          <a:bodyPr wrap="square">
+            <a:spAutoFit/>
+          </a:bodyPr>
+          <a:lstStyle/>
+          <a:p>
+            <a:pPr algn="l">
+              <a:spcAft>
+                <a:spcPts val="600"/>
+              </a:spcAft>
+            </a:pPr>
+            <a:r>
+              <a:rPr sz="2000" b="1" i="0">
+                <a:solidFill>
+                  <a:srgbClr val="0D9488"/>
+                </a:solidFill>
+                <a:latin typeface="Noto Sans Thai Looped"/>
+              </a:rPr>
+              <a:t>ขอบคุณครับ 🙏 — คำถามได้ตลอด</a:t>
+            </a:r>
+          </a:p>
+        </p:txBody>
+      </p:sp>
+    </p:spTree>
+  </p:cSld>
+  <p:clrMapOvr>
+    <a:masterClrMapping/>
+  </p:clrMapOvr>
+</p:sld>
+</file>
+
+<file path=ppt/slides/slide2.xml><?xml version="1.0" encoding="utf-8"?>
+<p:sld xmlns:a="http://schemas.openxmlformats.org/drawingml/2006/main" xmlns:p="http://schemas.openxmlformats.org/presentationml/2006/main" xmlns:r="http://schemas.openxmlformats.org/officeDocument/2006/relationships">
+  <p:cSld>
+    <p:spTree>
+      <p:nvGrpSpPr>
+        <p:cNvPr id="1" name=""/>
+        <p:cNvGrpSpPr/>
+        <p:nvPr/>
+      </p:nvGrpSpPr>
+      <p:grpSpPr/>
+      <p:sp>
+        <p:nvSpPr>
+          <p:cNvPr id="2" name="TextBox 1"/>
+          <p:cNvSpPr txBox="1"/>
+          <p:nvPr/>
+        </p:nvSpPr>
+        <p:spPr>
+          <a:xfrm>
+            <a:off x="502920" y="292608"/>
+            <a:ext cx="11155680" cy="914400"/>
+          </a:xfrm>
+          <a:prstGeom prst="rect">
+            <a:avLst/>
+          </a:prstGeom>
+          <a:noFill/>
+        </p:spPr>
+        <p:txBody>
+          <a:bodyPr wrap="square">
+            <a:spAutoFit/>
+          </a:bodyPr>
+          <a:lstStyle/>
+          <a:p>
+            <a:pPr algn="l">
+              <a:spcAft>
+                <a:spcPts val="200"/>
+              </a:spcAft>
+            </a:pPr>
+            <a:r>
+              <a:rPr sz="3000" b="1" i="0">
+                <a:solidFill>
+                  <a:srgbClr val="0F172A"/>
+                </a:solidFill>
+                <a:latin typeface="Noto Sans Thai Looped"/>
+              </a:rPr>
+              <a:t>จบ </a:t>
+            </a:r>
+            <a:r>
+              <a:rPr sz="3000" b="1" i="0">
+                <a:solidFill>
+                  <a:srgbClr val="0F172A"/>
+                </a:solidFill>
+                <a:latin typeface="Ubuntu"/>
+              </a:rPr>
+              <a:t>2</a:t>
+            </a:r>
+            <a:r>
+              <a:rPr sz="3000" b="1" i="0">
+                <a:solidFill>
+                  <a:srgbClr val="0F172A"/>
+                </a:solidFill>
+                <a:latin typeface="Noto Sans Thai Looped"/>
+              </a:rPr>
+              <a:t> ชั่วโมงนี้ คุณจะได้</a:t>
+            </a:r>
+          </a:p>
+          <a:p>
+            <a:pPr algn="l">
+              <a:spcAft>
+                <a:spcPts val="600"/>
+              </a:spcAft>
+            </a:pPr>
+            <a:r>
+              <a:rPr sz="1500" b="0" i="0">
+                <a:solidFill>
+                  <a:srgbClr val="64748B"/>
+                </a:solidFill>
+                <a:latin typeface="Noto Sans Thai Looped"/>
+              </a:rPr>
+              <a:t>เรียงจาก 'มองเป็น' → 'เขียนเป็น' → 'ใช้เป็น'</a:t>
+            </a:r>
+          </a:p>
+        </p:txBody>
+      </p:sp>
+      <p:sp>
+        <p:nvSpPr>
+          <p:cNvPr id="3" name="Rectangle 2"/>
+          <p:cNvSpPr/>
+          <p:nvPr/>
+        </p:nvSpPr>
+        <p:spPr>
+          <a:xfrm>
+            <a:off x="502920" y="1207008"/>
+            <a:ext cx="11201400" cy="27940"/>
+          </a:xfrm>
+          <a:prstGeom prst="rect">
+            <a:avLst/>
+          </a:prstGeom>
+          <a:solidFill>
+            <a:srgbClr val="0D9488"/>
+          </a:solidFill>
+          <a:ln>
+            <a:noFill/>
+          </a:ln>
+        </p:spPr>
+        <p:style>
+          <a:lnRef idx="1">
+            <a:schemeClr val="accent1"/>
+          </a:lnRef>
+          <a:fillRef idx="3">
+            <a:schemeClr val="accent1"/>
+          </a:fillRef>
+          <a:effectRef idx="2">
+            <a:schemeClr val="accent1"/>
+          </a:effectRef>
+          <a:fontRef idx="minor">
+            <a:schemeClr val="lt1"/>
+          </a:fontRef>
+        </p:style>
+        <p:txBody>
+          <a:bodyPr rtlCol="0" anchor="ctr"/>
+          <a:lstStyle/>
+          <a:p>
+            <a:pPr algn="ctr"/>
+          </a:p>
+        </p:txBody>
+      </p:sp>
+      <p:sp>
+        <p:nvSpPr>
+          <p:cNvPr id="4" name="TextBox 3"/>
+          <p:cNvSpPr txBox="1"/>
+          <p:nvPr/>
+        </p:nvSpPr>
+        <p:spPr>
+          <a:xfrm>
             <a:off x="548640" y="1600200"/>
             <a:ext cx="11064240" cy="4937760"/>
           </a:xfrm>
@@ -9237,7 +8619,7 @@
                 </a:solidFill>
                 <a:latin typeface="Noto Sans Thai Looped"/>
               </a:rPr>
-              <a:t>• และได้ลงมือ refactor โค้ดจริงด้วยมือตัวเอง </a:t>
+              <a:t>• และมีการบ้าน </a:t>
             </a:r>
             <a:r>
               <a:rPr sz="1900" b="1" i="0">
@@ -9255,7 +8637,7 @@
                 </a:solidFill>
                 <a:latin typeface="Noto Sans Thai Looped"/>
               </a:rPr>
-              <a:t> ชิ้น ในชั่วโมงสุดท้าย</a:t>
+              <a:t> ชิ้น ให้ได้ลอง refactor ด้วยมือตัวเองต่อที่บ้าน</a:t>
             </a:r>
           </a:p>
         </p:txBody>
